--- a/output/wordlabs-apply-3day.pptx
+++ b/output/wordlabs-apply-3day.pptx
@@ -6040,7 +6040,7 @@
                 <a:ea typeface="Calibri" pitchFamily="34" charset="-122"/>
                 <a:cs typeface="Calibri" pitchFamily="34" charset="-120"/>
               </a:rPr>
-              <a:t>Please </a:t>
+              <a:t>She had to </a:t>
             </a:r>
             <a:pPr algn="l" indent="0" marL="0">
               <a:buNone/>
@@ -6071,7 +6071,7 @@
                 <a:ea typeface="Calibri" pitchFamily="34" charset="-122"/>
                 <a:cs typeface="Calibri" pitchFamily="34" charset="-120"/>
               </a:rPr>
-              <a:t> the sunscreen carefully, because the </a:t>
+              <a:t> her paint carefully, making sure the </a:t>
             </a:r>
             <a:pPr algn="l" indent="0" marL="0">
               <a:buNone/>
@@ -6102,7 +6102,7 @@
                 <a:ea typeface="Calibri" pitchFamily="34" charset="-122"/>
                 <a:cs typeface="Calibri" pitchFamily="34" charset="-120"/>
               </a:rPr>
-              <a:t> must cover your whole face.</a:t>
+              <a:t> covered every part of the wall.</a:t>
             </a:r>
             <a:endParaRPr lang="en-US" sz="1800" dirty="0"/>
           </a:p>
@@ -12512,7 +12512,7 @@
                 <a:ea typeface="Calibri" pitchFamily="34" charset="-122"/>
                 <a:cs typeface="Calibri" pitchFamily="34" charset="-120"/>
               </a:rPr>
-              <a:t>'y' changes to 'i' before suffix</a:t>
+              <a:t>'y' changes to 'ic' before suffix</a:t>
             </a:r>
             <a:endParaRPr lang="en-US" sz="700" dirty="0"/>
           </a:p>
@@ -12624,7 +12624,7 @@
                 <a:ea typeface="Calibri" pitchFamily="34" charset="-122"/>
                 <a:cs typeface="Calibri" pitchFamily="34" charset="-120"/>
               </a:rPr>
-              <a:t>action or process</a:t>
+              <a:t>the act or result of</a:t>
             </a:r>
             <a:endParaRPr lang="en-US" sz="850" dirty="0"/>
           </a:p>
@@ -13536,7 +13536,7 @@
                 <a:ea typeface="Calibri" pitchFamily="34" charset="-122"/>
                 <a:cs typeface="Calibri" pitchFamily="34" charset="-120"/>
               </a:rPr>
-              <a:t>'y' changes to 'i' before suffix</a:t>
+              <a:t>'y' changes to 'ic' before suffix</a:t>
             </a:r>
             <a:endParaRPr lang="en-US" sz="700" dirty="0"/>
           </a:p>
@@ -13648,7 +13648,7 @@
                 <a:ea typeface="Calibri" pitchFamily="34" charset="-122"/>
                 <a:cs typeface="Calibri" pitchFamily="34" charset="-120"/>
               </a:rPr>
-              <a:t>action or process</a:t>
+              <a:t>the act or result of</a:t>
             </a:r>
             <a:endParaRPr lang="en-US" sz="850" dirty="0"/>
           </a:p>
@@ -15167,7 +15167,7 @@
                 <a:ea typeface="Calibri" pitchFamily="34" charset="-122"/>
                 <a:cs typeface="Calibri" pitchFamily="34" charset="-120"/>
               </a:rPr>
-              <a:t>'y' changes to 'i' before suffix</a:t>
+              <a:t>'y' changes to 'ic' before suffix</a:t>
             </a:r>
             <a:endParaRPr lang="en-US" sz="700" dirty="0"/>
           </a:p>
@@ -15279,7 +15279,7 @@
                 <a:ea typeface="Calibri" pitchFamily="34" charset="-122"/>
                 <a:cs typeface="Calibri" pitchFamily="34" charset="-120"/>
               </a:rPr>
-              <a:t>action or process</a:t>
+              <a:t>the act or result of</a:t>
             </a:r>
             <a:endParaRPr lang="en-US" sz="850" dirty="0"/>
           </a:p>
@@ -17844,7 +17844,7 @@
                 <a:ea typeface="Calibri" pitchFamily="34" charset="-122"/>
                 <a:cs typeface="Calibri" pitchFamily="34" charset="-120"/>
               </a:rPr>
-              <a:t>The </a:t>
+              <a:t>The scientist </a:t>
             </a:r>
             <a:pPr algn="l" indent="0" marL="0">
               <a:buNone/>
@@ -17861,7 +17861,7 @@
                 <a:ea typeface="Calibri" pitchFamily="34" charset="-122"/>
                 <a:cs typeface="Calibri" pitchFamily="34" charset="-120"/>
               </a:rPr>
-              <a:t>applicant</a:t>
+              <a:t>misapplied</a:t>
             </a:r>
             <a:pPr algn="l" indent="0" marL="0">
               <a:buNone/>
@@ -17875,7 +17875,7 @@
                 <a:ea typeface="Calibri" pitchFamily="34" charset="-122"/>
                 <a:cs typeface="Calibri" pitchFamily="34" charset="-120"/>
               </a:rPr>
-              <a:t> was </a:t>
+              <a:t> the formula, so his findings were not </a:t>
             </a:r>
             <a:pPr algn="l" indent="0" marL="0">
               <a:buNone/>
@@ -17892,7 +17892,7 @@
                 <a:ea typeface="Calibri" pitchFamily="34" charset="-122"/>
                 <a:cs typeface="Calibri" pitchFamily="34" charset="-120"/>
               </a:rPr>
-              <a:t>reapplying</a:t>
+              <a:t>applicable</a:t>
             </a:r>
             <a:pPr algn="l" indent="0" marL="0">
               <a:buNone/>
@@ -17906,7 +17906,7 @@
                 <a:ea typeface="Calibri" pitchFamily="34" charset="-122"/>
                 <a:cs typeface="Calibri" pitchFamily="34" charset="-120"/>
               </a:rPr>
-              <a:t> for the grant, but she wondered if the rules were still </a:t>
+              <a:t>, and the </a:t>
             </a:r>
             <a:pPr algn="l" indent="0" marL="0">
               <a:buNone/>
@@ -17923,7 +17923,7 @@
                 <a:ea typeface="Calibri" pitchFamily="34" charset="-122"/>
                 <a:cs typeface="Calibri" pitchFamily="34" charset="-120"/>
               </a:rPr>
-              <a:t>applicable</a:t>
+              <a:t>applicant</a:t>
             </a:r>
             <a:pPr algn="l" indent="0" marL="0">
               <a:buNone/>
@@ -17937,7 +17937,7 @@
                 <a:ea typeface="Calibri" pitchFamily="34" charset="-122"/>
                 <a:cs typeface="Calibri" pitchFamily="34" charset="-120"/>
               </a:rPr>
-              <a:t> to her project.</a:t>
+              <a:t> had to redo the experiment.</a:t>
             </a:r>
             <a:endParaRPr lang="en-US" sz="1800" dirty="0"/>
           </a:p>
@@ -18092,7 +18092,7 @@
                 <a:ea typeface="Trebuchet MS" pitchFamily="34" charset="-122"/>
                 <a:cs typeface="Trebuchet MS" pitchFamily="34" charset="-120"/>
               </a:rPr>
-              <a:t>applicant</a:t>
+              <a:t>misapplied</a:t>
             </a:r>
             <a:endParaRPr lang="en-US" sz="1400" dirty="0"/>
           </a:p>
@@ -18220,7 +18220,7 @@
                 <a:ea typeface="Trebuchet MS" pitchFamily="34" charset="-122"/>
                 <a:cs typeface="Trebuchet MS" pitchFamily="34" charset="-120"/>
               </a:rPr>
-              <a:t>reapplying</a:t>
+              <a:t>applicable</a:t>
             </a:r>
             <a:endParaRPr lang="en-US" sz="1400" dirty="0"/>
           </a:p>
@@ -18348,7 +18348,7 @@
                 <a:ea typeface="Trebuchet MS" pitchFamily="34" charset="-122"/>
                 <a:cs typeface="Trebuchet MS" pitchFamily="34" charset="-120"/>
               </a:rPr>
-              <a:t>applicable</a:t>
+              <a:t>applicant</a:t>
             </a:r>
             <a:endParaRPr lang="en-US" sz="1400" dirty="0"/>
           </a:p>
@@ -18818,7 +18818,7 @@
                 <a:ea typeface="Trebuchet MS" pitchFamily="34" charset="-122"/>
                 <a:cs typeface="Trebuchet MS" pitchFamily="34" charset="-120"/>
               </a:rPr>
-              <a:t>applicant</a:t>
+              <a:t>misapplied</a:t>
             </a:r>
             <a:endParaRPr lang="en-US" sz="2800" dirty="0"/>
           </a:p>
@@ -19645,7 +19645,7 @@
                 <a:ea typeface="Trebuchet MS" pitchFamily="34" charset="-122"/>
                 <a:cs typeface="Trebuchet MS" pitchFamily="34" charset="-120"/>
               </a:rPr>
-              <a:t>applicant</a:t>
+              <a:t>misapplied</a:t>
             </a:r>
             <a:endParaRPr lang="en-US" sz="2800" dirty="0"/>
           </a:p>
@@ -19725,7 +19725,7 @@
         </p:nvSpPr>
         <p:spPr>
           <a:xfrm>
-            <a:off x="2938272" y="2258568"/>
+            <a:off x="2221992" y="2258568"/>
             <a:ext cx="1828800" cy="292608"/>
           </a:xfrm>
           <a:prstGeom prst="rect">
@@ -19734,11 +19734,11 @@
             </a:avLst>
           </a:prstGeom>
           <a:solidFill>
-            <a:srgbClr val="CCFBF1"/>
+            <a:srgbClr val="DDD6FE"/>
           </a:solidFill>
           <a:ln w="19050">
             <a:solidFill>
-              <a:srgbClr val="0D9488"/>
+              <a:srgbClr val="7C3AED"/>
             </a:solidFill>
             <a:prstDash val="solid"/>
           </a:ln>
@@ -19759,7 +19759,7 @@
         </p:nvSpPr>
         <p:spPr>
           <a:xfrm>
-            <a:off x="2938272" y="2258568"/>
+            <a:off x="2221992" y="2258568"/>
             <a:ext cx="1828800" cy="292608"/>
           </a:xfrm>
           <a:prstGeom prst="rect">
@@ -19778,13 +19778,13 @@
             <a:r>
               <a:rPr lang="en-US" sz="1300" b="1" dirty="0">
                 <a:solidFill>
-                  <a:srgbClr val="0F766E"/>
+                  <a:srgbClr val="4C1D95"/>
                 </a:solidFill>
                 <a:latin typeface="Trebuchet MS" pitchFamily="34" charset="0"/>
                 <a:ea typeface="Trebuchet MS" pitchFamily="34" charset="-122"/>
                 <a:cs typeface="Trebuchet MS" pitchFamily="34" charset="-120"/>
               </a:rPr>
-              <a:t>apply</a:t>
+              <a:t>mis</a:t>
             </a:r>
             <a:endParaRPr lang="en-US" sz="1300" dirty="0"/>
           </a:p>
@@ -19798,7 +19798,7 @@
         </p:nvSpPr>
         <p:spPr>
           <a:xfrm>
-            <a:off x="2938272" y="2569464"/>
+            <a:off x="2221992" y="2569464"/>
             <a:ext cx="1828800" cy="201168"/>
           </a:xfrm>
           <a:prstGeom prst="rect">
@@ -19823,7 +19823,7 @@
                 <a:ea typeface="Calibri" pitchFamily="34" charset="-122"/>
                 <a:cs typeface="Calibri" pitchFamily="34" charset="-120"/>
               </a:rPr>
-              <a:t>to put or place onto</a:t>
+              <a:t>wrongly or badly</a:t>
             </a:r>
             <a:endParaRPr lang="en-US" sz="850" dirty="0"/>
           </a:p>
@@ -19831,52 +19831,13 @@
       </p:sp>
       <p:sp>
         <p:nvSpPr>
-          <p:cNvPr id="19" name="Text 17"/>
-          <p:cNvSpPr/>
-          <p:nvPr/>
-        </p:nvSpPr>
-        <p:spPr>
-          <a:xfrm>
-            <a:off x="2938272" y="2752344"/>
-            <a:ext cx="1828800" cy="182880"/>
-          </a:xfrm>
-          <a:prstGeom prst="rect">
-            <a:avLst/>
-          </a:prstGeom>
-          <a:noFill/>
-          <a:ln/>
-        </p:spPr>
-        <p:txBody>
-          <a:bodyPr wrap="square" lIns="0" tIns="0" rIns="0" bIns="0" rtlCol="0" anchor="t"/>
-          <a:lstStyle/>
-          <a:p>
-            <a:pPr algn="ctr" indent="0" marL="0">
-              <a:buNone/>
-            </a:pPr>
-            <a:r>
-              <a:rPr lang="en-US" sz="700" i="1" dirty="0">
-                <a:solidFill>
-                  <a:srgbClr val="94A3B8"/>
-                </a:solidFill>
-                <a:latin typeface="Calibri" pitchFamily="34" charset="0"/>
-                <a:ea typeface="Calibri" pitchFamily="34" charset="-122"/>
-                <a:cs typeface="Calibri" pitchFamily="34" charset="-120"/>
-              </a:rPr>
-              <a:t>'y' changes to 'i' before suffix</a:t>
-            </a:r>
-            <a:endParaRPr lang="en-US" sz="700" dirty="0"/>
-          </a:p>
-        </p:txBody>
-      </p:sp>
-      <p:sp>
-        <p:nvSpPr>
-          <p:cNvPr id="20" name="Shape 18"/>
-          <p:cNvSpPr/>
-          <p:nvPr/>
-        </p:nvSpPr>
-        <p:spPr>
-          <a:xfrm>
-            <a:off x="5803392" y="2258568"/>
+          <p:cNvPr id="19" name="Shape 17"/>
+          <p:cNvSpPr/>
+          <p:nvPr/>
+        </p:nvSpPr>
+        <p:spPr>
+          <a:xfrm>
+            <a:off x="4370832" y="2258568"/>
             <a:ext cx="1828800" cy="292608"/>
           </a:xfrm>
           <a:prstGeom prst="rect">
@@ -19885,11 +19846,11 @@
             </a:avLst>
           </a:prstGeom>
           <a:solidFill>
-            <a:srgbClr val="FCE7F3"/>
+            <a:srgbClr val="CCFBF1"/>
           </a:solidFill>
           <a:ln w="19050">
             <a:solidFill>
-              <a:srgbClr val="DB2777"/>
+              <a:srgbClr val="0D9488"/>
             </a:solidFill>
             <a:prstDash val="solid"/>
           </a:ln>
@@ -19904,13 +19865,13 @@
       </p:sp>
       <p:sp>
         <p:nvSpPr>
-          <p:cNvPr id="21" name="Text 19"/>
-          <p:cNvSpPr/>
-          <p:nvPr/>
-        </p:nvSpPr>
-        <p:spPr>
-          <a:xfrm>
-            <a:off x="5803392" y="2258568"/>
+          <p:cNvPr id="20" name="Text 18"/>
+          <p:cNvSpPr/>
+          <p:nvPr/>
+        </p:nvSpPr>
+        <p:spPr>
+          <a:xfrm>
+            <a:off x="4370832" y="2258568"/>
             <a:ext cx="1828800" cy="292608"/>
           </a:xfrm>
           <a:prstGeom prst="rect">
@@ -19929,13 +19890,13 @@
             <a:r>
               <a:rPr lang="en-US" sz="1300" b="1" dirty="0">
                 <a:solidFill>
-                  <a:srgbClr val="9D174D"/>
+                  <a:srgbClr val="0F766E"/>
                 </a:solidFill>
                 <a:latin typeface="Trebuchet MS" pitchFamily="34" charset="0"/>
                 <a:ea typeface="Trebuchet MS" pitchFamily="34" charset="-122"/>
                 <a:cs typeface="Trebuchet MS" pitchFamily="34" charset="-120"/>
               </a:rPr>
-              <a:t>ant</a:t>
+              <a:t>apply</a:t>
             </a:r>
             <a:endParaRPr lang="en-US" sz="1300" dirty="0"/>
           </a:p>
@@ -19943,13 +19904,13 @@
       </p:sp>
       <p:sp>
         <p:nvSpPr>
-          <p:cNvPr id="22" name="Text 20"/>
-          <p:cNvSpPr/>
-          <p:nvPr/>
-        </p:nvSpPr>
-        <p:spPr>
-          <a:xfrm>
-            <a:off x="5803392" y="2569464"/>
+          <p:cNvPr id="21" name="Text 19"/>
+          <p:cNvSpPr/>
+          <p:nvPr/>
+        </p:nvSpPr>
+        <p:spPr>
+          <a:xfrm>
+            <a:off x="4370832" y="2569464"/>
             <a:ext cx="1828800" cy="201168"/>
           </a:xfrm>
           <a:prstGeom prst="rect">
@@ -19974,7 +19935,7 @@
                 <a:ea typeface="Calibri" pitchFamily="34" charset="-122"/>
                 <a:cs typeface="Calibri" pitchFamily="34" charset="-120"/>
               </a:rPr>
-              <a:t>a person who does something</a:t>
+              <a:t>to put or place onto</a:t>
             </a:r>
             <a:endParaRPr lang="en-US" sz="850" dirty="0"/>
           </a:p>
@@ -19982,7 +19943,158 @@
       </p:sp>
       <p:sp>
         <p:nvSpPr>
+          <p:cNvPr id="22" name="Text 20"/>
+          <p:cNvSpPr/>
+          <p:nvPr/>
+        </p:nvSpPr>
+        <p:spPr>
+          <a:xfrm>
+            <a:off x="4370832" y="2752344"/>
+            <a:ext cx="1828800" cy="182880"/>
+          </a:xfrm>
+          <a:prstGeom prst="rect">
+            <a:avLst/>
+          </a:prstGeom>
+          <a:noFill/>
+          <a:ln/>
+        </p:spPr>
+        <p:txBody>
+          <a:bodyPr wrap="square" lIns="0" tIns="0" rIns="0" bIns="0" rtlCol="0" anchor="t"/>
+          <a:lstStyle/>
+          <a:p>
+            <a:pPr algn="ctr" indent="0" marL="0">
+              <a:buNone/>
+            </a:pPr>
+            <a:r>
+              <a:rPr lang="en-US" sz="700" i="1" dirty="0">
+                <a:solidFill>
+                  <a:srgbClr val="94A3B8"/>
+                </a:solidFill>
+                <a:latin typeface="Calibri" pitchFamily="34" charset="0"/>
+                <a:ea typeface="Calibri" pitchFamily="34" charset="-122"/>
+                <a:cs typeface="Calibri" pitchFamily="34" charset="-120"/>
+              </a:rPr>
+              <a:t>'y' changes to 'i' before suffix</a:t>
+            </a:r>
+            <a:endParaRPr lang="en-US" sz="700" dirty="0"/>
+          </a:p>
+        </p:txBody>
+      </p:sp>
+      <p:sp>
+        <p:nvSpPr>
           <p:cNvPr id="23" name="Shape 21"/>
+          <p:cNvSpPr/>
+          <p:nvPr/>
+        </p:nvSpPr>
+        <p:spPr>
+          <a:xfrm>
+            <a:off x="6519672" y="2258568"/>
+            <a:ext cx="1828800" cy="292608"/>
+          </a:xfrm>
+          <a:prstGeom prst="rect">
+            <a:avLst>
+              <a:gd name="adj" fmla="val 25000"/>
+            </a:avLst>
+          </a:prstGeom>
+          <a:solidFill>
+            <a:srgbClr val="FCE7F3"/>
+          </a:solidFill>
+          <a:ln w="19050">
+            <a:solidFill>
+              <a:srgbClr val="DB2777"/>
+            </a:solidFill>
+            <a:prstDash val="solid"/>
+          </a:ln>
+          <a:effectLst>
+            <a:outerShdw sx="100000" sy="100000" kx="0" ky="0" algn="bl" rotWithShape="0" blurRad="101600" dist="38100" dir="8100000">
+              <a:srgbClr val="000000">
+                <a:alpha val="12000"/>
+              </a:srgbClr>
+            </a:outerShdw>
+          </a:effectLst>
+        </p:spPr>
+      </p:sp>
+      <p:sp>
+        <p:nvSpPr>
+          <p:cNvPr id="24" name="Text 22"/>
+          <p:cNvSpPr/>
+          <p:nvPr/>
+        </p:nvSpPr>
+        <p:spPr>
+          <a:xfrm>
+            <a:off x="6519672" y="2258568"/>
+            <a:ext cx="1828800" cy="292608"/>
+          </a:xfrm>
+          <a:prstGeom prst="rect">
+            <a:avLst/>
+          </a:prstGeom>
+          <a:noFill/>
+          <a:ln/>
+        </p:spPr>
+        <p:txBody>
+          <a:bodyPr wrap="square" lIns="0" tIns="0" rIns="0" bIns="0" rtlCol="0" anchor="ctr"/>
+          <a:lstStyle/>
+          <a:p>
+            <a:pPr algn="ctr" indent="0" marL="0">
+              <a:buNone/>
+            </a:pPr>
+            <a:r>
+              <a:rPr lang="en-US" sz="1300" b="1" dirty="0">
+                <a:solidFill>
+                  <a:srgbClr val="9D174D"/>
+                </a:solidFill>
+                <a:latin typeface="Trebuchet MS" pitchFamily="34" charset="0"/>
+                <a:ea typeface="Trebuchet MS" pitchFamily="34" charset="-122"/>
+                <a:cs typeface="Trebuchet MS" pitchFamily="34" charset="-120"/>
+              </a:rPr>
+              <a:t>ed</a:t>
+            </a:r>
+            <a:endParaRPr lang="en-US" sz="1300" dirty="0"/>
+          </a:p>
+        </p:txBody>
+      </p:sp>
+      <p:sp>
+        <p:nvSpPr>
+          <p:cNvPr id="25" name="Text 23"/>
+          <p:cNvSpPr/>
+          <p:nvPr/>
+        </p:nvSpPr>
+        <p:spPr>
+          <a:xfrm>
+            <a:off x="6519672" y="2569464"/>
+            <a:ext cx="1828800" cy="201168"/>
+          </a:xfrm>
+          <a:prstGeom prst="rect">
+            <a:avLst/>
+          </a:prstGeom>
+          <a:noFill/>
+          <a:ln/>
+        </p:spPr>
+        <p:txBody>
+          <a:bodyPr wrap="square" lIns="0" tIns="0" rIns="0" bIns="0" rtlCol="0" anchor="t"/>
+          <a:lstStyle/>
+          <a:p>
+            <a:pPr algn="ctr" indent="0" marL="0">
+              <a:buNone/>
+            </a:pPr>
+            <a:r>
+              <a:rPr lang="en-US" sz="850" dirty="0">
+                <a:solidFill>
+                  <a:srgbClr val="475569"/>
+                </a:solidFill>
+                <a:latin typeface="Calibri" pitchFamily="34" charset="0"/>
+                <a:ea typeface="Calibri" pitchFamily="34" charset="-122"/>
+                <a:cs typeface="Calibri" pitchFamily="34" charset="-120"/>
+              </a:rPr>
+              <a:t>past tense</a:t>
+            </a:r>
+            <a:endParaRPr lang="en-US" sz="850" dirty="0"/>
+          </a:p>
+        </p:txBody>
+      </p:sp>
+      <p:sp>
+        <p:nvSpPr>
+          <p:cNvPr id="26" name="Shape 24"/>
           <p:cNvSpPr/>
           <p:nvPr/>
         </p:nvSpPr>
@@ -20009,7 +20121,7 @@
       </p:sp>
       <p:sp>
         <p:nvSpPr>
-          <p:cNvPr id="24" name="Text 22"/>
+          <p:cNvPr id="27" name="Text 25"/>
           <p:cNvSpPr/>
           <p:nvPr/>
         </p:nvSpPr>
@@ -20048,7 +20160,7 @@
       </p:sp>
       <p:sp>
         <p:nvSpPr>
-          <p:cNvPr id="25" name="Shape 23"/>
+          <p:cNvPr id="28" name="Shape 26"/>
           <p:cNvSpPr/>
           <p:nvPr/>
         </p:nvSpPr>
@@ -20075,7 +20187,7 @@
       </p:sp>
       <p:sp>
         <p:nvSpPr>
-          <p:cNvPr id="26" name="Text 24"/>
+          <p:cNvPr id="29" name="Text 27"/>
           <p:cNvSpPr/>
           <p:nvPr/>
         </p:nvSpPr>
@@ -20114,7 +20226,7 @@
       </p:sp>
       <p:sp>
         <p:nvSpPr>
-          <p:cNvPr id="27" name="Shape 25"/>
+          <p:cNvPr id="30" name="Shape 28"/>
           <p:cNvSpPr/>
           <p:nvPr/>
         </p:nvSpPr>
@@ -20141,7 +20253,7 @@
       </p:sp>
       <p:sp>
         <p:nvSpPr>
-          <p:cNvPr id="28" name="Text 26"/>
+          <p:cNvPr id="31" name="Text 29"/>
           <p:cNvSpPr/>
           <p:nvPr/>
         </p:nvSpPr>
@@ -20180,7 +20292,7 @@
       </p:sp>
       <p:sp>
         <p:nvSpPr>
-          <p:cNvPr id="29" name="Shape 27"/>
+          <p:cNvPr id="32" name="Shape 30"/>
           <p:cNvSpPr/>
           <p:nvPr/>
         </p:nvSpPr>
@@ -20207,7 +20319,7 @@
       </p:sp>
       <p:sp>
         <p:nvSpPr>
-          <p:cNvPr id="30" name="Text 28"/>
+          <p:cNvPr id="33" name="Text 31"/>
           <p:cNvSpPr/>
           <p:nvPr/>
         </p:nvSpPr>
@@ -20669,7 +20781,7 @@
                 <a:ea typeface="Trebuchet MS" pitchFamily="34" charset="-122"/>
                 <a:cs typeface="Trebuchet MS" pitchFamily="34" charset="-120"/>
               </a:rPr>
-              <a:t>applicant</a:t>
+              <a:t>misapplied</a:t>
             </a:r>
             <a:endParaRPr lang="en-US" sz="2800" dirty="0"/>
           </a:p>
@@ -20749,7 +20861,7 @@
         </p:nvSpPr>
         <p:spPr>
           <a:xfrm>
-            <a:off x="2938272" y="2258568"/>
+            <a:off x="2221992" y="2258568"/>
             <a:ext cx="1828800" cy="292608"/>
           </a:xfrm>
           <a:prstGeom prst="rect">
@@ -20758,11 +20870,11 @@
             </a:avLst>
           </a:prstGeom>
           <a:solidFill>
-            <a:srgbClr val="CCFBF1"/>
+            <a:srgbClr val="DDD6FE"/>
           </a:solidFill>
           <a:ln w="19050">
             <a:solidFill>
-              <a:srgbClr val="0D9488"/>
+              <a:srgbClr val="7C3AED"/>
             </a:solidFill>
             <a:prstDash val="solid"/>
           </a:ln>
@@ -20783,7 +20895,7 @@
         </p:nvSpPr>
         <p:spPr>
           <a:xfrm>
-            <a:off x="2938272" y="2258568"/>
+            <a:off x="2221992" y="2258568"/>
             <a:ext cx="1828800" cy="292608"/>
           </a:xfrm>
           <a:prstGeom prst="rect">
@@ -20802,13 +20914,13 @@
             <a:r>
               <a:rPr lang="en-US" sz="1300" b="1" dirty="0">
                 <a:solidFill>
-                  <a:srgbClr val="0F766E"/>
+                  <a:srgbClr val="4C1D95"/>
                 </a:solidFill>
                 <a:latin typeface="Trebuchet MS" pitchFamily="34" charset="0"/>
                 <a:ea typeface="Trebuchet MS" pitchFamily="34" charset="-122"/>
                 <a:cs typeface="Trebuchet MS" pitchFamily="34" charset="-120"/>
               </a:rPr>
-              <a:t>apply</a:t>
+              <a:t>mis</a:t>
             </a:r>
             <a:endParaRPr lang="en-US" sz="1300" dirty="0"/>
           </a:p>
@@ -20822,7 +20934,7 @@
         </p:nvSpPr>
         <p:spPr>
           <a:xfrm>
-            <a:off x="2938272" y="2569464"/>
+            <a:off x="2221992" y="2569464"/>
             <a:ext cx="1828800" cy="201168"/>
           </a:xfrm>
           <a:prstGeom prst="rect">
@@ -20847,7 +20959,7 @@
                 <a:ea typeface="Calibri" pitchFamily="34" charset="-122"/>
                 <a:cs typeface="Calibri" pitchFamily="34" charset="-120"/>
               </a:rPr>
-              <a:t>to put or place onto</a:t>
+              <a:t>wrongly or badly</a:t>
             </a:r>
             <a:endParaRPr lang="en-US" sz="850" dirty="0"/>
           </a:p>
@@ -20855,52 +20967,13 @@
       </p:sp>
       <p:sp>
         <p:nvSpPr>
-          <p:cNvPr id="19" name="Text 17"/>
-          <p:cNvSpPr/>
-          <p:nvPr/>
-        </p:nvSpPr>
-        <p:spPr>
-          <a:xfrm>
-            <a:off x="2938272" y="2752344"/>
-            <a:ext cx="1828800" cy="182880"/>
-          </a:xfrm>
-          <a:prstGeom prst="rect">
-            <a:avLst/>
-          </a:prstGeom>
-          <a:noFill/>
-          <a:ln/>
-        </p:spPr>
-        <p:txBody>
-          <a:bodyPr wrap="square" lIns="0" tIns="0" rIns="0" bIns="0" rtlCol="0" anchor="t"/>
-          <a:lstStyle/>
-          <a:p>
-            <a:pPr algn="ctr" indent="0" marL="0">
-              <a:buNone/>
-            </a:pPr>
-            <a:r>
-              <a:rPr lang="en-US" sz="700" i="1" dirty="0">
-                <a:solidFill>
-                  <a:srgbClr val="94A3B8"/>
-                </a:solidFill>
-                <a:latin typeface="Calibri" pitchFamily="34" charset="0"/>
-                <a:ea typeface="Calibri" pitchFamily="34" charset="-122"/>
-                <a:cs typeface="Calibri" pitchFamily="34" charset="-120"/>
-              </a:rPr>
-              <a:t>'y' changes to 'i' before suffix</a:t>
-            </a:r>
-            <a:endParaRPr lang="en-US" sz="700" dirty="0"/>
-          </a:p>
-        </p:txBody>
-      </p:sp>
-      <p:sp>
-        <p:nvSpPr>
-          <p:cNvPr id="20" name="Shape 18"/>
-          <p:cNvSpPr/>
-          <p:nvPr/>
-        </p:nvSpPr>
-        <p:spPr>
-          <a:xfrm>
-            <a:off x="5803392" y="2258568"/>
+          <p:cNvPr id="19" name="Shape 17"/>
+          <p:cNvSpPr/>
+          <p:nvPr/>
+        </p:nvSpPr>
+        <p:spPr>
+          <a:xfrm>
+            <a:off x="4370832" y="2258568"/>
             <a:ext cx="1828800" cy="292608"/>
           </a:xfrm>
           <a:prstGeom prst="rect">
@@ -20909,11 +20982,11 @@
             </a:avLst>
           </a:prstGeom>
           <a:solidFill>
-            <a:srgbClr val="FCE7F3"/>
+            <a:srgbClr val="CCFBF1"/>
           </a:solidFill>
           <a:ln w="19050">
             <a:solidFill>
-              <a:srgbClr val="DB2777"/>
+              <a:srgbClr val="0D9488"/>
             </a:solidFill>
             <a:prstDash val="solid"/>
           </a:ln>
@@ -20928,13 +21001,13 @@
       </p:sp>
       <p:sp>
         <p:nvSpPr>
-          <p:cNvPr id="21" name="Text 19"/>
-          <p:cNvSpPr/>
-          <p:nvPr/>
-        </p:nvSpPr>
-        <p:spPr>
-          <a:xfrm>
-            <a:off x="5803392" y="2258568"/>
+          <p:cNvPr id="20" name="Text 18"/>
+          <p:cNvSpPr/>
+          <p:nvPr/>
+        </p:nvSpPr>
+        <p:spPr>
+          <a:xfrm>
+            <a:off x="4370832" y="2258568"/>
             <a:ext cx="1828800" cy="292608"/>
           </a:xfrm>
           <a:prstGeom prst="rect">
@@ -20953,13 +21026,13 @@
             <a:r>
               <a:rPr lang="en-US" sz="1300" b="1" dirty="0">
                 <a:solidFill>
-                  <a:srgbClr val="9D174D"/>
+                  <a:srgbClr val="0F766E"/>
                 </a:solidFill>
                 <a:latin typeface="Trebuchet MS" pitchFamily="34" charset="0"/>
                 <a:ea typeface="Trebuchet MS" pitchFamily="34" charset="-122"/>
                 <a:cs typeface="Trebuchet MS" pitchFamily="34" charset="-120"/>
               </a:rPr>
-              <a:t>ant</a:t>
+              <a:t>apply</a:t>
             </a:r>
             <a:endParaRPr lang="en-US" sz="1300" dirty="0"/>
           </a:p>
@@ -20967,13 +21040,13 @@
       </p:sp>
       <p:sp>
         <p:nvSpPr>
-          <p:cNvPr id="22" name="Text 20"/>
-          <p:cNvSpPr/>
-          <p:nvPr/>
-        </p:nvSpPr>
-        <p:spPr>
-          <a:xfrm>
-            <a:off x="5803392" y="2569464"/>
+          <p:cNvPr id="21" name="Text 19"/>
+          <p:cNvSpPr/>
+          <p:nvPr/>
+        </p:nvSpPr>
+        <p:spPr>
+          <a:xfrm>
+            <a:off x="4370832" y="2569464"/>
             <a:ext cx="1828800" cy="201168"/>
           </a:xfrm>
           <a:prstGeom prst="rect">
@@ -20998,7 +21071,7 @@
                 <a:ea typeface="Calibri" pitchFamily="34" charset="-122"/>
                 <a:cs typeface="Calibri" pitchFamily="34" charset="-120"/>
               </a:rPr>
-              <a:t>a person who does something</a:t>
+              <a:t>to put or place onto</a:t>
             </a:r>
             <a:endParaRPr lang="en-US" sz="850" dirty="0"/>
           </a:p>
@@ -21006,7 +21079,158 @@
       </p:sp>
       <p:sp>
         <p:nvSpPr>
+          <p:cNvPr id="22" name="Text 20"/>
+          <p:cNvSpPr/>
+          <p:nvPr/>
+        </p:nvSpPr>
+        <p:spPr>
+          <a:xfrm>
+            <a:off x="4370832" y="2752344"/>
+            <a:ext cx="1828800" cy="182880"/>
+          </a:xfrm>
+          <a:prstGeom prst="rect">
+            <a:avLst/>
+          </a:prstGeom>
+          <a:noFill/>
+          <a:ln/>
+        </p:spPr>
+        <p:txBody>
+          <a:bodyPr wrap="square" lIns="0" tIns="0" rIns="0" bIns="0" rtlCol="0" anchor="t"/>
+          <a:lstStyle/>
+          <a:p>
+            <a:pPr algn="ctr" indent="0" marL="0">
+              <a:buNone/>
+            </a:pPr>
+            <a:r>
+              <a:rPr lang="en-US" sz="700" i="1" dirty="0">
+                <a:solidFill>
+                  <a:srgbClr val="94A3B8"/>
+                </a:solidFill>
+                <a:latin typeface="Calibri" pitchFamily="34" charset="0"/>
+                <a:ea typeface="Calibri" pitchFamily="34" charset="-122"/>
+                <a:cs typeface="Calibri" pitchFamily="34" charset="-120"/>
+              </a:rPr>
+              <a:t>'y' changes to 'i' before suffix</a:t>
+            </a:r>
+            <a:endParaRPr lang="en-US" sz="700" dirty="0"/>
+          </a:p>
+        </p:txBody>
+      </p:sp>
+      <p:sp>
+        <p:nvSpPr>
           <p:cNvPr id="23" name="Shape 21"/>
+          <p:cNvSpPr/>
+          <p:nvPr/>
+        </p:nvSpPr>
+        <p:spPr>
+          <a:xfrm>
+            <a:off x="6519672" y="2258568"/>
+            <a:ext cx="1828800" cy="292608"/>
+          </a:xfrm>
+          <a:prstGeom prst="rect">
+            <a:avLst>
+              <a:gd name="adj" fmla="val 25000"/>
+            </a:avLst>
+          </a:prstGeom>
+          <a:solidFill>
+            <a:srgbClr val="FCE7F3"/>
+          </a:solidFill>
+          <a:ln w="19050">
+            <a:solidFill>
+              <a:srgbClr val="DB2777"/>
+            </a:solidFill>
+            <a:prstDash val="solid"/>
+          </a:ln>
+          <a:effectLst>
+            <a:outerShdw sx="100000" sy="100000" kx="0" ky="0" algn="bl" rotWithShape="0" blurRad="101600" dist="38100" dir="8100000">
+              <a:srgbClr val="000000">
+                <a:alpha val="12000"/>
+              </a:srgbClr>
+            </a:outerShdw>
+          </a:effectLst>
+        </p:spPr>
+      </p:sp>
+      <p:sp>
+        <p:nvSpPr>
+          <p:cNvPr id="24" name="Text 22"/>
+          <p:cNvSpPr/>
+          <p:nvPr/>
+        </p:nvSpPr>
+        <p:spPr>
+          <a:xfrm>
+            <a:off x="6519672" y="2258568"/>
+            <a:ext cx="1828800" cy="292608"/>
+          </a:xfrm>
+          <a:prstGeom prst="rect">
+            <a:avLst/>
+          </a:prstGeom>
+          <a:noFill/>
+          <a:ln/>
+        </p:spPr>
+        <p:txBody>
+          <a:bodyPr wrap="square" lIns="0" tIns="0" rIns="0" bIns="0" rtlCol="0" anchor="ctr"/>
+          <a:lstStyle/>
+          <a:p>
+            <a:pPr algn="ctr" indent="0" marL="0">
+              <a:buNone/>
+            </a:pPr>
+            <a:r>
+              <a:rPr lang="en-US" sz="1300" b="1" dirty="0">
+                <a:solidFill>
+                  <a:srgbClr val="9D174D"/>
+                </a:solidFill>
+                <a:latin typeface="Trebuchet MS" pitchFamily="34" charset="0"/>
+                <a:ea typeface="Trebuchet MS" pitchFamily="34" charset="-122"/>
+                <a:cs typeface="Trebuchet MS" pitchFamily="34" charset="-120"/>
+              </a:rPr>
+              <a:t>ed</a:t>
+            </a:r>
+            <a:endParaRPr lang="en-US" sz="1300" dirty="0"/>
+          </a:p>
+        </p:txBody>
+      </p:sp>
+      <p:sp>
+        <p:nvSpPr>
+          <p:cNvPr id="25" name="Text 23"/>
+          <p:cNvSpPr/>
+          <p:nvPr/>
+        </p:nvSpPr>
+        <p:spPr>
+          <a:xfrm>
+            <a:off x="6519672" y="2569464"/>
+            <a:ext cx="1828800" cy="201168"/>
+          </a:xfrm>
+          <a:prstGeom prst="rect">
+            <a:avLst/>
+          </a:prstGeom>
+          <a:noFill/>
+          <a:ln/>
+        </p:spPr>
+        <p:txBody>
+          <a:bodyPr wrap="square" lIns="0" tIns="0" rIns="0" bIns="0" rtlCol="0" anchor="t"/>
+          <a:lstStyle/>
+          <a:p>
+            <a:pPr algn="ctr" indent="0" marL="0">
+              <a:buNone/>
+            </a:pPr>
+            <a:r>
+              <a:rPr lang="en-US" sz="850" dirty="0">
+                <a:solidFill>
+                  <a:srgbClr val="475569"/>
+                </a:solidFill>
+                <a:latin typeface="Calibri" pitchFamily="34" charset="0"/>
+                <a:ea typeface="Calibri" pitchFamily="34" charset="-122"/>
+                <a:cs typeface="Calibri" pitchFamily="34" charset="-120"/>
+              </a:rPr>
+              <a:t>past tense</a:t>
+            </a:r>
+            <a:endParaRPr lang="en-US" sz="850" dirty="0"/>
+          </a:p>
+        </p:txBody>
+      </p:sp>
+      <p:sp>
+        <p:nvSpPr>
+          <p:cNvPr id="26" name="Shape 24"/>
           <p:cNvSpPr/>
           <p:nvPr/>
         </p:nvSpPr>
@@ -21033,7 +21257,7 @@
       </p:sp>
       <p:sp>
         <p:nvSpPr>
-          <p:cNvPr id="24" name="Text 22"/>
+          <p:cNvPr id="27" name="Text 25"/>
           <p:cNvSpPr/>
           <p:nvPr/>
         </p:nvSpPr>
@@ -21072,7 +21296,7 @@
       </p:sp>
       <p:sp>
         <p:nvSpPr>
-          <p:cNvPr id="25" name="Shape 23"/>
+          <p:cNvPr id="28" name="Shape 26"/>
           <p:cNvSpPr/>
           <p:nvPr/>
         </p:nvSpPr>
@@ -21099,7 +21323,7 @@
       </p:sp>
       <p:sp>
         <p:nvSpPr>
-          <p:cNvPr id="26" name="Shape 24"/>
+          <p:cNvPr id="29" name="Shape 27"/>
           <p:cNvSpPr/>
           <p:nvPr/>
         </p:nvSpPr>
@@ -21126,7 +21350,7 @@
       </p:sp>
       <p:sp>
         <p:nvSpPr>
-          <p:cNvPr id="27" name="Text 25"/>
+          <p:cNvPr id="30" name="Text 28"/>
           <p:cNvSpPr/>
           <p:nvPr/>
         </p:nvSpPr>
@@ -21157,7 +21381,7 @@
                 <a:ea typeface="Trebuchet MS" pitchFamily="34" charset="-122"/>
                 <a:cs typeface="Trebuchet MS" pitchFamily="34" charset="-120"/>
               </a:rPr>
-              <a:t>ap</a:t>
+              <a:t>mis</a:t>
             </a:r>
             <a:endParaRPr lang="en-US" sz="1400" dirty="0"/>
           </a:p>
@@ -21165,7 +21389,7 @@
       </p:sp>
       <p:sp>
         <p:nvSpPr>
-          <p:cNvPr id="28" name="Text 26"/>
+          <p:cNvPr id="31" name="Text 29"/>
           <p:cNvSpPr/>
           <p:nvPr/>
         </p:nvSpPr>
@@ -21204,7 +21428,7 @@
       </p:sp>
       <p:sp>
         <p:nvSpPr>
-          <p:cNvPr id="29" name="Shape 27"/>
+          <p:cNvPr id="32" name="Shape 30"/>
           <p:cNvSpPr/>
           <p:nvPr/>
         </p:nvSpPr>
@@ -21231,7 +21455,7 @@
       </p:sp>
       <p:sp>
         <p:nvSpPr>
-          <p:cNvPr id="30" name="Text 28"/>
+          <p:cNvPr id="33" name="Text 31"/>
           <p:cNvSpPr/>
           <p:nvPr/>
         </p:nvSpPr>
@@ -21262,7 +21486,7 @@
                 <a:ea typeface="Trebuchet MS" pitchFamily="34" charset="-122"/>
                 <a:cs typeface="Trebuchet MS" pitchFamily="34" charset="-120"/>
               </a:rPr>
-              <a:t>pli</a:t>
+              <a:t>ap</a:t>
             </a:r>
             <a:endParaRPr lang="en-US" sz="1400" dirty="0"/>
           </a:p>
@@ -21270,7 +21494,7 @@
       </p:sp>
       <p:sp>
         <p:nvSpPr>
-          <p:cNvPr id="31" name="Text 29"/>
+          <p:cNvPr id="34" name="Text 32"/>
           <p:cNvSpPr/>
           <p:nvPr/>
         </p:nvSpPr>
@@ -21309,7 +21533,7 @@
       </p:sp>
       <p:sp>
         <p:nvSpPr>
-          <p:cNvPr id="32" name="Shape 30"/>
+          <p:cNvPr id="35" name="Shape 33"/>
           <p:cNvSpPr/>
           <p:nvPr/>
         </p:nvSpPr>
@@ -21336,7 +21560,7 @@
       </p:sp>
       <p:sp>
         <p:nvSpPr>
-          <p:cNvPr id="33" name="Text 31"/>
+          <p:cNvPr id="36" name="Text 34"/>
           <p:cNvSpPr/>
           <p:nvPr/>
         </p:nvSpPr>
@@ -21367,7 +21591,7 @@
                 <a:ea typeface="Trebuchet MS" pitchFamily="34" charset="-122"/>
                 <a:cs typeface="Trebuchet MS" pitchFamily="34" charset="-120"/>
               </a:rPr>
-              <a:t>cant</a:t>
+              <a:t>plied</a:t>
             </a:r>
             <a:endParaRPr lang="en-US" sz="1400" dirty="0"/>
           </a:p>
@@ -21375,7 +21599,7 @@
       </p:sp>
       <p:sp>
         <p:nvSpPr>
-          <p:cNvPr id="34" name="Shape 32"/>
+          <p:cNvPr id="37" name="Shape 35"/>
           <p:cNvSpPr/>
           <p:nvPr/>
         </p:nvSpPr>
@@ -21402,7 +21626,7 @@
       </p:sp>
       <p:sp>
         <p:nvSpPr>
-          <p:cNvPr id="35" name="Text 33"/>
+          <p:cNvPr id="38" name="Text 36"/>
           <p:cNvSpPr/>
           <p:nvPr/>
         </p:nvSpPr>
@@ -21441,7 +21665,7 @@
       </p:sp>
       <p:sp>
         <p:nvSpPr>
-          <p:cNvPr id="36" name="Shape 34"/>
+          <p:cNvPr id="39" name="Shape 37"/>
           <p:cNvSpPr/>
           <p:nvPr/>
         </p:nvSpPr>
@@ -21468,7 +21692,7 @@
       </p:sp>
       <p:sp>
         <p:nvSpPr>
-          <p:cNvPr id="37" name="Text 35"/>
+          <p:cNvPr id="40" name="Text 38"/>
           <p:cNvSpPr/>
           <p:nvPr/>
         </p:nvSpPr>
@@ -21930,7 +22154,7 @@
                 <a:ea typeface="Trebuchet MS" pitchFamily="34" charset="-122"/>
                 <a:cs typeface="Trebuchet MS" pitchFamily="34" charset="-120"/>
               </a:rPr>
-              <a:t>applicant</a:t>
+              <a:t>misapplied</a:t>
             </a:r>
             <a:endParaRPr lang="en-US" sz="2800" dirty="0"/>
           </a:p>
@@ -22010,7 +22234,7 @@
         </p:nvSpPr>
         <p:spPr>
           <a:xfrm>
-            <a:off x="2938272" y="2258568"/>
+            <a:off x="2221992" y="2258568"/>
             <a:ext cx="1828800" cy="292608"/>
           </a:xfrm>
           <a:prstGeom prst="rect">
@@ -22019,11 +22243,11 @@
             </a:avLst>
           </a:prstGeom>
           <a:solidFill>
-            <a:srgbClr val="CCFBF1"/>
+            <a:srgbClr val="DDD6FE"/>
           </a:solidFill>
           <a:ln w="19050">
             <a:solidFill>
-              <a:srgbClr val="0D9488"/>
+              <a:srgbClr val="7C3AED"/>
             </a:solidFill>
             <a:prstDash val="solid"/>
           </a:ln>
@@ -22044,7 +22268,7 @@
         </p:nvSpPr>
         <p:spPr>
           <a:xfrm>
-            <a:off x="2938272" y="2258568"/>
+            <a:off x="2221992" y="2258568"/>
             <a:ext cx="1828800" cy="292608"/>
           </a:xfrm>
           <a:prstGeom prst="rect">
@@ -22063,13 +22287,13 @@
             <a:r>
               <a:rPr lang="en-US" sz="1300" b="1" dirty="0">
                 <a:solidFill>
-                  <a:srgbClr val="0F766E"/>
+                  <a:srgbClr val="4C1D95"/>
                 </a:solidFill>
                 <a:latin typeface="Trebuchet MS" pitchFamily="34" charset="0"/>
                 <a:ea typeface="Trebuchet MS" pitchFamily="34" charset="-122"/>
                 <a:cs typeface="Trebuchet MS" pitchFamily="34" charset="-120"/>
               </a:rPr>
-              <a:t>apply</a:t>
+              <a:t>mis</a:t>
             </a:r>
             <a:endParaRPr lang="en-US" sz="1300" dirty="0"/>
           </a:p>
@@ -22083,7 +22307,7 @@
         </p:nvSpPr>
         <p:spPr>
           <a:xfrm>
-            <a:off x="2938272" y="2569464"/>
+            <a:off x="2221992" y="2569464"/>
             <a:ext cx="1828800" cy="201168"/>
           </a:xfrm>
           <a:prstGeom prst="rect">
@@ -22108,7 +22332,7 @@
                 <a:ea typeface="Calibri" pitchFamily="34" charset="-122"/>
                 <a:cs typeface="Calibri" pitchFamily="34" charset="-120"/>
               </a:rPr>
-              <a:t>to put or place onto</a:t>
+              <a:t>wrongly or badly</a:t>
             </a:r>
             <a:endParaRPr lang="en-US" sz="850" dirty="0"/>
           </a:p>
@@ -22116,52 +22340,13 @@
       </p:sp>
       <p:sp>
         <p:nvSpPr>
-          <p:cNvPr id="19" name="Text 17"/>
-          <p:cNvSpPr/>
-          <p:nvPr/>
-        </p:nvSpPr>
-        <p:spPr>
-          <a:xfrm>
-            <a:off x="2938272" y="2752344"/>
-            <a:ext cx="1828800" cy="182880"/>
-          </a:xfrm>
-          <a:prstGeom prst="rect">
-            <a:avLst/>
-          </a:prstGeom>
-          <a:noFill/>
-          <a:ln/>
-        </p:spPr>
-        <p:txBody>
-          <a:bodyPr wrap="square" lIns="0" tIns="0" rIns="0" bIns="0" rtlCol="0" anchor="t"/>
-          <a:lstStyle/>
-          <a:p>
-            <a:pPr algn="ctr" indent="0" marL="0">
-              <a:buNone/>
-            </a:pPr>
-            <a:r>
-              <a:rPr lang="en-US" sz="700" i="1" dirty="0">
-                <a:solidFill>
-                  <a:srgbClr val="94A3B8"/>
-                </a:solidFill>
-                <a:latin typeface="Calibri" pitchFamily="34" charset="0"/>
-                <a:ea typeface="Calibri" pitchFamily="34" charset="-122"/>
-                <a:cs typeface="Calibri" pitchFamily="34" charset="-120"/>
-              </a:rPr>
-              <a:t>'y' changes to 'i' before suffix</a:t>
-            </a:r>
-            <a:endParaRPr lang="en-US" sz="700" dirty="0"/>
-          </a:p>
-        </p:txBody>
-      </p:sp>
-      <p:sp>
-        <p:nvSpPr>
-          <p:cNvPr id="20" name="Shape 18"/>
-          <p:cNvSpPr/>
-          <p:nvPr/>
-        </p:nvSpPr>
-        <p:spPr>
-          <a:xfrm>
-            <a:off x="5803392" y="2258568"/>
+          <p:cNvPr id="19" name="Shape 17"/>
+          <p:cNvSpPr/>
+          <p:nvPr/>
+        </p:nvSpPr>
+        <p:spPr>
+          <a:xfrm>
+            <a:off x="4370832" y="2258568"/>
             <a:ext cx="1828800" cy="292608"/>
           </a:xfrm>
           <a:prstGeom prst="rect">
@@ -22170,11 +22355,11 @@
             </a:avLst>
           </a:prstGeom>
           <a:solidFill>
-            <a:srgbClr val="FCE7F3"/>
+            <a:srgbClr val="CCFBF1"/>
           </a:solidFill>
           <a:ln w="19050">
             <a:solidFill>
-              <a:srgbClr val="DB2777"/>
+              <a:srgbClr val="0D9488"/>
             </a:solidFill>
             <a:prstDash val="solid"/>
           </a:ln>
@@ -22189,13 +22374,13 @@
       </p:sp>
       <p:sp>
         <p:nvSpPr>
-          <p:cNvPr id="21" name="Text 19"/>
-          <p:cNvSpPr/>
-          <p:nvPr/>
-        </p:nvSpPr>
-        <p:spPr>
-          <a:xfrm>
-            <a:off x="5803392" y="2258568"/>
+          <p:cNvPr id="20" name="Text 18"/>
+          <p:cNvSpPr/>
+          <p:nvPr/>
+        </p:nvSpPr>
+        <p:spPr>
+          <a:xfrm>
+            <a:off x="4370832" y="2258568"/>
             <a:ext cx="1828800" cy="292608"/>
           </a:xfrm>
           <a:prstGeom prst="rect">
@@ -22214,13 +22399,13 @@
             <a:r>
               <a:rPr lang="en-US" sz="1300" b="1" dirty="0">
                 <a:solidFill>
-                  <a:srgbClr val="9D174D"/>
+                  <a:srgbClr val="0F766E"/>
                 </a:solidFill>
                 <a:latin typeface="Trebuchet MS" pitchFamily="34" charset="0"/>
                 <a:ea typeface="Trebuchet MS" pitchFamily="34" charset="-122"/>
                 <a:cs typeface="Trebuchet MS" pitchFamily="34" charset="-120"/>
               </a:rPr>
-              <a:t>ant</a:t>
+              <a:t>apply</a:t>
             </a:r>
             <a:endParaRPr lang="en-US" sz="1300" dirty="0"/>
           </a:p>
@@ -22228,13 +22413,13 @@
       </p:sp>
       <p:sp>
         <p:nvSpPr>
-          <p:cNvPr id="22" name="Text 20"/>
-          <p:cNvSpPr/>
-          <p:nvPr/>
-        </p:nvSpPr>
-        <p:spPr>
-          <a:xfrm>
-            <a:off x="5803392" y="2569464"/>
+          <p:cNvPr id="21" name="Text 19"/>
+          <p:cNvSpPr/>
+          <p:nvPr/>
+        </p:nvSpPr>
+        <p:spPr>
+          <a:xfrm>
+            <a:off x="4370832" y="2569464"/>
             <a:ext cx="1828800" cy="201168"/>
           </a:xfrm>
           <a:prstGeom prst="rect">
@@ -22259,7 +22444,7 @@
                 <a:ea typeface="Calibri" pitchFamily="34" charset="-122"/>
                 <a:cs typeface="Calibri" pitchFamily="34" charset="-120"/>
               </a:rPr>
-              <a:t>a person who does something</a:t>
+              <a:t>to put or place onto</a:t>
             </a:r>
             <a:endParaRPr lang="en-US" sz="850" dirty="0"/>
           </a:p>
@@ -22267,7 +22452,158 @@
       </p:sp>
       <p:sp>
         <p:nvSpPr>
+          <p:cNvPr id="22" name="Text 20"/>
+          <p:cNvSpPr/>
+          <p:nvPr/>
+        </p:nvSpPr>
+        <p:spPr>
+          <a:xfrm>
+            <a:off x="4370832" y="2752344"/>
+            <a:ext cx="1828800" cy="182880"/>
+          </a:xfrm>
+          <a:prstGeom prst="rect">
+            <a:avLst/>
+          </a:prstGeom>
+          <a:noFill/>
+          <a:ln/>
+        </p:spPr>
+        <p:txBody>
+          <a:bodyPr wrap="square" lIns="0" tIns="0" rIns="0" bIns="0" rtlCol="0" anchor="t"/>
+          <a:lstStyle/>
+          <a:p>
+            <a:pPr algn="ctr" indent="0" marL="0">
+              <a:buNone/>
+            </a:pPr>
+            <a:r>
+              <a:rPr lang="en-US" sz="700" i="1" dirty="0">
+                <a:solidFill>
+                  <a:srgbClr val="94A3B8"/>
+                </a:solidFill>
+                <a:latin typeface="Calibri" pitchFamily="34" charset="0"/>
+                <a:ea typeface="Calibri" pitchFamily="34" charset="-122"/>
+                <a:cs typeface="Calibri" pitchFamily="34" charset="-120"/>
+              </a:rPr>
+              <a:t>'y' changes to 'i' before suffix</a:t>
+            </a:r>
+            <a:endParaRPr lang="en-US" sz="700" dirty="0"/>
+          </a:p>
+        </p:txBody>
+      </p:sp>
+      <p:sp>
+        <p:nvSpPr>
           <p:cNvPr id="23" name="Shape 21"/>
+          <p:cNvSpPr/>
+          <p:nvPr/>
+        </p:nvSpPr>
+        <p:spPr>
+          <a:xfrm>
+            <a:off x="6519672" y="2258568"/>
+            <a:ext cx="1828800" cy="292608"/>
+          </a:xfrm>
+          <a:prstGeom prst="rect">
+            <a:avLst>
+              <a:gd name="adj" fmla="val 25000"/>
+            </a:avLst>
+          </a:prstGeom>
+          <a:solidFill>
+            <a:srgbClr val="FCE7F3"/>
+          </a:solidFill>
+          <a:ln w="19050">
+            <a:solidFill>
+              <a:srgbClr val="DB2777"/>
+            </a:solidFill>
+            <a:prstDash val="solid"/>
+          </a:ln>
+          <a:effectLst>
+            <a:outerShdw sx="100000" sy="100000" kx="0" ky="0" algn="bl" rotWithShape="0" blurRad="101600" dist="38100" dir="8100000">
+              <a:srgbClr val="000000">
+                <a:alpha val="12000"/>
+              </a:srgbClr>
+            </a:outerShdw>
+          </a:effectLst>
+        </p:spPr>
+      </p:sp>
+      <p:sp>
+        <p:nvSpPr>
+          <p:cNvPr id="24" name="Text 22"/>
+          <p:cNvSpPr/>
+          <p:nvPr/>
+        </p:nvSpPr>
+        <p:spPr>
+          <a:xfrm>
+            <a:off x="6519672" y="2258568"/>
+            <a:ext cx="1828800" cy="292608"/>
+          </a:xfrm>
+          <a:prstGeom prst="rect">
+            <a:avLst/>
+          </a:prstGeom>
+          <a:noFill/>
+          <a:ln/>
+        </p:spPr>
+        <p:txBody>
+          <a:bodyPr wrap="square" lIns="0" tIns="0" rIns="0" bIns="0" rtlCol="0" anchor="ctr"/>
+          <a:lstStyle/>
+          <a:p>
+            <a:pPr algn="ctr" indent="0" marL="0">
+              <a:buNone/>
+            </a:pPr>
+            <a:r>
+              <a:rPr lang="en-US" sz="1300" b="1" dirty="0">
+                <a:solidFill>
+                  <a:srgbClr val="9D174D"/>
+                </a:solidFill>
+                <a:latin typeface="Trebuchet MS" pitchFamily="34" charset="0"/>
+                <a:ea typeface="Trebuchet MS" pitchFamily="34" charset="-122"/>
+                <a:cs typeface="Trebuchet MS" pitchFamily="34" charset="-120"/>
+              </a:rPr>
+              <a:t>ed</a:t>
+            </a:r>
+            <a:endParaRPr lang="en-US" sz="1300" dirty="0"/>
+          </a:p>
+        </p:txBody>
+      </p:sp>
+      <p:sp>
+        <p:nvSpPr>
+          <p:cNvPr id="25" name="Text 23"/>
+          <p:cNvSpPr/>
+          <p:nvPr/>
+        </p:nvSpPr>
+        <p:spPr>
+          <a:xfrm>
+            <a:off x="6519672" y="2569464"/>
+            <a:ext cx="1828800" cy="201168"/>
+          </a:xfrm>
+          <a:prstGeom prst="rect">
+            <a:avLst/>
+          </a:prstGeom>
+          <a:noFill/>
+          <a:ln/>
+        </p:spPr>
+        <p:txBody>
+          <a:bodyPr wrap="square" lIns="0" tIns="0" rIns="0" bIns="0" rtlCol="0" anchor="t"/>
+          <a:lstStyle/>
+          <a:p>
+            <a:pPr algn="ctr" indent="0" marL="0">
+              <a:buNone/>
+            </a:pPr>
+            <a:r>
+              <a:rPr lang="en-US" sz="850" dirty="0">
+                <a:solidFill>
+                  <a:srgbClr val="475569"/>
+                </a:solidFill>
+                <a:latin typeface="Calibri" pitchFamily="34" charset="0"/>
+                <a:ea typeface="Calibri" pitchFamily="34" charset="-122"/>
+                <a:cs typeface="Calibri" pitchFamily="34" charset="-120"/>
+              </a:rPr>
+              <a:t>past tense</a:t>
+            </a:r>
+            <a:endParaRPr lang="en-US" sz="850" dirty="0"/>
+          </a:p>
+        </p:txBody>
+      </p:sp>
+      <p:sp>
+        <p:nvSpPr>
+          <p:cNvPr id="26" name="Shape 24"/>
           <p:cNvSpPr/>
           <p:nvPr/>
         </p:nvSpPr>
@@ -22294,7 +22630,7 @@
       </p:sp>
       <p:sp>
         <p:nvSpPr>
-          <p:cNvPr id="24" name="Text 22"/>
+          <p:cNvPr id="27" name="Text 25"/>
           <p:cNvSpPr/>
           <p:nvPr/>
         </p:nvSpPr>
@@ -22333,7 +22669,7 @@
       </p:sp>
       <p:sp>
         <p:nvSpPr>
-          <p:cNvPr id="25" name="Shape 23"/>
+          <p:cNvPr id="28" name="Shape 26"/>
           <p:cNvSpPr/>
           <p:nvPr/>
         </p:nvSpPr>
@@ -22360,7 +22696,7 @@
       </p:sp>
       <p:sp>
         <p:nvSpPr>
-          <p:cNvPr id="26" name="Shape 24"/>
+          <p:cNvPr id="29" name="Shape 27"/>
           <p:cNvSpPr/>
           <p:nvPr/>
         </p:nvSpPr>
@@ -22387,7 +22723,7 @@
       </p:sp>
       <p:sp>
         <p:nvSpPr>
-          <p:cNvPr id="27" name="Text 25"/>
+          <p:cNvPr id="30" name="Text 28"/>
           <p:cNvSpPr/>
           <p:nvPr/>
         </p:nvSpPr>
@@ -22418,7 +22754,7 @@
                 <a:ea typeface="Trebuchet MS" pitchFamily="34" charset="-122"/>
                 <a:cs typeface="Trebuchet MS" pitchFamily="34" charset="-120"/>
               </a:rPr>
-              <a:t>ap</a:t>
+              <a:t>mis</a:t>
             </a:r>
             <a:endParaRPr lang="en-US" sz="1400" dirty="0"/>
           </a:p>
@@ -22426,7 +22762,7 @@
       </p:sp>
       <p:sp>
         <p:nvSpPr>
-          <p:cNvPr id="28" name="Text 26"/>
+          <p:cNvPr id="31" name="Text 29"/>
           <p:cNvSpPr/>
           <p:nvPr/>
         </p:nvSpPr>
@@ -22465,7 +22801,7 @@
       </p:sp>
       <p:sp>
         <p:nvSpPr>
-          <p:cNvPr id="29" name="Shape 27"/>
+          <p:cNvPr id="32" name="Shape 30"/>
           <p:cNvSpPr/>
           <p:nvPr/>
         </p:nvSpPr>
@@ -22492,7 +22828,7 @@
       </p:sp>
       <p:sp>
         <p:nvSpPr>
-          <p:cNvPr id="30" name="Text 28"/>
+          <p:cNvPr id="33" name="Text 31"/>
           <p:cNvSpPr/>
           <p:nvPr/>
         </p:nvSpPr>
@@ -22523,7 +22859,7 @@
                 <a:ea typeface="Trebuchet MS" pitchFamily="34" charset="-122"/>
                 <a:cs typeface="Trebuchet MS" pitchFamily="34" charset="-120"/>
               </a:rPr>
-              <a:t>pli</a:t>
+              <a:t>ap</a:t>
             </a:r>
             <a:endParaRPr lang="en-US" sz="1400" dirty="0"/>
           </a:p>
@@ -22531,7 +22867,7 @@
       </p:sp>
       <p:sp>
         <p:nvSpPr>
-          <p:cNvPr id="31" name="Text 29"/>
+          <p:cNvPr id="34" name="Text 32"/>
           <p:cNvSpPr/>
           <p:nvPr/>
         </p:nvSpPr>
@@ -22570,7 +22906,7 @@
       </p:sp>
       <p:sp>
         <p:nvSpPr>
-          <p:cNvPr id="32" name="Shape 30"/>
+          <p:cNvPr id="35" name="Shape 33"/>
           <p:cNvSpPr/>
           <p:nvPr/>
         </p:nvSpPr>
@@ -22597,7 +22933,7 @@
       </p:sp>
       <p:sp>
         <p:nvSpPr>
-          <p:cNvPr id="33" name="Text 31"/>
+          <p:cNvPr id="36" name="Text 34"/>
           <p:cNvSpPr/>
           <p:nvPr/>
         </p:nvSpPr>
@@ -22628,7 +22964,7 @@
                 <a:ea typeface="Trebuchet MS" pitchFamily="34" charset="-122"/>
                 <a:cs typeface="Trebuchet MS" pitchFamily="34" charset="-120"/>
               </a:rPr>
-              <a:t>cant</a:t>
+              <a:t>plied</a:t>
             </a:r>
             <a:endParaRPr lang="en-US" sz="1400" dirty="0"/>
           </a:p>
@@ -22636,7 +22972,7 @@
       </p:sp>
       <p:sp>
         <p:nvSpPr>
-          <p:cNvPr id="34" name="Shape 32"/>
+          <p:cNvPr id="37" name="Shape 35"/>
           <p:cNvSpPr/>
           <p:nvPr/>
         </p:nvSpPr>
@@ -22663,7 +22999,7 @@
       </p:sp>
       <p:sp>
         <p:nvSpPr>
-          <p:cNvPr id="35" name="Text 33"/>
+          <p:cNvPr id="38" name="Text 36"/>
           <p:cNvSpPr/>
           <p:nvPr/>
         </p:nvSpPr>
@@ -22702,18 +23038,18 @@
       </p:sp>
       <p:sp>
         <p:nvSpPr>
-          <p:cNvPr id="36" name="Shape 34"/>
+          <p:cNvPr id="39" name="Shape 37"/>
           <p:cNvSpPr/>
           <p:nvPr/>
         </p:nvSpPr>
         <p:spPr>
           <a:xfrm>
             <a:off x="1874520" y="4096512"/>
-            <a:ext cx="6903720" cy="804672"/>
+            <a:ext cx="6903720" cy="658368"/>
           </a:xfrm>
           <a:prstGeom prst="rect">
             <a:avLst>
-              <a:gd name="adj" fmla="val 6818"/>
+              <a:gd name="adj" fmla="val 8333"/>
             </a:avLst>
           </a:prstGeom>
           <a:solidFill>
@@ -22729,18 +23065,18 @@
       </p:sp>
       <p:sp>
         <p:nvSpPr>
-          <p:cNvPr id="37" name="Shape 35"/>
+          <p:cNvPr id="40" name="Shape 38"/>
           <p:cNvSpPr/>
           <p:nvPr/>
         </p:nvSpPr>
         <p:spPr>
           <a:xfrm>
             <a:off x="2023872" y="4169664"/>
-            <a:ext cx="685800" cy="384048"/>
+            <a:ext cx="685800" cy="475488"/>
           </a:xfrm>
           <a:prstGeom prst="rect">
             <a:avLst>
-              <a:gd name="adj" fmla="val 9524"/>
+              <a:gd name="adj" fmla="val 7692"/>
             </a:avLst>
           </a:prstGeom>
           <a:solidFill>
@@ -22756,14 +23092,14 @@
       </p:sp>
       <p:sp>
         <p:nvSpPr>
-          <p:cNvPr id="38" name="Text 36"/>
+          <p:cNvPr id="41" name="Text 39"/>
           <p:cNvSpPr/>
           <p:nvPr/>
         </p:nvSpPr>
         <p:spPr>
           <a:xfrm>
             <a:off x="2023872" y="4169664"/>
-            <a:ext cx="685800" cy="384048"/>
+            <a:ext cx="685800" cy="475488"/>
           </a:xfrm>
           <a:prstGeom prst="rect">
             <a:avLst/>
@@ -22787,7 +23123,7 @@
                 <a:ea typeface="Trebuchet MS" pitchFamily="34" charset="-122"/>
                 <a:cs typeface="Trebuchet MS" pitchFamily="34" charset="-120"/>
               </a:rPr>
-              <a:t>a</a:t>
+              <a:t>m</a:t>
             </a:r>
             <a:endParaRPr lang="en-US" sz="900" dirty="0"/>
           </a:p>
@@ -22795,18 +23131,18 @@
       </p:sp>
       <p:sp>
         <p:nvSpPr>
-          <p:cNvPr id="39" name="Shape 37"/>
+          <p:cNvPr id="42" name="Shape 40"/>
           <p:cNvSpPr/>
           <p:nvPr/>
         </p:nvSpPr>
         <p:spPr>
           <a:xfrm>
             <a:off x="2831592" y="4169664"/>
-            <a:ext cx="685800" cy="384048"/>
+            <a:ext cx="685800" cy="475488"/>
           </a:xfrm>
           <a:prstGeom prst="rect">
             <a:avLst>
-              <a:gd name="adj" fmla="val 9524"/>
+              <a:gd name="adj" fmla="val 7692"/>
             </a:avLst>
           </a:prstGeom>
           <a:solidFill>
@@ -22822,14 +23158,14 @@
       </p:sp>
       <p:sp>
         <p:nvSpPr>
-          <p:cNvPr id="40" name="Text 38"/>
+          <p:cNvPr id="43" name="Text 41"/>
           <p:cNvSpPr/>
           <p:nvPr/>
         </p:nvSpPr>
         <p:spPr>
           <a:xfrm>
             <a:off x="2831592" y="4169664"/>
-            <a:ext cx="685800" cy="384048"/>
+            <a:ext cx="685800" cy="475488"/>
           </a:xfrm>
           <a:prstGeom prst="rect">
             <a:avLst/>
@@ -22853,7 +23189,7 @@
                 <a:ea typeface="Trebuchet MS" pitchFamily="34" charset="-122"/>
                 <a:cs typeface="Trebuchet MS" pitchFamily="34" charset="-120"/>
               </a:rPr>
-              <a:t>pp</a:t>
+              <a:t>i</a:t>
             </a:r>
             <a:endParaRPr lang="en-US" sz="900" dirty="0"/>
           </a:p>
@@ -22861,18 +23197,18 @@
       </p:sp>
       <p:sp>
         <p:nvSpPr>
-          <p:cNvPr id="41" name="Shape 39"/>
+          <p:cNvPr id="44" name="Shape 42"/>
           <p:cNvSpPr/>
           <p:nvPr/>
         </p:nvSpPr>
         <p:spPr>
           <a:xfrm>
             <a:off x="3639312" y="4169664"/>
-            <a:ext cx="685800" cy="384048"/>
+            <a:ext cx="685800" cy="475488"/>
           </a:xfrm>
           <a:prstGeom prst="rect">
             <a:avLst>
-              <a:gd name="adj" fmla="val 9524"/>
+              <a:gd name="adj" fmla="val 7692"/>
             </a:avLst>
           </a:prstGeom>
           <a:solidFill>
@@ -22888,14 +23224,14 @@
       </p:sp>
       <p:sp>
         <p:nvSpPr>
-          <p:cNvPr id="42" name="Text 40"/>
+          <p:cNvPr id="45" name="Text 43"/>
           <p:cNvSpPr/>
           <p:nvPr/>
         </p:nvSpPr>
         <p:spPr>
           <a:xfrm>
             <a:off x="3639312" y="4169664"/>
-            <a:ext cx="685800" cy="384048"/>
+            <a:ext cx="685800" cy="475488"/>
           </a:xfrm>
           <a:prstGeom prst="rect">
             <a:avLst/>
@@ -22919,7 +23255,7 @@
                 <a:ea typeface="Trebuchet MS" pitchFamily="34" charset="-122"/>
                 <a:cs typeface="Trebuchet MS" pitchFamily="34" charset="-120"/>
               </a:rPr>
-              <a:t>l</a:t>
+              <a:t>s</a:t>
             </a:r>
             <a:endParaRPr lang="en-US" sz="900" dirty="0"/>
           </a:p>
@@ -22927,18 +23263,18 @@
       </p:sp>
       <p:sp>
         <p:nvSpPr>
-          <p:cNvPr id="43" name="Shape 41"/>
+          <p:cNvPr id="46" name="Shape 44"/>
           <p:cNvSpPr/>
           <p:nvPr/>
         </p:nvSpPr>
         <p:spPr>
           <a:xfrm>
             <a:off x="4447032" y="4169664"/>
-            <a:ext cx="685800" cy="384048"/>
+            <a:ext cx="685800" cy="475488"/>
           </a:xfrm>
           <a:prstGeom prst="rect">
             <a:avLst>
-              <a:gd name="adj" fmla="val 9524"/>
+              <a:gd name="adj" fmla="val 7692"/>
             </a:avLst>
           </a:prstGeom>
           <a:solidFill>
@@ -22954,14 +23290,14 @@
       </p:sp>
       <p:sp>
         <p:nvSpPr>
-          <p:cNvPr id="44" name="Text 42"/>
+          <p:cNvPr id="47" name="Text 45"/>
           <p:cNvSpPr/>
           <p:nvPr/>
         </p:nvSpPr>
         <p:spPr>
           <a:xfrm>
             <a:off x="4447032" y="4169664"/>
-            <a:ext cx="685800" cy="384048"/>
+            <a:ext cx="685800" cy="475488"/>
           </a:xfrm>
           <a:prstGeom prst="rect">
             <a:avLst/>
@@ -22985,7 +23321,7 @@
                 <a:ea typeface="Trebuchet MS" pitchFamily="34" charset="-122"/>
                 <a:cs typeface="Trebuchet MS" pitchFamily="34" charset="-120"/>
               </a:rPr>
-              <a:t>i</a:t>
+              <a:t>a</a:t>
             </a:r>
             <a:endParaRPr lang="en-US" sz="900" dirty="0"/>
           </a:p>
@@ -22993,18 +23329,18 @@
       </p:sp>
       <p:sp>
         <p:nvSpPr>
-          <p:cNvPr id="45" name="Shape 43"/>
+          <p:cNvPr id="48" name="Shape 46"/>
           <p:cNvSpPr/>
           <p:nvPr/>
         </p:nvSpPr>
         <p:spPr>
           <a:xfrm>
             <a:off x="5254752" y="4169664"/>
-            <a:ext cx="685800" cy="384048"/>
+            <a:ext cx="685800" cy="475488"/>
           </a:xfrm>
           <a:prstGeom prst="rect">
             <a:avLst>
-              <a:gd name="adj" fmla="val 9524"/>
+              <a:gd name="adj" fmla="val 7692"/>
             </a:avLst>
           </a:prstGeom>
           <a:solidFill>
@@ -23020,14 +23356,14 @@
       </p:sp>
       <p:sp>
         <p:nvSpPr>
-          <p:cNvPr id="46" name="Text 44"/>
+          <p:cNvPr id="49" name="Text 47"/>
           <p:cNvSpPr/>
           <p:nvPr/>
         </p:nvSpPr>
         <p:spPr>
           <a:xfrm>
             <a:off x="5254752" y="4169664"/>
-            <a:ext cx="685800" cy="384048"/>
+            <a:ext cx="685800" cy="475488"/>
           </a:xfrm>
           <a:prstGeom prst="rect">
             <a:avLst/>
@@ -23051,7 +23387,7 @@
                 <a:ea typeface="Trebuchet MS" pitchFamily="34" charset="-122"/>
                 <a:cs typeface="Trebuchet MS" pitchFamily="34" charset="-120"/>
               </a:rPr>
-              <a:t>c</a:t>
+              <a:t>pp</a:t>
             </a:r>
             <a:endParaRPr lang="en-US" sz="900" dirty="0"/>
           </a:p>
@@ -23059,57 +23395,18 @@
       </p:sp>
       <p:sp>
         <p:nvSpPr>
-          <p:cNvPr id="47" name="Text 45"/>
-          <p:cNvSpPr/>
-          <p:nvPr/>
-        </p:nvSpPr>
-        <p:spPr>
-          <a:xfrm>
-            <a:off x="5254752" y="4572000"/>
-            <a:ext cx="685800" cy="219456"/>
-          </a:xfrm>
-          <a:prstGeom prst="rect">
-            <a:avLst/>
-          </a:prstGeom>
-          <a:noFill/>
-          <a:ln/>
-        </p:spPr>
-        <p:txBody>
-          <a:bodyPr wrap="square" lIns="0" tIns="0" rIns="0" bIns="0" rtlCol="0" anchor="t"/>
-          <a:lstStyle/>
-          <a:p>
-            <a:pPr algn="ctr" indent="0" marL="0">
-              <a:buNone/>
-            </a:pPr>
-            <a:r>
-              <a:rPr lang="en-US" sz="750" i="1" dirty="0">
-                <a:solidFill>
-                  <a:srgbClr val="94A3B8"/>
-                </a:solidFill>
-                <a:latin typeface="Calibri" pitchFamily="34" charset="0"/>
-                <a:ea typeface="Calibri" pitchFamily="34" charset="-122"/>
-                <a:cs typeface="Calibri" pitchFamily="34" charset="-120"/>
-              </a:rPr>
-              <a:t>/k/</a:t>
-            </a:r>
-            <a:endParaRPr lang="en-US" sz="750" dirty="0"/>
-          </a:p>
-        </p:txBody>
-      </p:sp>
-      <p:sp>
-        <p:nvSpPr>
-          <p:cNvPr id="48" name="Shape 46"/>
+          <p:cNvPr id="50" name="Shape 48"/>
           <p:cNvSpPr/>
           <p:nvPr/>
         </p:nvSpPr>
         <p:spPr>
           <a:xfrm>
             <a:off x="6062472" y="4169664"/>
-            <a:ext cx="685800" cy="384048"/>
+            <a:ext cx="685800" cy="475488"/>
           </a:xfrm>
           <a:prstGeom prst="rect">
             <a:avLst>
-              <a:gd name="adj" fmla="val 9524"/>
+              <a:gd name="adj" fmla="val 7692"/>
             </a:avLst>
           </a:prstGeom>
           <a:solidFill>
@@ -23125,14 +23422,14 @@
       </p:sp>
       <p:sp>
         <p:nvSpPr>
-          <p:cNvPr id="49" name="Text 47"/>
+          <p:cNvPr id="51" name="Text 49"/>
           <p:cNvSpPr/>
           <p:nvPr/>
         </p:nvSpPr>
         <p:spPr>
           <a:xfrm>
             <a:off x="6062472" y="4169664"/>
-            <a:ext cx="685800" cy="384048"/>
+            <a:ext cx="685800" cy="475488"/>
           </a:xfrm>
           <a:prstGeom prst="rect">
             <a:avLst/>
@@ -23156,7 +23453,7 @@
                 <a:ea typeface="Trebuchet MS" pitchFamily="34" charset="-122"/>
                 <a:cs typeface="Trebuchet MS" pitchFamily="34" charset="-120"/>
               </a:rPr>
-              <a:t>a</a:t>
+              <a:t>l</a:t>
             </a:r>
             <a:endParaRPr lang="en-US" sz="900" dirty="0"/>
           </a:p>
@@ -23164,18 +23461,18 @@
       </p:sp>
       <p:sp>
         <p:nvSpPr>
-          <p:cNvPr id="50" name="Shape 48"/>
+          <p:cNvPr id="52" name="Shape 50"/>
           <p:cNvSpPr/>
           <p:nvPr/>
         </p:nvSpPr>
         <p:spPr>
           <a:xfrm>
             <a:off x="6870192" y="4169664"/>
-            <a:ext cx="685800" cy="384048"/>
+            <a:ext cx="685800" cy="475488"/>
           </a:xfrm>
           <a:prstGeom prst="rect">
             <a:avLst>
-              <a:gd name="adj" fmla="val 9524"/>
+              <a:gd name="adj" fmla="val 7692"/>
             </a:avLst>
           </a:prstGeom>
           <a:solidFill>
@@ -23191,14 +23488,14 @@
       </p:sp>
       <p:sp>
         <p:nvSpPr>
-          <p:cNvPr id="51" name="Text 49"/>
+          <p:cNvPr id="53" name="Text 51"/>
           <p:cNvSpPr/>
           <p:nvPr/>
         </p:nvSpPr>
         <p:spPr>
           <a:xfrm>
             <a:off x="6870192" y="4169664"/>
-            <a:ext cx="685800" cy="384048"/>
+            <a:ext cx="685800" cy="475488"/>
           </a:xfrm>
           <a:prstGeom prst="rect">
             <a:avLst/>
@@ -23222,7 +23519,7 @@
                 <a:ea typeface="Trebuchet MS" pitchFamily="34" charset="-122"/>
                 <a:cs typeface="Trebuchet MS" pitchFamily="34" charset="-120"/>
               </a:rPr>
-              <a:t>n</a:t>
+              <a:t>ie</a:t>
             </a:r>
             <a:endParaRPr lang="en-US" sz="900" dirty="0"/>
           </a:p>
@@ -23230,18 +23527,18 @@
       </p:sp>
       <p:sp>
         <p:nvSpPr>
-          <p:cNvPr id="52" name="Shape 50"/>
+          <p:cNvPr id="54" name="Shape 52"/>
           <p:cNvSpPr/>
           <p:nvPr/>
         </p:nvSpPr>
         <p:spPr>
           <a:xfrm>
             <a:off x="7677912" y="4169664"/>
-            <a:ext cx="685800" cy="384048"/>
+            <a:ext cx="685800" cy="475488"/>
           </a:xfrm>
           <a:prstGeom prst="rect">
             <a:avLst>
-              <a:gd name="adj" fmla="val 9524"/>
+              <a:gd name="adj" fmla="val 7692"/>
             </a:avLst>
           </a:prstGeom>
           <a:solidFill>
@@ -23257,14 +23554,14 @@
       </p:sp>
       <p:sp>
         <p:nvSpPr>
-          <p:cNvPr id="53" name="Text 51"/>
+          <p:cNvPr id="55" name="Text 53"/>
           <p:cNvSpPr/>
           <p:nvPr/>
         </p:nvSpPr>
         <p:spPr>
           <a:xfrm>
             <a:off x="7677912" y="4169664"/>
-            <a:ext cx="685800" cy="384048"/>
+            <a:ext cx="685800" cy="475488"/>
           </a:xfrm>
           <a:prstGeom prst="rect">
             <a:avLst/>
@@ -23288,7 +23585,7 @@
                 <a:ea typeface="Trebuchet MS" pitchFamily="34" charset="-122"/>
                 <a:cs typeface="Trebuchet MS" pitchFamily="34" charset="-120"/>
               </a:rPr>
-              <a:t>t</a:t>
+              <a:t>d</a:t>
             </a:r>
             <a:endParaRPr lang="en-US" sz="900" dirty="0"/>
           </a:p>
@@ -23719,7 +24016,7 @@
                 <a:ea typeface="Trebuchet MS" pitchFamily="34" charset="-122"/>
                 <a:cs typeface="Trebuchet MS" pitchFamily="34" charset="-120"/>
               </a:rPr>
-              <a:t>reapplying</a:t>
+              <a:t>applicable</a:t>
             </a:r>
             <a:endParaRPr lang="en-US" sz="2800" dirty="0"/>
           </a:p>
@@ -24546,7 +24843,7 @@
                 <a:ea typeface="Trebuchet MS" pitchFamily="34" charset="-122"/>
                 <a:cs typeface="Trebuchet MS" pitchFamily="34" charset="-120"/>
               </a:rPr>
-              <a:t>reapplying</a:t>
+              <a:t>applicable</a:t>
             </a:r>
             <a:endParaRPr lang="en-US" sz="2800" dirty="0"/>
           </a:p>
@@ -24626,7 +24923,7 @@
         </p:nvSpPr>
         <p:spPr>
           <a:xfrm>
-            <a:off x="2221992" y="2258568"/>
+            <a:off x="2938272" y="2258568"/>
             <a:ext cx="1828800" cy="292608"/>
           </a:xfrm>
           <a:prstGeom prst="rect">
@@ -24635,11 +24932,11 @@
             </a:avLst>
           </a:prstGeom>
           <a:solidFill>
-            <a:srgbClr val="DDD6FE"/>
+            <a:srgbClr val="CCFBF1"/>
           </a:solidFill>
           <a:ln w="19050">
             <a:solidFill>
-              <a:srgbClr val="7C3AED"/>
+              <a:srgbClr val="0D9488"/>
             </a:solidFill>
             <a:prstDash val="solid"/>
           </a:ln>
@@ -24660,7 +24957,7 @@
         </p:nvSpPr>
         <p:spPr>
           <a:xfrm>
-            <a:off x="2221992" y="2258568"/>
+            <a:off x="2938272" y="2258568"/>
             <a:ext cx="1828800" cy="292608"/>
           </a:xfrm>
           <a:prstGeom prst="rect">
@@ -24679,13 +24976,13 @@
             <a:r>
               <a:rPr lang="en-US" sz="1300" b="1" dirty="0">
                 <a:solidFill>
-                  <a:srgbClr val="4C1D95"/>
+                  <a:srgbClr val="0F766E"/>
                 </a:solidFill>
                 <a:latin typeface="Trebuchet MS" pitchFamily="34" charset="0"/>
                 <a:ea typeface="Trebuchet MS" pitchFamily="34" charset="-122"/>
                 <a:cs typeface="Trebuchet MS" pitchFamily="34" charset="-120"/>
               </a:rPr>
-              <a:t>re</a:t>
+              <a:t>apply</a:t>
             </a:r>
             <a:endParaRPr lang="en-US" sz="1300" dirty="0"/>
           </a:p>
@@ -24699,7 +24996,7 @@
         </p:nvSpPr>
         <p:spPr>
           <a:xfrm>
-            <a:off x="2221992" y="2569464"/>
+            <a:off x="2938272" y="2569464"/>
             <a:ext cx="1828800" cy="201168"/>
           </a:xfrm>
           <a:prstGeom prst="rect">
@@ -24724,7 +25021,7 @@
                 <a:ea typeface="Calibri" pitchFamily="34" charset="-122"/>
                 <a:cs typeface="Calibri" pitchFamily="34" charset="-120"/>
               </a:rPr>
-              <a:t>again</a:t>
+              <a:t>to put or place onto</a:t>
             </a:r>
             <a:endParaRPr lang="en-US" sz="850" dirty="0"/>
           </a:p>
@@ -24732,13 +25029,52 @@
       </p:sp>
       <p:sp>
         <p:nvSpPr>
-          <p:cNvPr id="19" name="Shape 17"/>
-          <p:cNvSpPr/>
-          <p:nvPr/>
-        </p:nvSpPr>
-        <p:spPr>
-          <a:xfrm>
-            <a:off x="4370832" y="2258568"/>
+          <p:cNvPr id="19" name="Text 17"/>
+          <p:cNvSpPr/>
+          <p:nvPr/>
+        </p:nvSpPr>
+        <p:spPr>
+          <a:xfrm>
+            <a:off x="2938272" y="2752344"/>
+            <a:ext cx="1828800" cy="182880"/>
+          </a:xfrm>
+          <a:prstGeom prst="rect">
+            <a:avLst/>
+          </a:prstGeom>
+          <a:noFill/>
+          <a:ln/>
+        </p:spPr>
+        <p:txBody>
+          <a:bodyPr wrap="square" lIns="0" tIns="0" rIns="0" bIns="0" rtlCol="0" anchor="t"/>
+          <a:lstStyle/>
+          <a:p>
+            <a:pPr algn="ctr" indent="0" marL="0">
+              <a:buNone/>
+            </a:pPr>
+            <a:r>
+              <a:rPr lang="en-US" sz="700" i="1" dirty="0">
+                <a:solidFill>
+                  <a:srgbClr val="94A3B8"/>
+                </a:solidFill>
+                <a:latin typeface="Calibri" pitchFamily="34" charset="0"/>
+                <a:ea typeface="Calibri" pitchFamily="34" charset="-122"/>
+                <a:cs typeface="Calibri" pitchFamily="34" charset="-120"/>
+              </a:rPr>
+              <a:t>'y' changes to 'ic' before suffix</a:t>
+            </a:r>
+            <a:endParaRPr lang="en-US" sz="700" dirty="0"/>
+          </a:p>
+        </p:txBody>
+      </p:sp>
+      <p:sp>
+        <p:nvSpPr>
+          <p:cNvPr id="20" name="Shape 18"/>
+          <p:cNvSpPr/>
+          <p:nvPr/>
+        </p:nvSpPr>
+        <p:spPr>
+          <a:xfrm>
+            <a:off x="5803392" y="2258568"/>
             <a:ext cx="1828800" cy="292608"/>
           </a:xfrm>
           <a:prstGeom prst="rect">
@@ -24747,11 +25083,11 @@
             </a:avLst>
           </a:prstGeom>
           <a:solidFill>
-            <a:srgbClr val="CCFBF1"/>
+            <a:srgbClr val="FCE7F3"/>
           </a:solidFill>
           <a:ln w="19050">
             <a:solidFill>
-              <a:srgbClr val="0D9488"/>
+              <a:srgbClr val="DB2777"/>
             </a:solidFill>
             <a:prstDash val="solid"/>
           </a:ln>
@@ -24766,13 +25102,13 @@
       </p:sp>
       <p:sp>
         <p:nvSpPr>
-          <p:cNvPr id="20" name="Text 18"/>
-          <p:cNvSpPr/>
-          <p:nvPr/>
-        </p:nvSpPr>
-        <p:spPr>
-          <a:xfrm>
-            <a:off x="4370832" y="2258568"/>
+          <p:cNvPr id="21" name="Text 19"/>
+          <p:cNvSpPr/>
+          <p:nvPr/>
+        </p:nvSpPr>
+        <p:spPr>
+          <a:xfrm>
+            <a:off x="5803392" y="2258568"/>
             <a:ext cx="1828800" cy="292608"/>
           </a:xfrm>
           <a:prstGeom prst="rect">
@@ -24791,13 +25127,13 @@
             <a:r>
               <a:rPr lang="en-US" sz="1300" b="1" dirty="0">
                 <a:solidFill>
-                  <a:srgbClr val="0F766E"/>
+                  <a:srgbClr val="9D174D"/>
                 </a:solidFill>
                 <a:latin typeface="Trebuchet MS" pitchFamily="34" charset="0"/>
                 <a:ea typeface="Trebuchet MS" pitchFamily="34" charset="-122"/>
                 <a:cs typeface="Trebuchet MS" pitchFamily="34" charset="-120"/>
               </a:rPr>
-              <a:t>apply</a:t>
+              <a:t>able</a:t>
             </a:r>
             <a:endParaRPr lang="en-US" sz="1300" dirty="0"/>
           </a:p>
@@ -24805,13 +25141,13 @@
       </p:sp>
       <p:sp>
         <p:nvSpPr>
-          <p:cNvPr id="21" name="Text 19"/>
-          <p:cNvSpPr/>
-          <p:nvPr/>
-        </p:nvSpPr>
-        <p:spPr>
-          <a:xfrm>
-            <a:off x="4370832" y="2569464"/>
+          <p:cNvPr id="22" name="Text 20"/>
+          <p:cNvSpPr/>
+          <p:nvPr/>
+        </p:nvSpPr>
+        <p:spPr>
+          <a:xfrm>
+            <a:off x="5803392" y="2569464"/>
             <a:ext cx="1828800" cy="201168"/>
           </a:xfrm>
           <a:prstGeom prst="rect">
@@ -24836,7 +25172,7 @@
                 <a:ea typeface="Calibri" pitchFamily="34" charset="-122"/>
                 <a:cs typeface="Calibri" pitchFamily="34" charset="-120"/>
               </a:rPr>
-              <a:t>to put or place onto</a:t>
+              <a:t>able to be</a:t>
             </a:r>
             <a:endParaRPr lang="en-US" sz="850" dirty="0"/>
           </a:p>
@@ -24844,216 +25180,197 @@
       </p:sp>
       <p:sp>
         <p:nvSpPr>
-          <p:cNvPr id="22" name="Text 20"/>
-          <p:cNvSpPr/>
-          <p:nvPr/>
-        </p:nvSpPr>
-        <p:spPr>
-          <a:xfrm>
-            <a:off x="4370832" y="2752344"/>
-            <a:ext cx="1828800" cy="182880"/>
-          </a:xfrm>
-          <a:prstGeom prst="rect">
-            <a:avLst/>
-          </a:prstGeom>
-          <a:noFill/>
-          <a:ln/>
-        </p:spPr>
-        <p:txBody>
-          <a:bodyPr wrap="square" lIns="0" tIns="0" rIns="0" bIns="0" rtlCol="0" anchor="t"/>
-          <a:lstStyle/>
-          <a:p>
-            <a:pPr algn="ctr" indent="0" marL="0">
-              <a:buNone/>
-            </a:pPr>
-            <a:r>
-              <a:rPr lang="en-US" sz="700" i="1" dirty="0">
-                <a:solidFill>
-                  <a:srgbClr val="94A3B8"/>
+          <p:cNvPr id="23" name="Shape 21"/>
+          <p:cNvSpPr/>
+          <p:nvPr/>
+        </p:nvSpPr>
+        <p:spPr>
+          <a:xfrm>
+            <a:off x="365760" y="3273552"/>
+            <a:ext cx="1371600" cy="658368"/>
+          </a:xfrm>
+          <a:prstGeom prst="rect">
+            <a:avLst>
+              <a:gd name="adj" fmla="val 8333"/>
+            </a:avLst>
+          </a:prstGeom>
+          <a:solidFill>
+            <a:srgbClr val="E2E8F0"/>
+          </a:solidFill>
+          <a:ln w="12700">
+            <a:solidFill>
+              <a:srgbClr val="E2E8F0"/>
+            </a:solidFill>
+            <a:prstDash val="solid"/>
+          </a:ln>
+        </p:spPr>
+      </p:sp>
+      <p:sp>
+        <p:nvSpPr>
+          <p:cNvPr id="24" name="Text 22"/>
+          <p:cNvSpPr/>
+          <p:nvPr/>
+        </p:nvSpPr>
+        <p:spPr>
+          <a:xfrm>
+            <a:off x="365760" y="3273552"/>
+            <a:ext cx="1371600" cy="658368"/>
+          </a:xfrm>
+          <a:prstGeom prst="rect">
+            <a:avLst/>
+          </a:prstGeom>
+          <a:noFill/>
+          <a:ln/>
+        </p:spPr>
+        <p:txBody>
+          <a:bodyPr wrap="square" lIns="0" tIns="0" rIns="0" bIns="0" rtlCol="0" anchor="ctr"/>
+          <a:lstStyle/>
+          <a:p>
+            <a:pPr algn="ctr" indent="0" marL="0">
+              <a:buNone/>
+            </a:pPr>
+            <a:r>
+              <a:rPr lang="en-US" sz="1100" b="1" dirty="0">
+                <a:solidFill>
+                  <a:srgbClr val="475569"/>
+                </a:solidFill>
+                <a:latin typeface="Trebuchet MS" pitchFamily="34" charset="0"/>
+                <a:ea typeface="Trebuchet MS" pitchFamily="34" charset="-122"/>
+                <a:cs typeface="Trebuchet MS" pitchFamily="34" charset="-120"/>
+              </a:rPr>
+              <a:t>Syllables</a:t>
+            </a:r>
+            <a:endParaRPr lang="en-US" sz="1100" dirty="0"/>
+          </a:p>
+        </p:txBody>
+      </p:sp>
+      <p:sp>
+        <p:nvSpPr>
+          <p:cNvPr id="25" name="Shape 23"/>
+          <p:cNvSpPr/>
+          <p:nvPr/>
+        </p:nvSpPr>
+        <p:spPr>
+          <a:xfrm>
+            <a:off x="1874520" y="3273552"/>
+            <a:ext cx="6903720" cy="658368"/>
+          </a:xfrm>
+          <a:prstGeom prst="rect">
+            <a:avLst>
+              <a:gd name="adj" fmla="val 8333"/>
+            </a:avLst>
+          </a:prstGeom>
+          <a:solidFill>
+            <a:srgbClr val="F8FAFC"/>
+          </a:solidFill>
+          <a:ln w="12700">
+            <a:solidFill>
+              <a:srgbClr val="E2E8F0"/>
+            </a:solidFill>
+            <a:prstDash val="dash"/>
+          </a:ln>
+        </p:spPr>
+      </p:sp>
+      <p:sp>
+        <p:nvSpPr>
+          <p:cNvPr id="26" name="Text 24"/>
+          <p:cNvSpPr/>
+          <p:nvPr/>
+        </p:nvSpPr>
+        <p:spPr>
+          <a:xfrm>
+            <a:off x="1874520" y="3273552"/>
+            <a:ext cx="6903720" cy="658368"/>
+          </a:xfrm>
+          <a:prstGeom prst="rect">
+            <a:avLst/>
+          </a:prstGeom>
+          <a:noFill/>
+          <a:ln/>
+        </p:spPr>
+        <p:txBody>
+          <a:bodyPr wrap="square" rtlCol="0" anchor="ctr"/>
+          <a:lstStyle/>
+          <a:p>
+            <a:pPr algn="ctr" indent="0" marL="0">
+              <a:buNone/>
+            </a:pPr>
+            <a:r>
+              <a:rPr lang="en-US" sz="1100" i="1" dirty="0">
+                <a:solidFill>
+                  <a:srgbClr val="CBD5E1"/>
                 </a:solidFill>
                 <a:latin typeface="Calibri" pitchFamily="34" charset="0"/>
                 <a:ea typeface="Calibri" pitchFamily="34" charset="-122"/>
                 <a:cs typeface="Calibri" pitchFamily="34" charset="-120"/>
               </a:rPr>
-              <a:t>'y' changes to 'i' before suffix</a:t>
-            </a:r>
-            <a:endParaRPr lang="en-US" sz="700" dirty="0"/>
-          </a:p>
-        </p:txBody>
-      </p:sp>
-      <p:sp>
-        <p:nvSpPr>
-          <p:cNvPr id="23" name="Shape 21"/>
-          <p:cNvSpPr/>
-          <p:nvPr/>
-        </p:nvSpPr>
-        <p:spPr>
-          <a:xfrm>
-            <a:off x="6519672" y="2258568"/>
-            <a:ext cx="1828800" cy="292608"/>
+              <a:t>Write here...</a:t>
+            </a:r>
+            <a:endParaRPr lang="en-US" sz="1100" dirty="0"/>
+          </a:p>
+        </p:txBody>
+      </p:sp>
+      <p:sp>
+        <p:nvSpPr>
+          <p:cNvPr id="27" name="Shape 25"/>
+          <p:cNvSpPr/>
+          <p:nvPr/>
+        </p:nvSpPr>
+        <p:spPr>
+          <a:xfrm>
+            <a:off x="365760" y="4096512"/>
+            <a:ext cx="1371600" cy="804672"/>
           </a:xfrm>
           <a:prstGeom prst="rect">
             <a:avLst>
-              <a:gd name="adj" fmla="val 25000"/>
+              <a:gd name="adj" fmla="val 6818"/>
             </a:avLst>
           </a:prstGeom>
           <a:solidFill>
-            <a:srgbClr val="FCE7F3"/>
-          </a:solidFill>
-          <a:ln w="19050">
-            <a:solidFill>
-              <a:srgbClr val="DB2777"/>
-            </a:solidFill>
-            <a:prstDash val="solid"/>
-          </a:ln>
-          <a:effectLst>
-            <a:outerShdw sx="100000" sy="100000" kx="0" ky="0" algn="bl" rotWithShape="0" blurRad="101600" dist="38100" dir="8100000">
-              <a:srgbClr val="000000">
-                <a:alpha val="12000"/>
-              </a:srgbClr>
-            </a:outerShdw>
-          </a:effectLst>
-        </p:spPr>
-      </p:sp>
-      <p:sp>
-        <p:nvSpPr>
-          <p:cNvPr id="24" name="Text 22"/>
-          <p:cNvSpPr/>
-          <p:nvPr/>
-        </p:nvSpPr>
-        <p:spPr>
-          <a:xfrm>
-            <a:off x="6519672" y="2258568"/>
-            <a:ext cx="1828800" cy="292608"/>
-          </a:xfrm>
-          <a:prstGeom prst="rect">
-            <a:avLst/>
-          </a:prstGeom>
-          <a:noFill/>
-          <a:ln/>
-        </p:spPr>
-        <p:txBody>
-          <a:bodyPr wrap="square" lIns="0" tIns="0" rIns="0" bIns="0" rtlCol="0" anchor="ctr"/>
-          <a:lstStyle/>
-          <a:p>
-            <a:pPr algn="ctr" indent="0" marL="0">
-              <a:buNone/>
-            </a:pPr>
-            <a:r>
-              <a:rPr lang="en-US" sz="1300" b="1" dirty="0">
-                <a:solidFill>
-                  <a:srgbClr val="9D174D"/>
+            <a:srgbClr val="E2E8F0"/>
+          </a:solidFill>
+          <a:ln w="12700">
+            <a:solidFill>
+              <a:srgbClr val="E2E8F0"/>
+            </a:solidFill>
+            <a:prstDash val="solid"/>
+          </a:ln>
+        </p:spPr>
+      </p:sp>
+      <p:sp>
+        <p:nvSpPr>
+          <p:cNvPr id="28" name="Text 26"/>
+          <p:cNvSpPr/>
+          <p:nvPr/>
+        </p:nvSpPr>
+        <p:spPr>
+          <a:xfrm>
+            <a:off x="365760" y="4096512"/>
+            <a:ext cx="1371600" cy="804672"/>
+          </a:xfrm>
+          <a:prstGeom prst="rect">
+            <a:avLst/>
+          </a:prstGeom>
+          <a:noFill/>
+          <a:ln/>
+        </p:spPr>
+        <p:txBody>
+          <a:bodyPr wrap="square" lIns="0" tIns="0" rIns="0" bIns="0" rtlCol="0" anchor="ctr"/>
+          <a:lstStyle/>
+          <a:p>
+            <a:pPr algn="ctr" indent="0" marL="0">
+              <a:buNone/>
+            </a:pPr>
+            <a:r>
+              <a:rPr lang="en-US" sz="1100" b="1" dirty="0">
+                <a:solidFill>
+                  <a:srgbClr val="475569"/>
                 </a:solidFill>
                 <a:latin typeface="Trebuchet MS" pitchFamily="34" charset="0"/>
                 <a:ea typeface="Trebuchet MS" pitchFamily="34" charset="-122"/>
                 <a:cs typeface="Trebuchet MS" pitchFamily="34" charset="-120"/>
               </a:rPr>
-              <a:t>ing</a:t>
-            </a:r>
-            <a:endParaRPr lang="en-US" sz="1300" dirty="0"/>
-          </a:p>
-        </p:txBody>
-      </p:sp>
-      <p:sp>
-        <p:nvSpPr>
-          <p:cNvPr id="25" name="Text 23"/>
-          <p:cNvSpPr/>
-          <p:nvPr/>
-        </p:nvSpPr>
-        <p:spPr>
-          <a:xfrm>
-            <a:off x="6519672" y="2569464"/>
-            <a:ext cx="1828800" cy="201168"/>
-          </a:xfrm>
-          <a:prstGeom prst="rect">
-            <a:avLst/>
-          </a:prstGeom>
-          <a:noFill/>
-          <a:ln/>
-        </p:spPr>
-        <p:txBody>
-          <a:bodyPr wrap="square" lIns="0" tIns="0" rIns="0" bIns="0" rtlCol="0" anchor="t"/>
-          <a:lstStyle/>
-          <a:p>
-            <a:pPr algn="ctr" indent="0" marL="0">
-              <a:buNone/>
-            </a:pPr>
-            <a:r>
-              <a:rPr lang="en-US" sz="850" dirty="0">
-                <a:solidFill>
-                  <a:srgbClr val="475569"/>
-                </a:solidFill>
-                <a:latin typeface="Calibri" pitchFamily="34" charset="0"/>
-                <a:ea typeface="Calibri" pitchFamily="34" charset="-122"/>
-                <a:cs typeface="Calibri" pitchFamily="34" charset="-120"/>
-              </a:rPr>
-              <a:t>action in progress</a:t>
-            </a:r>
-            <a:endParaRPr lang="en-US" sz="850" dirty="0"/>
-          </a:p>
-        </p:txBody>
-      </p:sp>
-      <p:sp>
-        <p:nvSpPr>
-          <p:cNvPr id="26" name="Shape 24"/>
-          <p:cNvSpPr/>
-          <p:nvPr/>
-        </p:nvSpPr>
-        <p:spPr>
-          <a:xfrm>
-            <a:off x="365760" y="3273552"/>
-            <a:ext cx="1371600" cy="658368"/>
-          </a:xfrm>
-          <a:prstGeom prst="rect">
-            <a:avLst>
-              <a:gd name="adj" fmla="val 8333"/>
-            </a:avLst>
-          </a:prstGeom>
-          <a:solidFill>
-            <a:srgbClr val="E2E8F0"/>
-          </a:solidFill>
-          <a:ln w="12700">
-            <a:solidFill>
-              <a:srgbClr val="E2E8F0"/>
-            </a:solidFill>
-            <a:prstDash val="solid"/>
-          </a:ln>
-        </p:spPr>
-      </p:sp>
-      <p:sp>
-        <p:nvSpPr>
-          <p:cNvPr id="27" name="Text 25"/>
-          <p:cNvSpPr/>
-          <p:nvPr/>
-        </p:nvSpPr>
-        <p:spPr>
-          <a:xfrm>
-            <a:off x="365760" y="3273552"/>
-            <a:ext cx="1371600" cy="658368"/>
-          </a:xfrm>
-          <a:prstGeom prst="rect">
-            <a:avLst/>
-          </a:prstGeom>
-          <a:noFill/>
-          <a:ln/>
-        </p:spPr>
-        <p:txBody>
-          <a:bodyPr wrap="square" lIns="0" tIns="0" rIns="0" bIns="0" rtlCol="0" anchor="ctr"/>
-          <a:lstStyle/>
-          <a:p>
-            <a:pPr algn="ctr" indent="0" marL="0">
-              <a:buNone/>
-            </a:pPr>
-            <a:r>
-              <a:rPr lang="en-US" sz="1100" b="1" dirty="0">
-                <a:solidFill>
-                  <a:srgbClr val="475569"/>
-                </a:solidFill>
-                <a:latin typeface="Trebuchet MS" pitchFamily="34" charset="0"/>
-                <a:ea typeface="Trebuchet MS" pitchFamily="34" charset="-122"/>
-                <a:cs typeface="Trebuchet MS" pitchFamily="34" charset="-120"/>
-              </a:rPr>
-              <a:t>Syllables</a:t>
+              <a:t>Phonemes</a:t>
             </a:r>
             <a:endParaRPr lang="en-US" sz="1100" dirty="0"/>
           </a:p>
@@ -25061,80 +25378,14 @@
       </p:sp>
       <p:sp>
         <p:nvSpPr>
-          <p:cNvPr id="28" name="Shape 26"/>
-          <p:cNvSpPr/>
-          <p:nvPr/>
-        </p:nvSpPr>
-        <p:spPr>
-          <a:xfrm>
-            <a:off x="1874520" y="3273552"/>
-            <a:ext cx="6903720" cy="658368"/>
-          </a:xfrm>
-          <a:prstGeom prst="rect">
-            <a:avLst>
-              <a:gd name="adj" fmla="val 8333"/>
-            </a:avLst>
-          </a:prstGeom>
-          <a:solidFill>
-            <a:srgbClr val="F8FAFC"/>
-          </a:solidFill>
-          <a:ln w="12700">
-            <a:solidFill>
-              <a:srgbClr val="E2E8F0"/>
-            </a:solidFill>
-            <a:prstDash val="dash"/>
-          </a:ln>
-        </p:spPr>
-      </p:sp>
-      <p:sp>
-        <p:nvSpPr>
-          <p:cNvPr id="29" name="Text 27"/>
-          <p:cNvSpPr/>
-          <p:nvPr/>
-        </p:nvSpPr>
-        <p:spPr>
-          <a:xfrm>
-            <a:off x="1874520" y="3273552"/>
-            <a:ext cx="6903720" cy="658368"/>
-          </a:xfrm>
-          <a:prstGeom prst="rect">
-            <a:avLst/>
-          </a:prstGeom>
-          <a:noFill/>
-          <a:ln/>
-        </p:spPr>
-        <p:txBody>
-          <a:bodyPr wrap="square" rtlCol="0" anchor="ctr"/>
-          <a:lstStyle/>
-          <a:p>
-            <a:pPr algn="ctr" indent="0" marL="0">
-              <a:buNone/>
-            </a:pPr>
-            <a:r>
-              <a:rPr lang="en-US" sz="1100" i="1" dirty="0">
-                <a:solidFill>
-                  <a:srgbClr val="CBD5E1"/>
-                </a:solidFill>
-                <a:latin typeface="Calibri" pitchFamily="34" charset="0"/>
-                <a:ea typeface="Calibri" pitchFamily="34" charset="-122"/>
-                <a:cs typeface="Calibri" pitchFamily="34" charset="-120"/>
-              </a:rPr>
-              <a:t>Write here...</a:t>
-            </a:r>
-            <a:endParaRPr lang="en-US" sz="1100" dirty="0"/>
-          </a:p>
-        </p:txBody>
-      </p:sp>
-      <p:sp>
-        <p:nvSpPr>
-          <p:cNvPr id="30" name="Shape 28"/>
-          <p:cNvSpPr/>
-          <p:nvPr/>
-        </p:nvSpPr>
-        <p:spPr>
-          <a:xfrm>
-            <a:off x="365760" y="4096512"/>
-            <a:ext cx="1371600" cy="804672"/>
+          <p:cNvPr id="29" name="Shape 27"/>
+          <p:cNvSpPr/>
+          <p:nvPr/>
+        </p:nvSpPr>
+        <p:spPr>
+          <a:xfrm>
+            <a:off x="1874520" y="4096512"/>
+            <a:ext cx="6903720" cy="804672"/>
           </a:xfrm>
           <a:prstGeom prst="rect">
             <a:avLst>
@@ -25142,85 +25393,19 @@
             </a:avLst>
           </a:prstGeom>
           <a:solidFill>
-            <a:srgbClr val="E2E8F0"/>
+            <a:srgbClr val="F8FAFC"/>
           </a:solidFill>
           <a:ln w="12700">
             <a:solidFill>
               <a:srgbClr val="E2E8F0"/>
             </a:solidFill>
-            <a:prstDash val="solid"/>
-          </a:ln>
-        </p:spPr>
-      </p:sp>
-      <p:sp>
-        <p:nvSpPr>
-          <p:cNvPr id="31" name="Text 29"/>
-          <p:cNvSpPr/>
-          <p:nvPr/>
-        </p:nvSpPr>
-        <p:spPr>
-          <a:xfrm>
-            <a:off x="365760" y="4096512"/>
-            <a:ext cx="1371600" cy="804672"/>
-          </a:xfrm>
-          <a:prstGeom prst="rect">
-            <a:avLst/>
-          </a:prstGeom>
-          <a:noFill/>
-          <a:ln/>
-        </p:spPr>
-        <p:txBody>
-          <a:bodyPr wrap="square" lIns="0" tIns="0" rIns="0" bIns="0" rtlCol="0" anchor="ctr"/>
-          <a:lstStyle/>
-          <a:p>
-            <a:pPr algn="ctr" indent="0" marL="0">
-              <a:buNone/>
-            </a:pPr>
-            <a:r>
-              <a:rPr lang="en-US" sz="1100" b="1" dirty="0">
-                <a:solidFill>
-                  <a:srgbClr val="475569"/>
-                </a:solidFill>
-                <a:latin typeface="Trebuchet MS" pitchFamily="34" charset="0"/>
-                <a:ea typeface="Trebuchet MS" pitchFamily="34" charset="-122"/>
-                <a:cs typeface="Trebuchet MS" pitchFamily="34" charset="-120"/>
-              </a:rPr>
-              <a:t>Phonemes</a:t>
-            </a:r>
-            <a:endParaRPr lang="en-US" sz="1100" dirty="0"/>
-          </a:p>
-        </p:txBody>
-      </p:sp>
-      <p:sp>
-        <p:nvSpPr>
-          <p:cNvPr id="32" name="Shape 30"/>
-          <p:cNvSpPr/>
-          <p:nvPr/>
-        </p:nvSpPr>
-        <p:spPr>
-          <a:xfrm>
-            <a:off x="1874520" y="4096512"/>
-            <a:ext cx="6903720" cy="804672"/>
-          </a:xfrm>
-          <a:prstGeom prst="rect">
-            <a:avLst>
-              <a:gd name="adj" fmla="val 6818"/>
-            </a:avLst>
-          </a:prstGeom>
-          <a:solidFill>
-            <a:srgbClr val="F8FAFC"/>
-          </a:solidFill>
-          <a:ln w="12700">
-            <a:solidFill>
-              <a:srgbClr val="E2E8F0"/>
-            </a:solidFill>
             <a:prstDash val="dash"/>
           </a:ln>
         </p:spPr>
       </p:sp>
       <p:sp>
         <p:nvSpPr>
-          <p:cNvPr id="33" name="Text 31"/>
+          <p:cNvPr id="30" name="Text 28"/>
           <p:cNvSpPr/>
           <p:nvPr/>
         </p:nvSpPr>
@@ -26401,7 +26586,7 @@
                 <a:ea typeface="Trebuchet MS" pitchFamily="34" charset="-122"/>
                 <a:cs typeface="Trebuchet MS" pitchFamily="34" charset="-120"/>
               </a:rPr>
-              <a:t>reapplying</a:t>
+              <a:t>applicable</a:t>
             </a:r>
             <a:endParaRPr lang="en-US" sz="2800" dirty="0"/>
           </a:p>
@@ -26481,7 +26666,7 @@
         </p:nvSpPr>
         <p:spPr>
           <a:xfrm>
-            <a:off x="2221992" y="2258568"/>
+            <a:off x="2938272" y="2258568"/>
             <a:ext cx="1828800" cy="292608"/>
           </a:xfrm>
           <a:prstGeom prst="rect">
@@ -26490,11 +26675,11 @@
             </a:avLst>
           </a:prstGeom>
           <a:solidFill>
-            <a:srgbClr val="DDD6FE"/>
+            <a:srgbClr val="CCFBF1"/>
           </a:solidFill>
           <a:ln w="19050">
             <a:solidFill>
-              <a:srgbClr val="7C3AED"/>
+              <a:srgbClr val="0D9488"/>
             </a:solidFill>
             <a:prstDash val="solid"/>
           </a:ln>
@@ -26515,7 +26700,7 @@
         </p:nvSpPr>
         <p:spPr>
           <a:xfrm>
-            <a:off x="2221992" y="2258568"/>
+            <a:off x="2938272" y="2258568"/>
             <a:ext cx="1828800" cy="292608"/>
           </a:xfrm>
           <a:prstGeom prst="rect">
@@ -26534,13 +26719,13 @@
             <a:r>
               <a:rPr lang="en-US" sz="1300" b="1" dirty="0">
                 <a:solidFill>
-                  <a:srgbClr val="4C1D95"/>
+                  <a:srgbClr val="0F766E"/>
                 </a:solidFill>
                 <a:latin typeface="Trebuchet MS" pitchFamily="34" charset="0"/>
                 <a:ea typeface="Trebuchet MS" pitchFamily="34" charset="-122"/>
                 <a:cs typeface="Trebuchet MS" pitchFamily="34" charset="-120"/>
               </a:rPr>
-              <a:t>re</a:t>
+              <a:t>apply</a:t>
             </a:r>
             <a:endParaRPr lang="en-US" sz="1300" dirty="0"/>
           </a:p>
@@ -26554,7 +26739,7 @@
         </p:nvSpPr>
         <p:spPr>
           <a:xfrm>
-            <a:off x="2221992" y="2569464"/>
+            <a:off x="2938272" y="2569464"/>
             <a:ext cx="1828800" cy="201168"/>
           </a:xfrm>
           <a:prstGeom prst="rect">
@@ -26579,7 +26764,7 @@
                 <a:ea typeface="Calibri" pitchFamily="34" charset="-122"/>
                 <a:cs typeface="Calibri" pitchFamily="34" charset="-120"/>
               </a:rPr>
-              <a:t>again</a:t>
+              <a:t>to put or place onto</a:t>
             </a:r>
             <a:endParaRPr lang="en-US" sz="850" dirty="0"/>
           </a:p>
@@ -26587,13 +26772,52 @@
       </p:sp>
       <p:sp>
         <p:nvSpPr>
-          <p:cNvPr id="19" name="Shape 17"/>
-          <p:cNvSpPr/>
-          <p:nvPr/>
-        </p:nvSpPr>
-        <p:spPr>
-          <a:xfrm>
-            <a:off x="4370832" y="2258568"/>
+          <p:cNvPr id="19" name="Text 17"/>
+          <p:cNvSpPr/>
+          <p:nvPr/>
+        </p:nvSpPr>
+        <p:spPr>
+          <a:xfrm>
+            <a:off x="2938272" y="2752344"/>
+            <a:ext cx="1828800" cy="182880"/>
+          </a:xfrm>
+          <a:prstGeom prst="rect">
+            <a:avLst/>
+          </a:prstGeom>
+          <a:noFill/>
+          <a:ln/>
+        </p:spPr>
+        <p:txBody>
+          <a:bodyPr wrap="square" lIns="0" tIns="0" rIns="0" bIns="0" rtlCol="0" anchor="t"/>
+          <a:lstStyle/>
+          <a:p>
+            <a:pPr algn="ctr" indent="0" marL="0">
+              <a:buNone/>
+            </a:pPr>
+            <a:r>
+              <a:rPr lang="en-US" sz="700" i="1" dirty="0">
+                <a:solidFill>
+                  <a:srgbClr val="94A3B8"/>
+                </a:solidFill>
+                <a:latin typeface="Calibri" pitchFamily="34" charset="0"/>
+                <a:ea typeface="Calibri" pitchFamily="34" charset="-122"/>
+                <a:cs typeface="Calibri" pitchFamily="34" charset="-120"/>
+              </a:rPr>
+              <a:t>'y' changes to 'ic' before suffix</a:t>
+            </a:r>
+            <a:endParaRPr lang="en-US" sz="700" dirty="0"/>
+          </a:p>
+        </p:txBody>
+      </p:sp>
+      <p:sp>
+        <p:nvSpPr>
+          <p:cNvPr id="20" name="Shape 18"/>
+          <p:cNvSpPr/>
+          <p:nvPr/>
+        </p:nvSpPr>
+        <p:spPr>
+          <a:xfrm>
+            <a:off x="5803392" y="2258568"/>
             <a:ext cx="1828800" cy="292608"/>
           </a:xfrm>
           <a:prstGeom prst="rect">
@@ -26602,11 +26826,11 @@
             </a:avLst>
           </a:prstGeom>
           <a:solidFill>
-            <a:srgbClr val="CCFBF1"/>
+            <a:srgbClr val="FCE7F3"/>
           </a:solidFill>
           <a:ln w="19050">
             <a:solidFill>
-              <a:srgbClr val="0D9488"/>
+              <a:srgbClr val="DB2777"/>
             </a:solidFill>
             <a:prstDash val="solid"/>
           </a:ln>
@@ -26621,13 +26845,13 @@
       </p:sp>
       <p:sp>
         <p:nvSpPr>
-          <p:cNvPr id="20" name="Text 18"/>
-          <p:cNvSpPr/>
-          <p:nvPr/>
-        </p:nvSpPr>
-        <p:spPr>
-          <a:xfrm>
-            <a:off x="4370832" y="2258568"/>
+          <p:cNvPr id="21" name="Text 19"/>
+          <p:cNvSpPr/>
+          <p:nvPr/>
+        </p:nvSpPr>
+        <p:spPr>
+          <a:xfrm>
+            <a:off x="5803392" y="2258568"/>
             <a:ext cx="1828800" cy="292608"/>
           </a:xfrm>
           <a:prstGeom prst="rect">
@@ -26646,13 +26870,13 @@
             <a:r>
               <a:rPr lang="en-US" sz="1300" b="1" dirty="0">
                 <a:solidFill>
-                  <a:srgbClr val="0F766E"/>
+                  <a:srgbClr val="9D174D"/>
                 </a:solidFill>
                 <a:latin typeface="Trebuchet MS" pitchFamily="34" charset="0"/>
                 <a:ea typeface="Trebuchet MS" pitchFamily="34" charset="-122"/>
                 <a:cs typeface="Trebuchet MS" pitchFamily="34" charset="-120"/>
               </a:rPr>
-              <a:t>apply</a:t>
+              <a:t>able</a:t>
             </a:r>
             <a:endParaRPr lang="en-US" sz="1300" dirty="0"/>
           </a:p>
@@ -26660,13 +26884,13 @@
       </p:sp>
       <p:sp>
         <p:nvSpPr>
-          <p:cNvPr id="21" name="Text 19"/>
-          <p:cNvSpPr/>
-          <p:nvPr/>
-        </p:nvSpPr>
-        <p:spPr>
-          <a:xfrm>
-            <a:off x="4370832" y="2569464"/>
+          <p:cNvPr id="22" name="Text 20"/>
+          <p:cNvSpPr/>
+          <p:nvPr/>
+        </p:nvSpPr>
+        <p:spPr>
+          <a:xfrm>
+            <a:off x="5803392" y="2569464"/>
             <a:ext cx="1828800" cy="201168"/>
           </a:xfrm>
           <a:prstGeom prst="rect">
@@ -26691,7 +26915,7 @@
                 <a:ea typeface="Calibri" pitchFamily="34" charset="-122"/>
                 <a:cs typeface="Calibri" pitchFamily="34" charset="-120"/>
               </a:rPr>
-              <a:t>to put or place onto</a:t>
+              <a:t>able to be</a:t>
             </a:r>
             <a:endParaRPr lang="en-US" sz="850" dirty="0"/>
           </a:p>
@@ -26699,75 +26923,29 @@
       </p:sp>
       <p:sp>
         <p:nvSpPr>
-          <p:cNvPr id="22" name="Text 20"/>
-          <p:cNvSpPr/>
-          <p:nvPr/>
-        </p:nvSpPr>
-        <p:spPr>
-          <a:xfrm>
-            <a:off x="4370832" y="2752344"/>
-            <a:ext cx="1828800" cy="182880"/>
-          </a:xfrm>
-          <a:prstGeom prst="rect">
-            <a:avLst/>
-          </a:prstGeom>
-          <a:noFill/>
-          <a:ln/>
-        </p:spPr>
-        <p:txBody>
-          <a:bodyPr wrap="square" lIns="0" tIns="0" rIns="0" bIns="0" rtlCol="0" anchor="t"/>
-          <a:lstStyle/>
-          <a:p>
-            <a:pPr algn="ctr" indent="0" marL="0">
-              <a:buNone/>
-            </a:pPr>
-            <a:r>
-              <a:rPr lang="en-US" sz="700" i="1" dirty="0">
-                <a:solidFill>
-                  <a:srgbClr val="94A3B8"/>
-                </a:solidFill>
-                <a:latin typeface="Calibri" pitchFamily="34" charset="0"/>
-                <a:ea typeface="Calibri" pitchFamily="34" charset="-122"/>
-                <a:cs typeface="Calibri" pitchFamily="34" charset="-120"/>
-              </a:rPr>
-              <a:t>'y' changes to 'i' before suffix</a:t>
-            </a:r>
-            <a:endParaRPr lang="en-US" sz="700" dirty="0"/>
-          </a:p>
-        </p:txBody>
-      </p:sp>
-      <p:sp>
-        <p:nvSpPr>
           <p:cNvPr id="23" name="Shape 21"/>
           <p:cNvSpPr/>
           <p:nvPr/>
         </p:nvSpPr>
         <p:spPr>
           <a:xfrm>
-            <a:off x="6519672" y="2258568"/>
-            <a:ext cx="1828800" cy="292608"/>
+            <a:off x="365760" y="3273552"/>
+            <a:ext cx="1371600" cy="658368"/>
           </a:xfrm>
           <a:prstGeom prst="rect">
             <a:avLst>
-              <a:gd name="adj" fmla="val 25000"/>
+              <a:gd name="adj" fmla="val 8333"/>
             </a:avLst>
           </a:prstGeom>
           <a:solidFill>
-            <a:srgbClr val="FCE7F3"/>
-          </a:solidFill>
-          <a:ln w="19050">
-            <a:solidFill>
-              <a:srgbClr val="DB2777"/>
-            </a:solidFill>
-            <a:prstDash val="solid"/>
-          </a:ln>
-          <a:effectLst>
-            <a:outerShdw sx="100000" sy="100000" kx="0" ky="0" algn="bl" rotWithShape="0" blurRad="101600" dist="38100" dir="8100000">
-              <a:srgbClr val="000000">
-                <a:alpha val="12000"/>
-              </a:srgbClr>
-            </a:outerShdw>
-          </a:effectLst>
+            <a:srgbClr val="E2E8F0"/>
+          </a:solidFill>
+          <a:ln w="12700">
+            <a:solidFill>
+              <a:srgbClr val="E2E8F0"/>
+            </a:solidFill>
+            <a:prstDash val="solid"/>
+          </a:ln>
         </p:spPr>
       </p:sp>
       <p:sp>
@@ -26778,86 +26956,47 @@
         </p:nvSpPr>
         <p:spPr>
           <a:xfrm>
-            <a:off x="6519672" y="2258568"/>
-            <a:ext cx="1828800" cy="292608"/>
-          </a:xfrm>
-          <a:prstGeom prst="rect">
-            <a:avLst/>
-          </a:prstGeom>
-          <a:noFill/>
-          <a:ln/>
-        </p:spPr>
-        <p:txBody>
-          <a:bodyPr wrap="square" lIns="0" tIns="0" rIns="0" bIns="0" rtlCol="0" anchor="ctr"/>
-          <a:lstStyle/>
-          <a:p>
-            <a:pPr algn="ctr" indent="0" marL="0">
-              <a:buNone/>
-            </a:pPr>
-            <a:r>
-              <a:rPr lang="en-US" sz="1300" b="1" dirty="0">
-                <a:solidFill>
-                  <a:srgbClr val="9D174D"/>
+            <a:off x="365760" y="3273552"/>
+            <a:ext cx="1371600" cy="658368"/>
+          </a:xfrm>
+          <a:prstGeom prst="rect">
+            <a:avLst/>
+          </a:prstGeom>
+          <a:noFill/>
+          <a:ln/>
+        </p:spPr>
+        <p:txBody>
+          <a:bodyPr wrap="square" lIns="0" tIns="0" rIns="0" bIns="0" rtlCol="0" anchor="ctr"/>
+          <a:lstStyle/>
+          <a:p>
+            <a:pPr algn="ctr" indent="0" marL="0">
+              <a:buNone/>
+            </a:pPr>
+            <a:r>
+              <a:rPr lang="en-US" sz="1100" b="1" dirty="0">
+                <a:solidFill>
+                  <a:srgbClr val="475569"/>
                 </a:solidFill>
                 <a:latin typeface="Trebuchet MS" pitchFamily="34" charset="0"/>
                 <a:ea typeface="Trebuchet MS" pitchFamily="34" charset="-122"/>
                 <a:cs typeface="Trebuchet MS" pitchFamily="34" charset="-120"/>
               </a:rPr>
-              <a:t>ing</a:t>
-            </a:r>
-            <a:endParaRPr lang="en-US" sz="1300" dirty="0"/>
-          </a:p>
-        </p:txBody>
-      </p:sp>
-      <p:sp>
-        <p:nvSpPr>
-          <p:cNvPr id="25" name="Text 23"/>
-          <p:cNvSpPr/>
-          <p:nvPr/>
-        </p:nvSpPr>
-        <p:spPr>
-          <a:xfrm>
-            <a:off x="6519672" y="2569464"/>
-            <a:ext cx="1828800" cy="201168"/>
-          </a:xfrm>
-          <a:prstGeom prst="rect">
-            <a:avLst/>
-          </a:prstGeom>
-          <a:noFill/>
-          <a:ln/>
-        </p:spPr>
-        <p:txBody>
-          <a:bodyPr wrap="square" lIns="0" tIns="0" rIns="0" bIns="0" rtlCol="0" anchor="t"/>
-          <a:lstStyle/>
-          <a:p>
-            <a:pPr algn="ctr" indent="0" marL="0">
-              <a:buNone/>
-            </a:pPr>
-            <a:r>
-              <a:rPr lang="en-US" sz="850" dirty="0">
-                <a:solidFill>
-                  <a:srgbClr val="475569"/>
-                </a:solidFill>
-                <a:latin typeface="Calibri" pitchFamily="34" charset="0"/>
-                <a:ea typeface="Calibri" pitchFamily="34" charset="-122"/>
-                <a:cs typeface="Calibri" pitchFamily="34" charset="-120"/>
-              </a:rPr>
-              <a:t>action in progress</a:t>
-            </a:r>
-            <a:endParaRPr lang="en-US" sz="850" dirty="0"/>
-          </a:p>
-        </p:txBody>
-      </p:sp>
-      <p:sp>
-        <p:nvSpPr>
-          <p:cNvPr id="26" name="Shape 24"/>
-          <p:cNvSpPr/>
-          <p:nvPr/>
-        </p:nvSpPr>
-        <p:spPr>
-          <a:xfrm>
-            <a:off x="365760" y="3273552"/>
-            <a:ext cx="1371600" cy="658368"/>
+              <a:t>Syllables</a:t>
+            </a:r>
+            <a:endParaRPr lang="en-US" sz="1100" dirty="0"/>
+          </a:p>
+        </p:txBody>
+      </p:sp>
+      <p:sp>
+        <p:nvSpPr>
+          <p:cNvPr id="25" name="Shape 23"/>
+          <p:cNvSpPr/>
+          <p:nvPr/>
+        </p:nvSpPr>
+        <p:spPr>
+          <a:xfrm>
+            <a:off x="1874520" y="3273552"/>
+            <a:ext cx="6903720" cy="658368"/>
           </a:xfrm>
           <a:prstGeom prst="rect">
             <a:avLst>
@@ -26865,11 +27004,38 @@
             </a:avLst>
           </a:prstGeom>
           <a:solidFill>
-            <a:srgbClr val="E2E8F0"/>
-          </a:solidFill>
-          <a:ln w="12700">
-            <a:solidFill>
-              <a:srgbClr val="E2E8F0"/>
+            <a:srgbClr val="CCFBF1"/>
+          </a:solidFill>
+          <a:ln w="12700">
+            <a:solidFill>
+              <a:srgbClr val="0D9488"/>
+            </a:solidFill>
+            <a:prstDash val="solid"/>
+          </a:ln>
+        </p:spPr>
+      </p:sp>
+      <p:sp>
+        <p:nvSpPr>
+          <p:cNvPr id="26" name="Shape 24"/>
+          <p:cNvSpPr/>
+          <p:nvPr/>
+        </p:nvSpPr>
+        <p:spPr>
+          <a:xfrm>
+            <a:off x="1975104" y="3364992"/>
+            <a:ext cx="1554480" cy="475488"/>
+          </a:xfrm>
+          <a:prstGeom prst="rect">
+            <a:avLst>
+              <a:gd name="adj" fmla="val 9615"/>
+            </a:avLst>
+          </a:prstGeom>
+          <a:solidFill>
+            <a:srgbClr val="FFFFFF"/>
+          </a:solidFill>
+          <a:ln w="12700">
+            <a:solidFill>
+              <a:srgbClr val="0D9488"/>
             </a:solidFill>
             <a:prstDash val="solid"/>
           </a:ln>
@@ -26883,63 +27049,75 @@
         </p:nvSpPr>
         <p:spPr>
           <a:xfrm>
-            <a:off x="365760" y="3273552"/>
-            <a:ext cx="1371600" cy="658368"/>
-          </a:xfrm>
-          <a:prstGeom prst="rect">
-            <a:avLst/>
-          </a:prstGeom>
-          <a:noFill/>
-          <a:ln/>
-        </p:spPr>
-        <p:txBody>
-          <a:bodyPr wrap="square" lIns="0" tIns="0" rIns="0" bIns="0" rtlCol="0" anchor="ctr"/>
-          <a:lstStyle/>
-          <a:p>
-            <a:pPr algn="ctr" indent="0" marL="0">
-              <a:buNone/>
-            </a:pPr>
-            <a:r>
-              <a:rPr lang="en-US" sz="1100" b="1" dirty="0">
-                <a:solidFill>
-                  <a:srgbClr val="475569"/>
+            <a:off x="1975104" y="3364992"/>
+            <a:ext cx="1554480" cy="475488"/>
+          </a:xfrm>
+          <a:prstGeom prst="rect">
+            <a:avLst/>
+          </a:prstGeom>
+          <a:noFill/>
+          <a:ln/>
+        </p:spPr>
+        <p:txBody>
+          <a:bodyPr wrap="square" lIns="0" tIns="0" rIns="0" bIns="0" rtlCol="0" anchor="ctr"/>
+          <a:lstStyle/>
+          <a:p>
+            <a:pPr algn="ctr" indent="0" marL="0">
+              <a:buNone/>
+            </a:pPr>
+            <a:r>
+              <a:rPr lang="en-US" sz="1400" b="1" dirty="0">
+                <a:solidFill>
+                  <a:srgbClr val="0D9488"/>
                 </a:solidFill>
                 <a:latin typeface="Trebuchet MS" pitchFamily="34" charset="0"/>
                 <a:ea typeface="Trebuchet MS" pitchFamily="34" charset="-122"/>
                 <a:cs typeface="Trebuchet MS" pitchFamily="34" charset="-120"/>
               </a:rPr>
-              <a:t>Syllables</a:t>
-            </a:r>
-            <a:endParaRPr lang="en-US" sz="1100" dirty="0"/>
-          </a:p>
-        </p:txBody>
-      </p:sp>
-      <p:sp>
-        <p:nvSpPr>
-          <p:cNvPr id="28" name="Shape 26"/>
-          <p:cNvSpPr/>
-          <p:nvPr/>
-        </p:nvSpPr>
-        <p:spPr>
-          <a:xfrm>
-            <a:off x="1874520" y="3273552"/>
-            <a:ext cx="6903720" cy="658368"/>
-          </a:xfrm>
-          <a:prstGeom prst="rect">
-            <a:avLst>
-              <a:gd name="adj" fmla="val 8333"/>
-            </a:avLst>
-          </a:prstGeom>
-          <a:solidFill>
-            <a:srgbClr val="CCFBF1"/>
-          </a:solidFill>
-          <a:ln w="12700">
-            <a:solidFill>
-              <a:srgbClr val="0D9488"/>
-            </a:solidFill>
-            <a:prstDash val="solid"/>
-          </a:ln>
-        </p:spPr>
+              <a:t>ap</a:t>
+            </a:r>
+            <a:endParaRPr lang="en-US" sz="1400" dirty="0"/>
+          </a:p>
+        </p:txBody>
+      </p:sp>
+      <p:sp>
+        <p:nvSpPr>
+          <p:cNvPr id="28" name="Text 26"/>
+          <p:cNvSpPr/>
+          <p:nvPr/>
+        </p:nvSpPr>
+        <p:spPr>
+          <a:xfrm>
+            <a:off x="3529584" y="3364992"/>
+            <a:ext cx="73152" cy="475488"/>
+          </a:xfrm>
+          <a:prstGeom prst="rect">
+            <a:avLst/>
+          </a:prstGeom>
+          <a:noFill/>
+          <a:ln/>
+        </p:spPr>
+        <p:txBody>
+          <a:bodyPr wrap="square" lIns="0" tIns="0" rIns="0" bIns="0" rtlCol="0" anchor="ctr"/>
+          <a:lstStyle/>
+          <a:p>
+            <a:pPr algn="ctr" indent="0" marL="0">
+              <a:buNone/>
+            </a:pPr>
+            <a:r>
+              <a:rPr lang="en-US" sz="1600" b="1" dirty="0">
+                <a:solidFill>
+                  <a:srgbClr val="0D9488"/>
+                </a:solidFill>
+                <a:latin typeface="Trebuchet MS" pitchFamily="34" charset="0"/>
+                <a:ea typeface="Trebuchet MS" pitchFamily="34" charset="-122"/>
+                <a:cs typeface="Trebuchet MS" pitchFamily="34" charset="-120"/>
+              </a:rPr>
+              <a:t>·</a:t>
+            </a:r>
+            <a:endParaRPr lang="en-US" sz="1600" dirty="0"/>
+          </a:p>
+        </p:txBody>
       </p:sp>
       <p:sp>
         <p:nvSpPr>
@@ -26949,7 +27127,7 @@
         </p:nvSpPr>
         <p:spPr>
           <a:xfrm>
-            <a:off x="1975104" y="3364992"/>
+            <a:off x="3602736" y="3364992"/>
             <a:ext cx="1554480" cy="475488"/>
           </a:xfrm>
           <a:prstGeom prst="rect">
@@ -26976,7 +27154,7 @@
         </p:nvSpPr>
         <p:spPr>
           <a:xfrm>
-            <a:off x="1975104" y="3364992"/>
+            <a:off x="3602736" y="3364992"/>
             <a:ext cx="1554480" cy="475488"/>
           </a:xfrm>
           <a:prstGeom prst="rect">
@@ -27001,7 +27179,7 @@
                 <a:ea typeface="Trebuchet MS" pitchFamily="34" charset="-122"/>
                 <a:cs typeface="Trebuchet MS" pitchFamily="34" charset="-120"/>
               </a:rPr>
-              <a:t>re</a:t>
+              <a:t>pli</a:t>
             </a:r>
             <a:endParaRPr lang="en-US" sz="1400" dirty="0"/>
           </a:p>
@@ -27015,7 +27193,7 @@
         </p:nvSpPr>
         <p:spPr>
           <a:xfrm>
-            <a:off x="3529584" y="3364992"/>
+            <a:off x="5157216" y="3364992"/>
             <a:ext cx="73152" cy="475488"/>
           </a:xfrm>
           <a:prstGeom prst="rect">
@@ -27054,7 +27232,7 @@
         </p:nvSpPr>
         <p:spPr>
           <a:xfrm>
-            <a:off x="3602736" y="3364992"/>
+            <a:off x="5230368" y="3364992"/>
             <a:ext cx="1554480" cy="475488"/>
           </a:xfrm>
           <a:prstGeom prst="rect">
@@ -27081,7 +27259,7 @@
         </p:nvSpPr>
         <p:spPr>
           <a:xfrm>
-            <a:off x="3602736" y="3364992"/>
+            <a:off x="5230368" y="3364992"/>
             <a:ext cx="1554480" cy="475488"/>
           </a:xfrm>
           <a:prstGeom prst="rect">
@@ -27106,7 +27284,7 @@
                 <a:ea typeface="Trebuchet MS" pitchFamily="34" charset="-122"/>
                 <a:cs typeface="Trebuchet MS" pitchFamily="34" charset="-120"/>
               </a:rPr>
-              <a:t>ap</a:t>
+              <a:t>ca</a:t>
             </a:r>
             <a:endParaRPr lang="en-US" sz="1400" dirty="0"/>
           </a:p>
@@ -27120,7 +27298,7 @@
         </p:nvSpPr>
         <p:spPr>
           <a:xfrm>
-            <a:off x="5157216" y="3364992"/>
+            <a:off x="6784848" y="3364992"/>
             <a:ext cx="73152" cy="475488"/>
           </a:xfrm>
           <a:prstGeom prst="rect">
@@ -27159,7 +27337,7 @@
         </p:nvSpPr>
         <p:spPr>
           <a:xfrm>
-            <a:off x="5230368" y="3364992"/>
+            <a:off x="6858000" y="3364992"/>
             <a:ext cx="1554480" cy="475488"/>
           </a:xfrm>
           <a:prstGeom prst="rect">
@@ -27186,7 +27364,7 @@
         </p:nvSpPr>
         <p:spPr>
           <a:xfrm>
-            <a:off x="5230368" y="3364992"/>
+            <a:off x="6858000" y="3364992"/>
             <a:ext cx="1554480" cy="475488"/>
           </a:xfrm>
           <a:prstGeom prst="rect">
@@ -27211,7 +27389,7 @@
                 <a:ea typeface="Trebuchet MS" pitchFamily="34" charset="-122"/>
                 <a:cs typeface="Trebuchet MS" pitchFamily="34" charset="-120"/>
               </a:rPr>
-              <a:t>ply</a:t>
+              <a:t>ble</a:t>
             </a:r>
             <a:endParaRPr lang="en-US" sz="1400" dirty="0"/>
           </a:p>
@@ -27219,119 +27397,80 @@
       </p:sp>
       <p:sp>
         <p:nvSpPr>
-          <p:cNvPr id="37" name="Text 35"/>
-          <p:cNvSpPr/>
-          <p:nvPr/>
-        </p:nvSpPr>
-        <p:spPr>
-          <a:xfrm>
-            <a:off x="6784848" y="3364992"/>
-            <a:ext cx="73152" cy="475488"/>
-          </a:xfrm>
-          <a:prstGeom prst="rect">
-            <a:avLst/>
-          </a:prstGeom>
-          <a:noFill/>
-          <a:ln/>
-        </p:spPr>
-        <p:txBody>
-          <a:bodyPr wrap="square" lIns="0" tIns="0" rIns="0" bIns="0" rtlCol="0" anchor="ctr"/>
-          <a:lstStyle/>
-          <a:p>
-            <a:pPr algn="ctr" indent="0" marL="0">
-              <a:buNone/>
-            </a:pPr>
-            <a:r>
-              <a:rPr lang="en-US" sz="1600" b="1" dirty="0">
-                <a:solidFill>
-                  <a:srgbClr val="0D9488"/>
+          <p:cNvPr id="37" name="Shape 35"/>
+          <p:cNvSpPr/>
+          <p:nvPr/>
+        </p:nvSpPr>
+        <p:spPr>
+          <a:xfrm>
+            <a:off x="365760" y="4096512"/>
+            <a:ext cx="1371600" cy="804672"/>
+          </a:xfrm>
+          <a:prstGeom prst="rect">
+            <a:avLst>
+              <a:gd name="adj" fmla="val 6818"/>
+            </a:avLst>
+          </a:prstGeom>
+          <a:solidFill>
+            <a:srgbClr val="E2E8F0"/>
+          </a:solidFill>
+          <a:ln w="12700">
+            <a:solidFill>
+              <a:srgbClr val="E2E8F0"/>
+            </a:solidFill>
+            <a:prstDash val="solid"/>
+          </a:ln>
+        </p:spPr>
+      </p:sp>
+      <p:sp>
+        <p:nvSpPr>
+          <p:cNvPr id="38" name="Text 36"/>
+          <p:cNvSpPr/>
+          <p:nvPr/>
+        </p:nvSpPr>
+        <p:spPr>
+          <a:xfrm>
+            <a:off x="365760" y="4096512"/>
+            <a:ext cx="1371600" cy="804672"/>
+          </a:xfrm>
+          <a:prstGeom prst="rect">
+            <a:avLst/>
+          </a:prstGeom>
+          <a:noFill/>
+          <a:ln/>
+        </p:spPr>
+        <p:txBody>
+          <a:bodyPr wrap="square" lIns="0" tIns="0" rIns="0" bIns="0" rtlCol="0" anchor="ctr"/>
+          <a:lstStyle/>
+          <a:p>
+            <a:pPr algn="ctr" indent="0" marL="0">
+              <a:buNone/>
+            </a:pPr>
+            <a:r>
+              <a:rPr lang="en-US" sz="1100" b="1" dirty="0">
+                <a:solidFill>
+                  <a:srgbClr val="475569"/>
                 </a:solidFill>
                 <a:latin typeface="Trebuchet MS" pitchFamily="34" charset="0"/>
                 <a:ea typeface="Trebuchet MS" pitchFamily="34" charset="-122"/>
                 <a:cs typeface="Trebuchet MS" pitchFamily="34" charset="-120"/>
               </a:rPr>
-              <a:t>·</a:t>
-            </a:r>
-            <a:endParaRPr lang="en-US" sz="1600" dirty="0"/>
-          </a:p>
-        </p:txBody>
-      </p:sp>
-      <p:sp>
-        <p:nvSpPr>
-          <p:cNvPr id="38" name="Shape 36"/>
-          <p:cNvSpPr/>
-          <p:nvPr/>
-        </p:nvSpPr>
-        <p:spPr>
-          <a:xfrm>
-            <a:off x="6858000" y="3364992"/>
-            <a:ext cx="1554480" cy="475488"/>
-          </a:xfrm>
-          <a:prstGeom prst="rect">
-            <a:avLst>
-              <a:gd name="adj" fmla="val 9615"/>
-            </a:avLst>
-          </a:prstGeom>
-          <a:solidFill>
-            <a:srgbClr val="FFFFFF"/>
-          </a:solidFill>
-          <a:ln w="12700">
-            <a:solidFill>
-              <a:srgbClr val="0D9488"/>
-            </a:solidFill>
-            <a:prstDash val="solid"/>
-          </a:ln>
-        </p:spPr>
-      </p:sp>
-      <p:sp>
-        <p:nvSpPr>
-          <p:cNvPr id="39" name="Text 37"/>
-          <p:cNvSpPr/>
-          <p:nvPr/>
-        </p:nvSpPr>
-        <p:spPr>
-          <a:xfrm>
-            <a:off x="6858000" y="3364992"/>
-            <a:ext cx="1554480" cy="475488"/>
-          </a:xfrm>
-          <a:prstGeom prst="rect">
-            <a:avLst/>
-          </a:prstGeom>
-          <a:noFill/>
-          <a:ln/>
-        </p:spPr>
-        <p:txBody>
-          <a:bodyPr wrap="square" lIns="0" tIns="0" rIns="0" bIns="0" rtlCol="0" anchor="ctr"/>
-          <a:lstStyle/>
-          <a:p>
-            <a:pPr algn="ctr" indent="0" marL="0">
-              <a:buNone/>
-            </a:pPr>
-            <a:r>
-              <a:rPr lang="en-US" sz="1400" b="1" dirty="0">
-                <a:solidFill>
-                  <a:srgbClr val="0D9488"/>
-                </a:solidFill>
-                <a:latin typeface="Trebuchet MS" pitchFamily="34" charset="0"/>
-                <a:ea typeface="Trebuchet MS" pitchFamily="34" charset="-122"/>
-                <a:cs typeface="Trebuchet MS" pitchFamily="34" charset="-120"/>
-              </a:rPr>
-              <a:t>ing</a:t>
-            </a:r>
-            <a:endParaRPr lang="en-US" sz="1400" dirty="0"/>
-          </a:p>
-        </p:txBody>
-      </p:sp>
-      <p:sp>
-        <p:nvSpPr>
-          <p:cNvPr id="40" name="Shape 38"/>
-          <p:cNvSpPr/>
-          <p:nvPr/>
-        </p:nvSpPr>
-        <p:spPr>
-          <a:xfrm>
-            <a:off x="365760" y="4096512"/>
-            <a:ext cx="1371600" cy="804672"/>
+              <a:t>Phonemes</a:t>
+            </a:r>
+            <a:endParaRPr lang="en-US" sz="1100" dirty="0"/>
+          </a:p>
+        </p:txBody>
+      </p:sp>
+      <p:sp>
+        <p:nvSpPr>
+          <p:cNvPr id="39" name="Shape 37"/>
+          <p:cNvSpPr/>
+          <p:nvPr/>
+        </p:nvSpPr>
+        <p:spPr>
+          <a:xfrm>
+            <a:off x="1874520" y="4096512"/>
+            <a:ext cx="6903720" cy="804672"/>
           </a:xfrm>
           <a:prstGeom prst="rect">
             <a:avLst>
@@ -27339,85 +27478,19 @@
             </a:avLst>
           </a:prstGeom>
           <a:solidFill>
-            <a:srgbClr val="E2E8F0"/>
+            <a:srgbClr val="F8FAFC"/>
           </a:solidFill>
           <a:ln w="12700">
             <a:solidFill>
               <a:srgbClr val="E2E8F0"/>
             </a:solidFill>
-            <a:prstDash val="solid"/>
-          </a:ln>
-        </p:spPr>
-      </p:sp>
-      <p:sp>
-        <p:nvSpPr>
-          <p:cNvPr id="41" name="Text 39"/>
-          <p:cNvSpPr/>
-          <p:nvPr/>
-        </p:nvSpPr>
-        <p:spPr>
-          <a:xfrm>
-            <a:off x="365760" y="4096512"/>
-            <a:ext cx="1371600" cy="804672"/>
-          </a:xfrm>
-          <a:prstGeom prst="rect">
-            <a:avLst/>
-          </a:prstGeom>
-          <a:noFill/>
-          <a:ln/>
-        </p:spPr>
-        <p:txBody>
-          <a:bodyPr wrap="square" lIns="0" tIns="0" rIns="0" bIns="0" rtlCol="0" anchor="ctr"/>
-          <a:lstStyle/>
-          <a:p>
-            <a:pPr algn="ctr" indent="0" marL="0">
-              <a:buNone/>
-            </a:pPr>
-            <a:r>
-              <a:rPr lang="en-US" sz="1100" b="1" dirty="0">
-                <a:solidFill>
-                  <a:srgbClr val="475569"/>
-                </a:solidFill>
-                <a:latin typeface="Trebuchet MS" pitchFamily="34" charset="0"/>
-                <a:ea typeface="Trebuchet MS" pitchFamily="34" charset="-122"/>
-                <a:cs typeface="Trebuchet MS" pitchFamily="34" charset="-120"/>
-              </a:rPr>
-              <a:t>Phonemes</a:t>
-            </a:r>
-            <a:endParaRPr lang="en-US" sz="1100" dirty="0"/>
-          </a:p>
-        </p:txBody>
-      </p:sp>
-      <p:sp>
-        <p:nvSpPr>
-          <p:cNvPr id="42" name="Shape 40"/>
-          <p:cNvSpPr/>
-          <p:nvPr/>
-        </p:nvSpPr>
-        <p:spPr>
-          <a:xfrm>
-            <a:off x="1874520" y="4096512"/>
-            <a:ext cx="6903720" cy="804672"/>
-          </a:xfrm>
-          <a:prstGeom prst="rect">
-            <a:avLst>
-              <a:gd name="adj" fmla="val 6818"/>
-            </a:avLst>
-          </a:prstGeom>
-          <a:solidFill>
-            <a:srgbClr val="F8FAFC"/>
-          </a:solidFill>
-          <a:ln w="12700">
-            <a:solidFill>
-              <a:srgbClr val="E2E8F0"/>
-            </a:solidFill>
             <a:prstDash val="dash"/>
           </a:ln>
         </p:spPr>
       </p:sp>
       <p:sp>
         <p:nvSpPr>
-          <p:cNvPr id="43" name="Text 41"/>
+          <p:cNvPr id="40" name="Text 38"/>
           <p:cNvSpPr/>
           <p:nvPr/>
         </p:nvSpPr>
@@ -27879,7 +27952,7 @@
                 <a:ea typeface="Trebuchet MS" pitchFamily="34" charset="-122"/>
                 <a:cs typeface="Trebuchet MS" pitchFamily="34" charset="-120"/>
               </a:rPr>
-              <a:t>reapplying</a:t>
+              <a:t>applicable</a:t>
             </a:r>
             <a:endParaRPr lang="en-US" sz="2800" dirty="0"/>
           </a:p>
@@ -27959,7 +28032,7 @@
         </p:nvSpPr>
         <p:spPr>
           <a:xfrm>
-            <a:off x="2221992" y="2258568"/>
+            <a:off x="2938272" y="2258568"/>
             <a:ext cx="1828800" cy="292608"/>
           </a:xfrm>
           <a:prstGeom prst="rect">
@@ -27968,11 +28041,11 @@
             </a:avLst>
           </a:prstGeom>
           <a:solidFill>
-            <a:srgbClr val="DDD6FE"/>
+            <a:srgbClr val="CCFBF1"/>
           </a:solidFill>
           <a:ln w="19050">
             <a:solidFill>
-              <a:srgbClr val="7C3AED"/>
+              <a:srgbClr val="0D9488"/>
             </a:solidFill>
             <a:prstDash val="solid"/>
           </a:ln>
@@ -27993,7 +28066,7 @@
         </p:nvSpPr>
         <p:spPr>
           <a:xfrm>
-            <a:off x="2221992" y="2258568"/>
+            <a:off x="2938272" y="2258568"/>
             <a:ext cx="1828800" cy="292608"/>
           </a:xfrm>
           <a:prstGeom prst="rect">
@@ -28012,13 +28085,13 @@
             <a:r>
               <a:rPr lang="en-US" sz="1300" b="1" dirty="0">
                 <a:solidFill>
-                  <a:srgbClr val="4C1D95"/>
+                  <a:srgbClr val="0F766E"/>
                 </a:solidFill>
                 <a:latin typeface="Trebuchet MS" pitchFamily="34" charset="0"/>
                 <a:ea typeface="Trebuchet MS" pitchFamily="34" charset="-122"/>
                 <a:cs typeface="Trebuchet MS" pitchFamily="34" charset="-120"/>
               </a:rPr>
-              <a:t>re</a:t>
+              <a:t>apply</a:t>
             </a:r>
             <a:endParaRPr lang="en-US" sz="1300" dirty="0"/>
           </a:p>
@@ -28032,7 +28105,7 @@
         </p:nvSpPr>
         <p:spPr>
           <a:xfrm>
-            <a:off x="2221992" y="2569464"/>
+            <a:off x="2938272" y="2569464"/>
             <a:ext cx="1828800" cy="201168"/>
           </a:xfrm>
           <a:prstGeom prst="rect">
@@ -28057,7 +28130,7 @@
                 <a:ea typeface="Calibri" pitchFamily="34" charset="-122"/>
                 <a:cs typeface="Calibri" pitchFamily="34" charset="-120"/>
               </a:rPr>
-              <a:t>again</a:t>
+              <a:t>to put or place onto</a:t>
             </a:r>
             <a:endParaRPr lang="en-US" sz="850" dirty="0"/>
           </a:p>
@@ -28065,13 +28138,52 @@
       </p:sp>
       <p:sp>
         <p:nvSpPr>
-          <p:cNvPr id="19" name="Shape 17"/>
-          <p:cNvSpPr/>
-          <p:nvPr/>
-        </p:nvSpPr>
-        <p:spPr>
-          <a:xfrm>
-            <a:off x="4370832" y="2258568"/>
+          <p:cNvPr id="19" name="Text 17"/>
+          <p:cNvSpPr/>
+          <p:nvPr/>
+        </p:nvSpPr>
+        <p:spPr>
+          <a:xfrm>
+            <a:off x="2938272" y="2752344"/>
+            <a:ext cx="1828800" cy="182880"/>
+          </a:xfrm>
+          <a:prstGeom prst="rect">
+            <a:avLst/>
+          </a:prstGeom>
+          <a:noFill/>
+          <a:ln/>
+        </p:spPr>
+        <p:txBody>
+          <a:bodyPr wrap="square" lIns="0" tIns="0" rIns="0" bIns="0" rtlCol="0" anchor="t"/>
+          <a:lstStyle/>
+          <a:p>
+            <a:pPr algn="ctr" indent="0" marL="0">
+              <a:buNone/>
+            </a:pPr>
+            <a:r>
+              <a:rPr lang="en-US" sz="700" i="1" dirty="0">
+                <a:solidFill>
+                  <a:srgbClr val="94A3B8"/>
+                </a:solidFill>
+                <a:latin typeface="Calibri" pitchFamily="34" charset="0"/>
+                <a:ea typeface="Calibri" pitchFamily="34" charset="-122"/>
+                <a:cs typeface="Calibri" pitchFamily="34" charset="-120"/>
+              </a:rPr>
+              <a:t>'y' changes to 'ic' before suffix</a:t>
+            </a:r>
+            <a:endParaRPr lang="en-US" sz="700" dirty="0"/>
+          </a:p>
+        </p:txBody>
+      </p:sp>
+      <p:sp>
+        <p:nvSpPr>
+          <p:cNvPr id="20" name="Shape 18"/>
+          <p:cNvSpPr/>
+          <p:nvPr/>
+        </p:nvSpPr>
+        <p:spPr>
+          <a:xfrm>
+            <a:off x="5803392" y="2258568"/>
             <a:ext cx="1828800" cy="292608"/>
           </a:xfrm>
           <a:prstGeom prst="rect">
@@ -28080,11 +28192,11 @@
             </a:avLst>
           </a:prstGeom>
           <a:solidFill>
-            <a:srgbClr val="CCFBF1"/>
+            <a:srgbClr val="FCE7F3"/>
           </a:solidFill>
           <a:ln w="19050">
             <a:solidFill>
-              <a:srgbClr val="0D9488"/>
+              <a:srgbClr val="DB2777"/>
             </a:solidFill>
             <a:prstDash val="solid"/>
           </a:ln>
@@ -28099,13 +28211,13 @@
       </p:sp>
       <p:sp>
         <p:nvSpPr>
-          <p:cNvPr id="20" name="Text 18"/>
-          <p:cNvSpPr/>
-          <p:nvPr/>
-        </p:nvSpPr>
-        <p:spPr>
-          <a:xfrm>
-            <a:off x="4370832" y="2258568"/>
+          <p:cNvPr id="21" name="Text 19"/>
+          <p:cNvSpPr/>
+          <p:nvPr/>
+        </p:nvSpPr>
+        <p:spPr>
+          <a:xfrm>
+            <a:off x="5803392" y="2258568"/>
             <a:ext cx="1828800" cy="292608"/>
           </a:xfrm>
           <a:prstGeom prst="rect">
@@ -28124,13 +28236,13 @@
             <a:r>
               <a:rPr lang="en-US" sz="1300" b="1" dirty="0">
                 <a:solidFill>
-                  <a:srgbClr val="0F766E"/>
+                  <a:srgbClr val="9D174D"/>
                 </a:solidFill>
                 <a:latin typeface="Trebuchet MS" pitchFamily="34" charset="0"/>
                 <a:ea typeface="Trebuchet MS" pitchFamily="34" charset="-122"/>
                 <a:cs typeface="Trebuchet MS" pitchFamily="34" charset="-120"/>
               </a:rPr>
-              <a:t>apply</a:t>
+              <a:t>able</a:t>
             </a:r>
             <a:endParaRPr lang="en-US" sz="1300" dirty="0"/>
           </a:p>
@@ -28138,13 +28250,13 @@
       </p:sp>
       <p:sp>
         <p:nvSpPr>
-          <p:cNvPr id="21" name="Text 19"/>
-          <p:cNvSpPr/>
-          <p:nvPr/>
-        </p:nvSpPr>
-        <p:spPr>
-          <a:xfrm>
-            <a:off x="4370832" y="2569464"/>
+          <p:cNvPr id="22" name="Text 20"/>
+          <p:cNvSpPr/>
+          <p:nvPr/>
+        </p:nvSpPr>
+        <p:spPr>
+          <a:xfrm>
+            <a:off x="5803392" y="2569464"/>
             <a:ext cx="1828800" cy="201168"/>
           </a:xfrm>
           <a:prstGeom prst="rect">
@@ -28169,7 +28281,7 @@
                 <a:ea typeface="Calibri" pitchFamily="34" charset="-122"/>
                 <a:cs typeface="Calibri" pitchFamily="34" charset="-120"/>
               </a:rPr>
-              <a:t>to put or place onto</a:t>
+              <a:t>able to be</a:t>
             </a:r>
             <a:endParaRPr lang="en-US" sz="850" dirty="0"/>
           </a:p>
@@ -28177,14 +28289,911 @@
       </p:sp>
       <p:sp>
         <p:nvSpPr>
-          <p:cNvPr id="22" name="Text 20"/>
-          <p:cNvSpPr/>
-          <p:nvPr/>
-        </p:nvSpPr>
-        <p:spPr>
-          <a:xfrm>
-            <a:off x="4370832" y="2752344"/>
-            <a:ext cx="1828800" cy="182880"/>
+          <p:cNvPr id="23" name="Shape 21"/>
+          <p:cNvSpPr/>
+          <p:nvPr/>
+        </p:nvSpPr>
+        <p:spPr>
+          <a:xfrm>
+            <a:off x="365760" y="3273552"/>
+            <a:ext cx="1371600" cy="658368"/>
+          </a:xfrm>
+          <a:prstGeom prst="rect">
+            <a:avLst>
+              <a:gd name="adj" fmla="val 8333"/>
+            </a:avLst>
+          </a:prstGeom>
+          <a:solidFill>
+            <a:srgbClr val="E2E8F0"/>
+          </a:solidFill>
+          <a:ln w="12700">
+            <a:solidFill>
+              <a:srgbClr val="E2E8F0"/>
+            </a:solidFill>
+            <a:prstDash val="solid"/>
+          </a:ln>
+        </p:spPr>
+      </p:sp>
+      <p:sp>
+        <p:nvSpPr>
+          <p:cNvPr id="24" name="Text 22"/>
+          <p:cNvSpPr/>
+          <p:nvPr/>
+        </p:nvSpPr>
+        <p:spPr>
+          <a:xfrm>
+            <a:off x="365760" y="3273552"/>
+            <a:ext cx="1371600" cy="658368"/>
+          </a:xfrm>
+          <a:prstGeom prst="rect">
+            <a:avLst/>
+          </a:prstGeom>
+          <a:noFill/>
+          <a:ln/>
+        </p:spPr>
+        <p:txBody>
+          <a:bodyPr wrap="square" lIns="0" tIns="0" rIns="0" bIns="0" rtlCol="0" anchor="ctr"/>
+          <a:lstStyle/>
+          <a:p>
+            <a:pPr algn="ctr" indent="0" marL="0">
+              <a:buNone/>
+            </a:pPr>
+            <a:r>
+              <a:rPr lang="en-US" sz="1100" b="1" dirty="0">
+                <a:solidFill>
+                  <a:srgbClr val="475569"/>
+                </a:solidFill>
+                <a:latin typeface="Trebuchet MS" pitchFamily="34" charset="0"/>
+                <a:ea typeface="Trebuchet MS" pitchFamily="34" charset="-122"/>
+                <a:cs typeface="Trebuchet MS" pitchFamily="34" charset="-120"/>
+              </a:rPr>
+              <a:t>Syllables</a:t>
+            </a:r>
+            <a:endParaRPr lang="en-US" sz="1100" dirty="0"/>
+          </a:p>
+        </p:txBody>
+      </p:sp>
+      <p:sp>
+        <p:nvSpPr>
+          <p:cNvPr id="25" name="Shape 23"/>
+          <p:cNvSpPr/>
+          <p:nvPr/>
+        </p:nvSpPr>
+        <p:spPr>
+          <a:xfrm>
+            <a:off x="1874520" y="3273552"/>
+            <a:ext cx="6903720" cy="658368"/>
+          </a:xfrm>
+          <a:prstGeom prst="rect">
+            <a:avLst>
+              <a:gd name="adj" fmla="val 8333"/>
+            </a:avLst>
+          </a:prstGeom>
+          <a:solidFill>
+            <a:srgbClr val="CCFBF1"/>
+          </a:solidFill>
+          <a:ln w="12700">
+            <a:solidFill>
+              <a:srgbClr val="0D9488"/>
+            </a:solidFill>
+            <a:prstDash val="solid"/>
+          </a:ln>
+        </p:spPr>
+      </p:sp>
+      <p:sp>
+        <p:nvSpPr>
+          <p:cNvPr id="26" name="Shape 24"/>
+          <p:cNvSpPr/>
+          <p:nvPr/>
+        </p:nvSpPr>
+        <p:spPr>
+          <a:xfrm>
+            <a:off x="1975104" y="3364992"/>
+            <a:ext cx="1554480" cy="475488"/>
+          </a:xfrm>
+          <a:prstGeom prst="rect">
+            <a:avLst>
+              <a:gd name="adj" fmla="val 9615"/>
+            </a:avLst>
+          </a:prstGeom>
+          <a:solidFill>
+            <a:srgbClr val="FFFFFF"/>
+          </a:solidFill>
+          <a:ln w="12700">
+            <a:solidFill>
+              <a:srgbClr val="0D9488"/>
+            </a:solidFill>
+            <a:prstDash val="solid"/>
+          </a:ln>
+        </p:spPr>
+      </p:sp>
+      <p:sp>
+        <p:nvSpPr>
+          <p:cNvPr id="27" name="Text 25"/>
+          <p:cNvSpPr/>
+          <p:nvPr/>
+        </p:nvSpPr>
+        <p:spPr>
+          <a:xfrm>
+            <a:off x="1975104" y="3364992"/>
+            <a:ext cx="1554480" cy="475488"/>
+          </a:xfrm>
+          <a:prstGeom prst="rect">
+            <a:avLst/>
+          </a:prstGeom>
+          <a:noFill/>
+          <a:ln/>
+        </p:spPr>
+        <p:txBody>
+          <a:bodyPr wrap="square" lIns="0" tIns="0" rIns="0" bIns="0" rtlCol="0" anchor="ctr"/>
+          <a:lstStyle/>
+          <a:p>
+            <a:pPr algn="ctr" indent="0" marL="0">
+              <a:buNone/>
+            </a:pPr>
+            <a:r>
+              <a:rPr lang="en-US" sz="1400" b="1" dirty="0">
+                <a:solidFill>
+                  <a:srgbClr val="0D9488"/>
+                </a:solidFill>
+                <a:latin typeface="Trebuchet MS" pitchFamily="34" charset="0"/>
+                <a:ea typeface="Trebuchet MS" pitchFamily="34" charset="-122"/>
+                <a:cs typeface="Trebuchet MS" pitchFamily="34" charset="-120"/>
+              </a:rPr>
+              <a:t>ap</a:t>
+            </a:r>
+            <a:endParaRPr lang="en-US" sz="1400" dirty="0"/>
+          </a:p>
+        </p:txBody>
+      </p:sp>
+      <p:sp>
+        <p:nvSpPr>
+          <p:cNvPr id="28" name="Text 26"/>
+          <p:cNvSpPr/>
+          <p:nvPr/>
+        </p:nvSpPr>
+        <p:spPr>
+          <a:xfrm>
+            <a:off x="3529584" y="3364992"/>
+            <a:ext cx="73152" cy="475488"/>
+          </a:xfrm>
+          <a:prstGeom prst="rect">
+            <a:avLst/>
+          </a:prstGeom>
+          <a:noFill/>
+          <a:ln/>
+        </p:spPr>
+        <p:txBody>
+          <a:bodyPr wrap="square" lIns="0" tIns="0" rIns="0" bIns="0" rtlCol="0" anchor="ctr"/>
+          <a:lstStyle/>
+          <a:p>
+            <a:pPr algn="ctr" indent="0" marL="0">
+              <a:buNone/>
+            </a:pPr>
+            <a:r>
+              <a:rPr lang="en-US" sz="1600" b="1" dirty="0">
+                <a:solidFill>
+                  <a:srgbClr val="0D9488"/>
+                </a:solidFill>
+                <a:latin typeface="Trebuchet MS" pitchFamily="34" charset="0"/>
+                <a:ea typeface="Trebuchet MS" pitchFamily="34" charset="-122"/>
+                <a:cs typeface="Trebuchet MS" pitchFamily="34" charset="-120"/>
+              </a:rPr>
+              <a:t>·</a:t>
+            </a:r>
+            <a:endParaRPr lang="en-US" sz="1600" dirty="0"/>
+          </a:p>
+        </p:txBody>
+      </p:sp>
+      <p:sp>
+        <p:nvSpPr>
+          <p:cNvPr id="29" name="Shape 27"/>
+          <p:cNvSpPr/>
+          <p:nvPr/>
+        </p:nvSpPr>
+        <p:spPr>
+          <a:xfrm>
+            <a:off x="3602736" y="3364992"/>
+            <a:ext cx="1554480" cy="475488"/>
+          </a:xfrm>
+          <a:prstGeom prst="rect">
+            <a:avLst>
+              <a:gd name="adj" fmla="val 9615"/>
+            </a:avLst>
+          </a:prstGeom>
+          <a:solidFill>
+            <a:srgbClr val="FFFFFF"/>
+          </a:solidFill>
+          <a:ln w="12700">
+            <a:solidFill>
+              <a:srgbClr val="0D9488"/>
+            </a:solidFill>
+            <a:prstDash val="solid"/>
+          </a:ln>
+        </p:spPr>
+      </p:sp>
+      <p:sp>
+        <p:nvSpPr>
+          <p:cNvPr id="30" name="Text 28"/>
+          <p:cNvSpPr/>
+          <p:nvPr/>
+        </p:nvSpPr>
+        <p:spPr>
+          <a:xfrm>
+            <a:off x="3602736" y="3364992"/>
+            <a:ext cx="1554480" cy="475488"/>
+          </a:xfrm>
+          <a:prstGeom prst="rect">
+            <a:avLst/>
+          </a:prstGeom>
+          <a:noFill/>
+          <a:ln/>
+        </p:spPr>
+        <p:txBody>
+          <a:bodyPr wrap="square" lIns="0" tIns="0" rIns="0" bIns="0" rtlCol="0" anchor="ctr"/>
+          <a:lstStyle/>
+          <a:p>
+            <a:pPr algn="ctr" indent="0" marL="0">
+              <a:buNone/>
+            </a:pPr>
+            <a:r>
+              <a:rPr lang="en-US" sz="1400" b="1" dirty="0">
+                <a:solidFill>
+                  <a:srgbClr val="0D9488"/>
+                </a:solidFill>
+                <a:latin typeface="Trebuchet MS" pitchFamily="34" charset="0"/>
+                <a:ea typeface="Trebuchet MS" pitchFamily="34" charset="-122"/>
+                <a:cs typeface="Trebuchet MS" pitchFamily="34" charset="-120"/>
+              </a:rPr>
+              <a:t>pli</a:t>
+            </a:r>
+            <a:endParaRPr lang="en-US" sz="1400" dirty="0"/>
+          </a:p>
+        </p:txBody>
+      </p:sp>
+      <p:sp>
+        <p:nvSpPr>
+          <p:cNvPr id="31" name="Text 29"/>
+          <p:cNvSpPr/>
+          <p:nvPr/>
+        </p:nvSpPr>
+        <p:spPr>
+          <a:xfrm>
+            <a:off x="5157216" y="3364992"/>
+            <a:ext cx="73152" cy="475488"/>
+          </a:xfrm>
+          <a:prstGeom prst="rect">
+            <a:avLst/>
+          </a:prstGeom>
+          <a:noFill/>
+          <a:ln/>
+        </p:spPr>
+        <p:txBody>
+          <a:bodyPr wrap="square" lIns="0" tIns="0" rIns="0" bIns="0" rtlCol="0" anchor="ctr"/>
+          <a:lstStyle/>
+          <a:p>
+            <a:pPr algn="ctr" indent="0" marL="0">
+              <a:buNone/>
+            </a:pPr>
+            <a:r>
+              <a:rPr lang="en-US" sz="1600" b="1" dirty="0">
+                <a:solidFill>
+                  <a:srgbClr val="0D9488"/>
+                </a:solidFill>
+                <a:latin typeface="Trebuchet MS" pitchFamily="34" charset="0"/>
+                <a:ea typeface="Trebuchet MS" pitchFamily="34" charset="-122"/>
+                <a:cs typeface="Trebuchet MS" pitchFamily="34" charset="-120"/>
+              </a:rPr>
+              <a:t>·</a:t>
+            </a:r>
+            <a:endParaRPr lang="en-US" sz="1600" dirty="0"/>
+          </a:p>
+        </p:txBody>
+      </p:sp>
+      <p:sp>
+        <p:nvSpPr>
+          <p:cNvPr id="32" name="Shape 30"/>
+          <p:cNvSpPr/>
+          <p:nvPr/>
+        </p:nvSpPr>
+        <p:spPr>
+          <a:xfrm>
+            <a:off x="5230368" y="3364992"/>
+            <a:ext cx="1554480" cy="475488"/>
+          </a:xfrm>
+          <a:prstGeom prst="rect">
+            <a:avLst>
+              <a:gd name="adj" fmla="val 9615"/>
+            </a:avLst>
+          </a:prstGeom>
+          <a:solidFill>
+            <a:srgbClr val="FFFFFF"/>
+          </a:solidFill>
+          <a:ln w="12700">
+            <a:solidFill>
+              <a:srgbClr val="0D9488"/>
+            </a:solidFill>
+            <a:prstDash val="solid"/>
+          </a:ln>
+        </p:spPr>
+      </p:sp>
+      <p:sp>
+        <p:nvSpPr>
+          <p:cNvPr id="33" name="Text 31"/>
+          <p:cNvSpPr/>
+          <p:nvPr/>
+        </p:nvSpPr>
+        <p:spPr>
+          <a:xfrm>
+            <a:off x="5230368" y="3364992"/>
+            <a:ext cx="1554480" cy="475488"/>
+          </a:xfrm>
+          <a:prstGeom prst="rect">
+            <a:avLst/>
+          </a:prstGeom>
+          <a:noFill/>
+          <a:ln/>
+        </p:spPr>
+        <p:txBody>
+          <a:bodyPr wrap="square" lIns="0" tIns="0" rIns="0" bIns="0" rtlCol="0" anchor="ctr"/>
+          <a:lstStyle/>
+          <a:p>
+            <a:pPr algn="ctr" indent="0" marL="0">
+              <a:buNone/>
+            </a:pPr>
+            <a:r>
+              <a:rPr lang="en-US" sz="1400" b="1" dirty="0">
+                <a:solidFill>
+                  <a:srgbClr val="0D9488"/>
+                </a:solidFill>
+                <a:latin typeface="Trebuchet MS" pitchFamily="34" charset="0"/>
+                <a:ea typeface="Trebuchet MS" pitchFamily="34" charset="-122"/>
+                <a:cs typeface="Trebuchet MS" pitchFamily="34" charset="-120"/>
+              </a:rPr>
+              <a:t>ca</a:t>
+            </a:r>
+            <a:endParaRPr lang="en-US" sz="1400" dirty="0"/>
+          </a:p>
+        </p:txBody>
+      </p:sp>
+      <p:sp>
+        <p:nvSpPr>
+          <p:cNvPr id="34" name="Text 32"/>
+          <p:cNvSpPr/>
+          <p:nvPr/>
+        </p:nvSpPr>
+        <p:spPr>
+          <a:xfrm>
+            <a:off x="6784848" y="3364992"/>
+            <a:ext cx="73152" cy="475488"/>
+          </a:xfrm>
+          <a:prstGeom prst="rect">
+            <a:avLst/>
+          </a:prstGeom>
+          <a:noFill/>
+          <a:ln/>
+        </p:spPr>
+        <p:txBody>
+          <a:bodyPr wrap="square" lIns="0" tIns="0" rIns="0" bIns="0" rtlCol="0" anchor="ctr"/>
+          <a:lstStyle/>
+          <a:p>
+            <a:pPr algn="ctr" indent="0" marL="0">
+              <a:buNone/>
+            </a:pPr>
+            <a:r>
+              <a:rPr lang="en-US" sz="1600" b="1" dirty="0">
+                <a:solidFill>
+                  <a:srgbClr val="0D9488"/>
+                </a:solidFill>
+                <a:latin typeface="Trebuchet MS" pitchFamily="34" charset="0"/>
+                <a:ea typeface="Trebuchet MS" pitchFamily="34" charset="-122"/>
+                <a:cs typeface="Trebuchet MS" pitchFamily="34" charset="-120"/>
+              </a:rPr>
+              <a:t>·</a:t>
+            </a:r>
+            <a:endParaRPr lang="en-US" sz="1600" dirty="0"/>
+          </a:p>
+        </p:txBody>
+      </p:sp>
+      <p:sp>
+        <p:nvSpPr>
+          <p:cNvPr id="35" name="Shape 33"/>
+          <p:cNvSpPr/>
+          <p:nvPr/>
+        </p:nvSpPr>
+        <p:spPr>
+          <a:xfrm>
+            <a:off x="6858000" y="3364992"/>
+            <a:ext cx="1554480" cy="475488"/>
+          </a:xfrm>
+          <a:prstGeom prst="rect">
+            <a:avLst>
+              <a:gd name="adj" fmla="val 9615"/>
+            </a:avLst>
+          </a:prstGeom>
+          <a:solidFill>
+            <a:srgbClr val="FFFFFF"/>
+          </a:solidFill>
+          <a:ln w="12700">
+            <a:solidFill>
+              <a:srgbClr val="0D9488"/>
+            </a:solidFill>
+            <a:prstDash val="solid"/>
+          </a:ln>
+        </p:spPr>
+      </p:sp>
+      <p:sp>
+        <p:nvSpPr>
+          <p:cNvPr id="36" name="Text 34"/>
+          <p:cNvSpPr/>
+          <p:nvPr/>
+        </p:nvSpPr>
+        <p:spPr>
+          <a:xfrm>
+            <a:off x="6858000" y="3364992"/>
+            <a:ext cx="1554480" cy="475488"/>
+          </a:xfrm>
+          <a:prstGeom prst="rect">
+            <a:avLst/>
+          </a:prstGeom>
+          <a:noFill/>
+          <a:ln/>
+        </p:spPr>
+        <p:txBody>
+          <a:bodyPr wrap="square" lIns="0" tIns="0" rIns="0" bIns="0" rtlCol="0" anchor="ctr"/>
+          <a:lstStyle/>
+          <a:p>
+            <a:pPr algn="ctr" indent="0" marL="0">
+              <a:buNone/>
+            </a:pPr>
+            <a:r>
+              <a:rPr lang="en-US" sz="1400" b="1" dirty="0">
+                <a:solidFill>
+                  <a:srgbClr val="0D9488"/>
+                </a:solidFill>
+                <a:latin typeface="Trebuchet MS" pitchFamily="34" charset="0"/>
+                <a:ea typeface="Trebuchet MS" pitchFamily="34" charset="-122"/>
+                <a:cs typeface="Trebuchet MS" pitchFamily="34" charset="-120"/>
+              </a:rPr>
+              <a:t>ble</a:t>
+            </a:r>
+            <a:endParaRPr lang="en-US" sz="1400" dirty="0"/>
+          </a:p>
+        </p:txBody>
+      </p:sp>
+      <p:sp>
+        <p:nvSpPr>
+          <p:cNvPr id="37" name="Shape 35"/>
+          <p:cNvSpPr/>
+          <p:nvPr/>
+        </p:nvSpPr>
+        <p:spPr>
+          <a:xfrm>
+            <a:off x="365760" y="4096512"/>
+            <a:ext cx="1371600" cy="804672"/>
+          </a:xfrm>
+          <a:prstGeom prst="rect">
+            <a:avLst>
+              <a:gd name="adj" fmla="val 6818"/>
+            </a:avLst>
+          </a:prstGeom>
+          <a:solidFill>
+            <a:srgbClr val="E2E8F0"/>
+          </a:solidFill>
+          <a:ln w="12700">
+            <a:solidFill>
+              <a:srgbClr val="E2E8F0"/>
+            </a:solidFill>
+            <a:prstDash val="solid"/>
+          </a:ln>
+        </p:spPr>
+      </p:sp>
+      <p:sp>
+        <p:nvSpPr>
+          <p:cNvPr id="38" name="Text 36"/>
+          <p:cNvSpPr/>
+          <p:nvPr/>
+        </p:nvSpPr>
+        <p:spPr>
+          <a:xfrm>
+            <a:off x="365760" y="4096512"/>
+            <a:ext cx="1371600" cy="804672"/>
+          </a:xfrm>
+          <a:prstGeom prst="rect">
+            <a:avLst/>
+          </a:prstGeom>
+          <a:noFill/>
+          <a:ln/>
+        </p:spPr>
+        <p:txBody>
+          <a:bodyPr wrap="square" lIns="0" tIns="0" rIns="0" bIns="0" rtlCol="0" anchor="ctr"/>
+          <a:lstStyle/>
+          <a:p>
+            <a:pPr algn="ctr" indent="0" marL="0">
+              <a:buNone/>
+            </a:pPr>
+            <a:r>
+              <a:rPr lang="en-US" sz="1100" b="1" dirty="0">
+                <a:solidFill>
+                  <a:srgbClr val="475569"/>
+                </a:solidFill>
+                <a:latin typeface="Trebuchet MS" pitchFamily="34" charset="0"/>
+                <a:ea typeface="Trebuchet MS" pitchFamily="34" charset="-122"/>
+                <a:cs typeface="Trebuchet MS" pitchFamily="34" charset="-120"/>
+              </a:rPr>
+              <a:t>Phonemes</a:t>
+            </a:r>
+            <a:endParaRPr lang="en-US" sz="1100" dirty="0"/>
+          </a:p>
+        </p:txBody>
+      </p:sp>
+      <p:sp>
+        <p:nvSpPr>
+          <p:cNvPr id="39" name="Shape 37"/>
+          <p:cNvSpPr/>
+          <p:nvPr/>
+        </p:nvSpPr>
+        <p:spPr>
+          <a:xfrm>
+            <a:off x="1874520" y="4096512"/>
+            <a:ext cx="6903720" cy="804672"/>
+          </a:xfrm>
+          <a:prstGeom prst="rect">
+            <a:avLst>
+              <a:gd name="adj" fmla="val 6818"/>
+            </a:avLst>
+          </a:prstGeom>
+          <a:solidFill>
+            <a:srgbClr val="FCE7F3"/>
+          </a:solidFill>
+          <a:ln w="12700">
+            <a:solidFill>
+              <a:srgbClr val="DB2777"/>
+            </a:solidFill>
+            <a:prstDash val="solid"/>
+          </a:ln>
+        </p:spPr>
+      </p:sp>
+      <p:sp>
+        <p:nvSpPr>
+          <p:cNvPr id="40" name="Shape 38"/>
+          <p:cNvSpPr/>
+          <p:nvPr/>
+        </p:nvSpPr>
+        <p:spPr>
+          <a:xfrm>
+            <a:off x="2023872" y="4169664"/>
+            <a:ext cx="685800" cy="384048"/>
+          </a:xfrm>
+          <a:prstGeom prst="rect">
+            <a:avLst>
+              <a:gd name="adj" fmla="val 9524"/>
+            </a:avLst>
+          </a:prstGeom>
+          <a:solidFill>
+            <a:srgbClr val="FFFFFF"/>
+          </a:solidFill>
+          <a:ln w="12700">
+            <a:solidFill>
+              <a:srgbClr val="DB2777"/>
+            </a:solidFill>
+            <a:prstDash val="solid"/>
+          </a:ln>
+        </p:spPr>
+      </p:sp>
+      <p:sp>
+        <p:nvSpPr>
+          <p:cNvPr id="41" name="Text 39"/>
+          <p:cNvSpPr/>
+          <p:nvPr/>
+        </p:nvSpPr>
+        <p:spPr>
+          <a:xfrm>
+            <a:off x="2023872" y="4169664"/>
+            <a:ext cx="685800" cy="384048"/>
+          </a:xfrm>
+          <a:prstGeom prst="rect">
+            <a:avLst/>
+          </a:prstGeom>
+          <a:noFill/>
+          <a:ln/>
+        </p:spPr>
+        <p:txBody>
+          <a:bodyPr wrap="square" lIns="0" tIns="0" rIns="0" bIns="0" rtlCol="0" anchor="ctr"/>
+          <a:lstStyle/>
+          <a:p>
+            <a:pPr algn="ctr" indent="0" marL="0">
+              <a:buNone/>
+            </a:pPr>
+            <a:r>
+              <a:rPr lang="en-US" sz="900" b="1" dirty="0">
+                <a:solidFill>
+                  <a:srgbClr val="9D174D"/>
+                </a:solidFill>
+                <a:latin typeface="Trebuchet MS" pitchFamily="34" charset="0"/>
+                <a:ea typeface="Trebuchet MS" pitchFamily="34" charset="-122"/>
+                <a:cs typeface="Trebuchet MS" pitchFamily="34" charset="-120"/>
+              </a:rPr>
+              <a:t>a</a:t>
+            </a:r>
+            <a:endParaRPr lang="en-US" sz="900" dirty="0"/>
+          </a:p>
+        </p:txBody>
+      </p:sp>
+      <p:sp>
+        <p:nvSpPr>
+          <p:cNvPr id="42" name="Shape 40"/>
+          <p:cNvSpPr/>
+          <p:nvPr/>
+        </p:nvSpPr>
+        <p:spPr>
+          <a:xfrm>
+            <a:off x="2831592" y="4169664"/>
+            <a:ext cx="685800" cy="384048"/>
+          </a:xfrm>
+          <a:prstGeom prst="rect">
+            <a:avLst>
+              <a:gd name="adj" fmla="val 9524"/>
+            </a:avLst>
+          </a:prstGeom>
+          <a:solidFill>
+            <a:srgbClr val="FFFFFF"/>
+          </a:solidFill>
+          <a:ln w="12700">
+            <a:solidFill>
+              <a:srgbClr val="DB2777"/>
+            </a:solidFill>
+            <a:prstDash val="solid"/>
+          </a:ln>
+        </p:spPr>
+      </p:sp>
+      <p:sp>
+        <p:nvSpPr>
+          <p:cNvPr id="43" name="Text 41"/>
+          <p:cNvSpPr/>
+          <p:nvPr/>
+        </p:nvSpPr>
+        <p:spPr>
+          <a:xfrm>
+            <a:off x="2831592" y="4169664"/>
+            <a:ext cx="685800" cy="384048"/>
+          </a:xfrm>
+          <a:prstGeom prst="rect">
+            <a:avLst/>
+          </a:prstGeom>
+          <a:noFill/>
+          <a:ln/>
+        </p:spPr>
+        <p:txBody>
+          <a:bodyPr wrap="square" lIns="0" tIns="0" rIns="0" bIns="0" rtlCol="0" anchor="ctr"/>
+          <a:lstStyle/>
+          <a:p>
+            <a:pPr algn="ctr" indent="0" marL="0">
+              <a:buNone/>
+            </a:pPr>
+            <a:r>
+              <a:rPr lang="en-US" sz="900" b="1" dirty="0">
+                <a:solidFill>
+                  <a:srgbClr val="9D174D"/>
+                </a:solidFill>
+                <a:latin typeface="Trebuchet MS" pitchFamily="34" charset="0"/>
+                <a:ea typeface="Trebuchet MS" pitchFamily="34" charset="-122"/>
+                <a:cs typeface="Trebuchet MS" pitchFamily="34" charset="-120"/>
+              </a:rPr>
+              <a:t>pp</a:t>
+            </a:r>
+            <a:endParaRPr lang="en-US" sz="900" dirty="0"/>
+          </a:p>
+        </p:txBody>
+      </p:sp>
+      <p:sp>
+        <p:nvSpPr>
+          <p:cNvPr id="44" name="Shape 42"/>
+          <p:cNvSpPr/>
+          <p:nvPr/>
+        </p:nvSpPr>
+        <p:spPr>
+          <a:xfrm>
+            <a:off x="3639312" y="4169664"/>
+            <a:ext cx="685800" cy="384048"/>
+          </a:xfrm>
+          <a:prstGeom prst="rect">
+            <a:avLst>
+              <a:gd name="adj" fmla="val 9524"/>
+            </a:avLst>
+          </a:prstGeom>
+          <a:solidFill>
+            <a:srgbClr val="FFFFFF"/>
+          </a:solidFill>
+          <a:ln w="12700">
+            <a:solidFill>
+              <a:srgbClr val="DB2777"/>
+            </a:solidFill>
+            <a:prstDash val="solid"/>
+          </a:ln>
+        </p:spPr>
+      </p:sp>
+      <p:sp>
+        <p:nvSpPr>
+          <p:cNvPr id="45" name="Text 43"/>
+          <p:cNvSpPr/>
+          <p:nvPr/>
+        </p:nvSpPr>
+        <p:spPr>
+          <a:xfrm>
+            <a:off x="3639312" y="4169664"/>
+            <a:ext cx="685800" cy="384048"/>
+          </a:xfrm>
+          <a:prstGeom prst="rect">
+            <a:avLst/>
+          </a:prstGeom>
+          <a:noFill/>
+          <a:ln/>
+        </p:spPr>
+        <p:txBody>
+          <a:bodyPr wrap="square" lIns="0" tIns="0" rIns="0" bIns="0" rtlCol="0" anchor="ctr"/>
+          <a:lstStyle/>
+          <a:p>
+            <a:pPr algn="ctr" indent="0" marL="0">
+              <a:buNone/>
+            </a:pPr>
+            <a:r>
+              <a:rPr lang="en-US" sz="900" b="1" dirty="0">
+                <a:solidFill>
+                  <a:srgbClr val="9D174D"/>
+                </a:solidFill>
+                <a:latin typeface="Trebuchet MS" pitchFamily="34" charset="0"/>
+                <a:ea typeface="Trebuchet MS" pitchFamily="34" charset="-122"/>
+                <a:cs typeface="Trebuchet MS" pitchFamily="34" charset="-120"/>
+              </a:rPr>
+              <a:t>l</a:t>
+            </a:r>
+            <a:endParaRPr lang="en-US" sz="900" dirty="0"/>
+          </a:p>
+        </p:txBody>
+      </p:sp>
+      <p:sp>
+        <p:nvSpPr>
+          <p:cNvPr id="46" name="Shape 44"/>
+          <p:cNvSpPr/>
+          <p:nvPr/>
+        </p:nvSpPr>
+        <p:spPr>
+          <a:xfrm>
+            <a:off x="4447032" y="4169664"/>
+            <a:ext cx="685800" cy="384048"/>
+          </a:xfrm>
+          <a:prstGeom prst="rect">
+            <a:avLst>
+              <a:gd name="adj" fmla="val 9524"/>
+            </a:avLst>
+          </a:prstGeom>
+          <a:solidFill>
+            <a:srgbClr val="FFFFFF"/>
+          </a:solidFill>
+          <a:ln w="12700">
+            <a:solidFill>
+              <a:srgbClr val="DB2777"/>
+            </a:solidFill>
+            <a:prstDash val="solid"/>
+          </a:ln>
+        </p:spPr>
+      </p:sp>
+      <p:sp>
+        <p:nvSpPr>
+          <p:cNvPr id="47" name="Text 45"/>
+          <p:cNvSpPr/>
+          <p:nvPr/>
+        </p:nvSpPr>
+        <p:spPr>
+          <a:xfrm>
+            <a:off x="4447032" y="4169664"/>
+            <a:ext cx="685800" cy="384048"/>
+          </a:xfrm>
+          <a:prstGeom prst="rect">
+            <a:avLst/>
+          </a:prstGeom>
+          <a:noFill/>
+          <a:ln/>
+        </p:spPr>
+        <p:txBody>
+          <a:bodyPr wrap="square" lIns="0" tIns="0" rIns="0" bIns="0" rtlCol="0" anchor="ctr"/>
+          <a:lstStyle/>
+          <a:p>
+            <a:pPr algn="ctr" indent="0" marL="0">
+              <a:buNone/>
+            </a:pPr>
+            <a:r>
+              <a:rPr lang="en-US" sz="900" b="1" dirty="0">
+                <a:solidFill>
+                  <a:srgbClr val="9D174D"/>
+                </a:solidFill>
+                <a:latin typeface="Trebuchet MS" pitchFamily="34" charset="0"/>
+                <a:ea typeface="Trebuchet MS" pitchFamily="34" charset="-122"/>
+                <a:cs typeface="Trebuchet MS" pitchFamily="34" charset="-120"/>
+              </a:rPr>
+              <a:t>i</a:t>
+            </a:r>
+            <a:endParaRPr lang="en-US" sz="900" dirty="0"/>
+          </a:p>
+        </p:txBody>
+      </p:sp>
+      <p:sp>
+        <p:nvSpPr>
+          <p:cNvPr id="48" name="Shape 46"/>
+          <p:cNvSpPr/>
+          <p:nvPr/>
+        </p:nvSpPr>
+        <p:spPr>
+          <a:xfrm>
+            <a:off x="5254752" y="4169664"/>
+            <a:ext cx="685800" cy="384048"/>
+          </a:xfrm>
+          <a:prstGeom prst="rect">
+            <a:avLst>
+              <a:gd name="adj" fmla="val 9524"/>
+            </a:avLst>
+          </a:prstGeom>
+          <a:solidFill>
+            <a:srgbClr val="FFFFFF"/>
+          </a:solidFill>
+          <a:ln w="12700">
+            <a:solidFill>
+              <a:srgbClr val="DB2777"/>
+            </a:solidFill>
+            <a:prstDash val="solid"/>
+          </a:ln>
+        </p:spPr>
+      </p:sp>
+      <p:sp>
+        <p:nvSpPr>
+          <p:cNvPr id="49" name="Text 47"/>
+          <p:cNvSpPr/>
+          <p:nvPr/>
+        </p:nvSpPr>
+        <p:spPr>
+          <a:xfrm>
+            <a:off x="5254752" y="4169664"/>
+            <a:ext cx="685800" cy="384048"/>
+          </a:xfrm>
+          <a:prstGeom prst="rect">
+            <a:avLst/>
+          </a:prstGeom>
+          <a:noFill/>
+          <a:ln/>
+        </p:spPr>
+        <p:txBody>
+          <a:bodyPr wrap="square" lIns="0" tIns="0" rIns="0" bIns="0" rtlCol="0" anchor="ctr"/>
+          <a:lstStyle/>
+          <a:p>
+            <a:pPr algn="ctr" indent="0" marL="0">
+              <a:buNone/>
+            </a:pPr>
+            <a:r>
+              <a:rPr lang="en-US" sz="900" b="1" dirty="0">
+                <a:solidFill>
+                  <a:srgbClr val="9D174D"/>
+                </a:solidFill>
+                <a:latin typeface="Trebuchet MS" pitchFamily="34" charset="0"/>
+                <a:ea typeface="Trebuchet MS" pitchFamily="34" charset="-122"/>
+                <a:cs typeface="Trebuchet MS" pitchFamily="34" charset="-120"/>
+              </a:rPr>
+              <a:t>c</a:t>
+            </a:r>
+            <a:endParaRPr lang="en-US" sz="900" dirty="0"/>
+          </a:p>
+        </p:txBody>
+      </p:sp>
+      <p:sp>
+        <p:nvSpPr>
+          <p:cNvPr id="50" name="Text 48"/>
+          <p:cNvSpPr/>
+          <p:nvPr/>
+        </p:nvSpPr>
+        <p:spPr>
+          <a:xfrm>
+            <a:off x="5254752" y="4572000"/>
+            <a:ext cx="685800" cy="219456"/>
           </a:xfrm>
           <a:prstGeom prst="rect">
             <a:avLst/>
@@ -28200,7 +29209,7 @@
               <a:buNone/>
             </a:pPr>
             <a:r>
-              <a:rPr lang="en-US" sz="700" i="1" dirty="0">
+              <a:rPr lang="en-US" sz="750" i="1" dirty="0">
                 <a:solidFill>
                   <a:srgbClr val="94A3B8"/>
                 </a:solidFill>
@@ -28208,72 +29217,65 @@
                 <a:ea typeface="Calibri" pitchFamily="34" charset="-122"/>
                 <a:cs typeface="Calibri" pitchFamily="34" charset="-120"/>
               </a:rPr>
-              <a:t>'y' changes to 'i' before suffix</a:t>
-            </a:r>
-            <a:endParaRPr lang="en-US" sz="700" dirty="0"/>
-          </a:p>
-        </p:txBody>
-      </p:sp>
-      <p:sp>
-        <p:nvSpPr>
-          <p:cNvPr id="23" name="Shape 21"/>
-          <p:cNvSpPr/>
-          <p:nvPr/>
-        </p:nvSpPr>
-        <p:spPr>
-          <a:xfrm>
-            <a:off x="6519672" y="2258568"/>
-            <a:ext cx="1828800" cy="292608"/>
+              <a:t>/k/</a:t>
+            </a:r>
+            <a:endParaRPr lang="en-US" sz="750" dirty="0"/>
+          </a:p>
+        </p:txBody>
+      </p:sp>
+      <p:sp>
+        <p:nvSpPr>
+          <p:cNvPr id="51" name="Shape 49"/>
+          <p:cNvSpPr/>
+          <p:nvPr/>
+        </p:nvSpPr>
+        <p:spPr>
+          <a:xfrm>
+            <a:off x="6062472" y="4169664"/>
+            <a:ext cx="685800" cy="384048"/>
           </a:xfrm>
           <a:prstGeom prst="rect">
             <a:avLst>
-              <a:gd name="adj" fmla="val 25000"/>
+              <a:gd name="adj" fmla="val 9524"/>
             </a:avLst>
           </a:prstGeom>
           <a:solidFill>
-            <a:srgbClr val="FCE7F3"/>
-          </a:solidFill>
-          <a:ln w="19050">
+            <a:srgbClr val="FFFFFF"/>
+          </a:solidFill>
+          <a:ln w="12700">
             <a:solidFill>
               <a:srgbClr val="DB2777"/>
             </a:solidFill>
             <a:prstDash val="solid"/>
           </a:ln>
-          <a:effectLst>
-            <a:outerShdw sx="100000" sy="100000" kx="0" ky="0" algn="bl" rotWithShape="0" blurRad="101600" dist="38100" dir="8100000">
-              <a:srgbClr val="000000">
-                <a:alpha val="12000"/>
-              </a:srgbClr>
-            </a:outerShdw>
-          </a:effectLst>
-        </p:spPr>
-      </p:sp>
-      <p:sp>
-        <p:nvSpPr>
-          <p:cNvPr id="24" name="Text 22"/>
-          <p:cNvSpPr/>
-          <p:nvPr/>
-        </p:nvSpPr>
-        <p:spPr>
-          <a:xfrm>
-            <a:off x="6519672" y="2258568"/>
-            <a:ext cx="1828800" cy="292608"/>
-          </a:xfrm>
-          <a:prstGeom prst="rect">
-            <a:avLst/>
-          </a:prstGeom>
-          <a:noFill/>
-          <a:ln/>
-        </p:spPr>
-        <p:txBody>
-          <a:bodyPr wrap="square" lIns="0" tIns="0" rIns="0" bIns="0" rtlCol="0" anchor="ctr"/>
-          <a:lstStyle/>
-          <a:p>
-            <a:pPr algn="ctr" indent="0" marL="0">
-              <a:buNone/>
-            </a:pPr>
-            <a:r>
-              <a:rPr lang="en-US" sz="1300" b="1" dirty="0">
+        </p:spPr>
+      </p:sp>
+      <p:sp>
+        <p:nvSpPr>
+          <p:cNvPr id="52" name="Text 50"/>
+          <p:cNvSpPr/>
+          <p:nvPr/>
+        </p:nvSpPr>
+        <p:spPr>
+          <a:xfrm>
+            <a:off x="6062472" y="4169664"/>
+            <a:ext cx="685800" cy="384048"/>
+          </a:xfrm>
+          <a:prstGeom prst="rect">
+            <a:avLst/>
+          </a:prstGeom>
+          <a:noFill/>
+          <a:ln/>
+        </p:spPr>
+        <p:txBody>
+          <a:bodyPr wrap="square" lIns="0" tIns="0" rIns="0" bIns="0" rtlCol="0" anchor="ctr"/>
+          <a:lstStyle/>
+          <a:p>
+            <a:pPr algn="ctr" indent="0" marL="0">
+              <a:buNone/>
+            </a:pPr>
+            <a:r>
+              <a:rPr lang="en-US" sz="900" b="1" dirty="0">
                 <a:solidFill>
                   <a:srgbClr val="9D174D"/>
                 </a:solidFill>
@@ -28281,1141 +29283,139 @@
                 <a:ea typeface="Trebuchet MS" pitchFamily="34" charset="-122"/>
                 <a:cs typeface="Trebuchet MS" pitchFamily="34" charset="-120"/>
               </a:rPr>
-              <a:t>ing</a:t>
-            </a:r>
-            <a:endParaRPr lang="en-US" sz="1300" dirty="0"/>
-          </a:p>
-        </p:txBody>
-      </p:sp>
-      <p:sp>
-        <p:nvSpPr>
-          <p:cNvPr id="25" name="Text 23"/>
-          <p:cNvSpPr/>
-          <p:nvPr/>
-        </p:nvSpPr>
-        <p:spPr>
-          <a:xfrm>
-            <a:off x="6519672" y="2569464"/>
-            <a:ext cx="1828800" cy="201168"/>
-          </a:xfrm>
-          <a:prstGeom prst="rect">
-            <a:avLst/>
-          </a:prstGeom>
-          <a:noFill/>
-          <a:ln/>
-        </p:spPr>
-        <p:txBody>
-          <a:bodyPr wrap="square" lIns="0" tIns="0" rIns="0" bIns="0" rtlCol="0" anchor="t"/>
-          <a:lstStyle/>
-          <a:p>
-            <a:pPr algn="ctr" indent="0" marL="0">
-              <a:buNone/>
-            </a:pPr>
-            <a:r>
-              <a:rPr lang="en-US" sz="850" dirty="0">
-                <a:solidFill>
-                  <a:srgbClr val="475569"/>
-                </a:solidFill>
-                <a:latin typeface="Calibri" pitchFamily="34" charset="0"/>
-                <a:ea typeface="Calibri" pitchFamily="34" charset="-122"/>
-                <a:cs typeface="Calibri" pitchFamily="34" charset="-120"/>
-              </a:rPr>
-              <a:t>action in progress</a:t>
-            </a:r>
-            <a:endParaRPr lang="en-US" sz="850" dirty="0"/>
-          </a:p>
-        </p:txBody>
-      </p:sp>
-      <p:sp>
-        <p:nvSpPr>
-          <p:cNvPr id="26" name="Shape 24"/>
-          <p:cNvSpPr/>
-          <p:nvPr/>
-        </p:nvSpPr>
-        <p:spPr>
-          <a:xfrm>
-            <a:off x="365760" y="3273552"/>
-            <a:ext cx="1371600" cy="658368"/>
+              <a:t>a</a:t>
+            </a:r>
+            <a:endParaRPr lang="en-US" sz="900" dirty="0"/>
+          </a:p>
+        </p:txBody>
+      </p:sp>
+      <p:sp>
+        <p:nvSpPr>
+          <p:cNvPr id="53" name="Shape 51"/>
+          <p:cNvSpPr/>
+          <p:nvPr/>
+        </p:nvSpPr>
+        <p:spPr>
+          <a:xfrm>
+            <a:off x="6870192" y="4169664"/>
+            <a:ext cx="685800" cy="384048"/>
           </a:xfrm>
           <a:prstGeom prst="rect">
             <a:avLst>
-              <a:gd name="adj" fmla="val 8333"/>
+              <a:gd name="adj" fmla="val 9524"/>
             </a:avLst>
           </a:prstGeom>
           <a:solidFill>
-            <a:srgbClr val="E2E8F0"/>
-          </a:solidFill>
-          <a:ln w="12700">
-            <a:solidFill>
-              <a:srgbClr val="E2E8F0"/>
-            </a:solidFill>
-            <a:prstDash val="solid"/>
-          </a:ln>
-        </p:spPr>
-      </p:sp>
-      <p:sp>
-        <p:nvSpPr>
-          <p:cNvPr id="27" name="Text 25"/>
-          <p:cNvSpPr/>
-          <p:nvPr/>
-        </p:nvSpPr>
-        <p:spPr>
-          <a:xfrm>
-            <a:off x="365760" y="3273552"/>
-            <a:ext cx="1371600" cy="658368"/>
-          </a:xfrm>
-          <a:prstGeom prst="rect">
-            <a:avLst/>
-          </a:prstGeom>
-          <a:noFill/>
-          <a:ln/>
-        </p:spPr>
-        <p:txBody>
-          <a:bodyPr wrap="square" lIns="0" tIns="0" rIns="0" bIns="0" rtlCol="0" anchor="ctr"/>
-          <a:lstStyle/>
-          <a:p>
-            <a:pPr algn="ctr" indent="0" marL="0">
-              <a:buNone/>
-            </a:pPr>
-            <a:r>
-              <a:rPr lang="en-US" sz="1100" b="1" dirty="0">
-                <a:solidFill>
-                  <a:srgbClr val="475569"/>
+            <a:srgbClr val="FFFFFF"/>
+          </a:solidFill>
+          <a:ln w="12700">
+            <a:solidFill>
+              <a:srgbClr val="DB2777"/>
+            </a:solidFill>
+            <a:prstDash val="solid"/>
+          </a:ln>
+        </p:spPr>
+      </p:sp>
+      <p:sp>
+        <p:nvSpPr>
+          <p:cNvPr id="54" name="Text 52"/>
+          <p:cNvSpPr/>
+          <p:nvPr/>
+        </p:nvSpPr>
+        <p:spPr>
+          <a:xfrm>
+            <a:off x="6870192" y="4169664"/>
+            <a:ext cx="685800" cy="384048"/>
+          </a:xfrm>
+          <a:prstGeom prst="rect">
+            <a:avLst/>
+          </a:prstGeom>
+          <a:noFill/>
+          <a:ln/>
+        </p:spPr>
+        <p:txBody>
+          <a:bodyPr wrap="square" lIns="0" tIns="0" rIns="0" bIns="0" rtlCol="0" anchor="ctr"/>
+          <a:lstStyle/>
+          <a:p>
+            <a:pPr algn="ctr" indent="0" marL="0">
+              <a:buNone/>
+            </a:pPr>
+            <a:r>
+              <a:rPr lang="en-US" sz="900" b="1" dirty="0">
+                <a:solidFill>
+                  <a:srgbClr val="9D174D"/>
                 </a:solidFill>
                 <a:latin typeface="Trebuchet MS" pitchFamily="34" charset="0"/>
                 <a:ea typeface="Trebuchet MS" pitchFamily="34" charset="-122"/>
                 <a:cs typeface="Trebuchet MS" pitchFamily="34" charset="-120"/>
               </a:rPr>
-              <a:t>Syllables</a:t>
-            </a:r>
-            <a:endParaRPr lang="en-US" sz="1100" dirty="0"/>
-          </a:p>
-        </p:txBody>
-      </p:sp>
-      <p:sp>
-        <p:nvSpPr>
-          <p:cNvPr id="28" name="Shape 26"/>
-          <p:cNvSpPr/>
-          <p:nvPr/>
-        </p:nvSpPr>
-        <p:spPr>
-          <a:xfrm>
-            <a:off x="1874520" y="3273552"/>
-            <a:ext cx="6903720" cy="658368"/>
+              <a:t>b</a:t>
+            </a:r>
+            <a:endParaRPr lang="en-US" sz="900" dirty="0"/>
+          </a:p>
+        </p:txBody>
+      </p:sp>
+      <p:sp>
+        <p:nvSpPr>
+          <p:cNvPr id="55" name="Shape 53"/>
+          <p:cNvSpPr/>
+          <p:nvPr/>
+        </p:nvSpPr>
+        <p:spPr>
+          <a:xfrm>
+            <a:off x="7677912" y="4169664"/>
+            <a:ext cx="685800" cy="384048"/>
           </a:xfrm>
           <a:prstGeom prst="rect">
             <a:avLst>
-              <a:gd name="adj" fmla="val 8333"/>
+              <a:gd name="adj" fmla="val 9524"/>
             </a:avLst>
           </a:prstGeom>
           <a:solidFill>
-            <a:srgbClr val="CCFBF1"/>
-          </a:solidFill>
-          <a:ln w="12700">
-            <a:solidFill>
-              <a:srgbClr val="0D9488"/>
-            </a:solidFill>
-            <a:prstDash val="solid"/>
-          </a:ln>
-        </p:spPr>
-      </p:sp>
-      <p:sp>
-        <p:nvSpPr>
-          <p:cNvPr id="29" name="Shape 27"/>
-          <p:cNvSpPr/>
-          <p:nvPr/>
-        </p:nvSpPr>
-        <p:spPr>
-          <a:xfrm>
-            <a:off x="1975104" y="3364992"/>
-            <a:ext cx="1554480" cy="475488"/>
-          </a:xfrm>
-          <a:prstGeom prst="rect">
-            <a:avLst>
-              <a:gd name="adj" fmla="val 9615"/>
-            </a:avLst>
-          </a:prstGeom>
-          <a:solidFill>
             <a:srgbClr val="FFFFFF"/>
           </a:solidFill>
           <a:ln w="12700">
             <a:solidFill>
-              <a:srgbClr val="0D9488"/>
-            </a:solidFill>
-            <a:prstDash val="solid"/>
-          </a:ln>
-        </p:spPr>
-      </p:sp>
-      <p:sp>
-        <p:nvSpPr>
-          <p:cNvPr id="30" name="Text 28"/>
-          <p:cNvSpPr/>
-          <p:nvPr/>
-        </p:nvSpPr>
-        <p:spPr>
-          <a:xfrm>
-            <a:off x="1975104" y="3364992"/>
-            <a:ext cx="1554480" cy="475488"/>
-          </a:xfrm>
-          <a:prstGeom prst="rect">
-            <a:avLst/>
-          </a:prstGeom>
-          <a:noFill/>
-          <a:ln/>
-        </p:spPr>
-        <p:txBody>
-          <a:bodyPr wrap="square" lIns="0" tIns="0" rIns="0" bIns="0" rtlCol="0" anchor="ctr"/>
-          <a:lstStyle/>
-          <a:p>
-            <a:pPr algn="ctr" indent="0" marL="0">
-              <a:buNone/>
-            </a:pPr>
-            <a:r>
-              <a:rPr lang="en-US" sz="1400" b="1" dirty="0">
-                <a:solidFill>
-                  <a:srgbClr val="0D9488"/>
+              <a:srgbClr val="DB2777"/>
+            </a:solidFill>
+            <a:prstDash val="solid"/>
+          </a:ln>
+        </p:spPr>
+      </p:sp>
+      <p:sp>
+        <p:nvSpPr>
+          <p:cNvPr id="56" name="Text 54"/>
+          <p:cNvSpPr/>
+          <p:nvPr/>
+        </p:nvSpPr>
+        <p:spPr>
+          <a:xfrm>
+            <a:off x="7677912" y="4169664"/>
+            <a:ext cx="685800" cy="384048"/>
+          </a:xfrm>
+          <a:prstGeom prst="rect">
+            <a:avLst/>
+          </a:prstGeom>
+          <a:noFill/>
+          <a:ln/>
+        </p:spPr>
+        <p:txBody>
+          <a:bodyPr wrap="square" lIns="0" tIns="0" rIns="0" bIns="0" rtlCol="0" anchor="ctr"/>
+          <a:lstStyle/>
+          <a:p>
+            <a:pPr algn="ctr" indent="0" marL="0">
+              <a:buNone/>
+            </a:pPr>
+            <a:r>
+              <a:rPr lang="en-US" sz="900" b="1" dirty="0">
+                <a:solidFill>
+                  <a:srgbClr val="9D174D"/>
                 </a:solidFill>
                 <a:latin typeface="Trebuchet MS" pitchFamily="34" charset="0"/>
                 <a:ea typeface="Trebuchet MS" pitchFamily="34" charset="-122"/>
                 <a:cs typeface="Trebuchet MS" pitchFamily="34" charset="-120"/>
               </a:rPr>
-              <a:t>re</a:t>
-            </a:r>
-            <a:endParaRPr lang="en-US" sz="1400" dirty="0"/>
-          </a:p>
-        </p:txBody>
-      </p:sp>
-      <p:sp>
-        <p:nvSpPr>
-          <p:cNvPr id="31" name="Text 29"/>
-          <p:cNvSpPr/>
-          <p:nvPr/>
-        </p:nvSpPr>
-        <p:spPr>
-          <a:xfrm>
-            <a:off x="3529584" y="3364992"/>
-            <a:ext cx="73152" cy="475488"/>
-          </a:xfrm>
-          <a:prstGeom prst="rect">
-            <a:avLst/>
-          </a:prstGeom>
-          <a:noFill/>
-          <a:ln/>
-        </p:spPr>
-        <p:txBody>
-          <a:bodyPr wrap="square" lIns="0" tIns="0" rIns="0" bIns="0" rtlCol="0" anchor="ctr"/>
-          <a:lstStyle/>
-          <a:p>
-            <a:pPr algn="ctr" indent="0" marL="0">
-              <a:buNone/>
-            </a:pPr>
-            <a:r>
-              <a:rPr lang="en-US" sz="1600" b="1" dirty="0">
-                <a:solidFill>
-                  <a:srgbClr val="0D9488"/>
-                </a:solidFill>
-                <a:latin typeface="Trebuchet MS" pitchFamily="34" charset="0"/>
-                <a:ea typeface="Trebuchet MS" pitchFamily="34" charset="-122"/>
-                <a:cs typeface="Trebuchet MS" pitchFamily="34" charset="-120"/>
-              </a:rPr>
-              <a:t>·</a:t>
-            </a:r>
-            <a:endParaRPr lang="en-US" sz="1600" dirty="0"/>
-          </a:p>
-        </p:txBody>
-      </p:sp>
-      <p:sp>
-        <p:nvSpPr>
-          <p:cNvPr id="32" name="Shape 30"/>
-          <p:cNvSpPr/>
-          <p:nvPr/>
-        </p:nvSpPr>
-        <p:spPr>
-          <a:xfrm>
-            <a:off x="3602736" y="3364992"/>
-            <a:ext cx="1554480" cy="475488"/>
-          </a:xfrm>
-          <a:prstGeom prst="rect">
-            <a:avLst>
-              <a:gd name="adj" fmla="val 9615"/>
-            </a:avLst>
-          </a:prstGeom>
-          <a:solidFill>
-            <a:srgbClr val="FFFFFF"/>
-          </a:solidFill>
-          <a:ln w="12700">
-            <a:solidFill>
-              <a:srgbClr val="0D9488"/>
-            </a:solidFill>
-            <a:prstDash val="solid"/>
-          </a:ln>
-        </p:spPr>
-      </p:sp>
-      <p:sp>
-        <p:nvSpPr>
-          <p:cNvPr id="33" name="Text 31"/>
-          <p:cNvSpPr/>
-          <p:nvPr/>
-        </p:nvSpPr>
-        <p:spPr>
-          <a:xfrm>
-            <a:off x="3602736" y="3364992"/>
-            <a:ext cx="1554480" cy="475488"/>
-          </a:xfrm>
-          <a:prstGeom prst="rect">
-            <a:avLst/>
-          </a:prstGeom>
-          <a:noFill/>
-          <a:ln/>
-        </p:spPr>
-        <p:txBody>
-          <a:bodyPr wrap="square" lIns="0" tIns="0" rIns="0" bIns="0" rtlCol="0" anchor="ctr"/>
-          <a:lstStyle/>
-          <a:p>
-            <a:pPr algn="ctr" indent="0" marL="0">
-              <a:buNone/>
-            </a:pPr>
-            <a:r>
-              <a:rPr lang="en-US" sz="1400" b="1" dirty="0">
-                <a:solidFill>
-                  <a:srgbClr val="0D9488"/>
-                </a:solidFill>
-                <a:latin typeface="Trebuchet MS" pitchFamily="34" charset="0"/>
-                <a:ea typeface="Trebuchet MS" pitchFamily="34" charset="-122"/>
-                <a:cs typeface="Trebuchet MS" pitchFamily="34" charset="-120"/>
-              </a:rPr>
-              <a:t>ap</a:t>
-            </a:r>
-            <a:endParaRPr lang="en-US" sz="1400" dirty="0"/>
-          </a:p>
-        </p:txBody>
-      </p:sp>
-      <p:sp>
-        <p:nvSpPr>
-          <p:cNvPr id="34" name="Text 32"/>
-          <p:cNvSpPr/>
-          <p:nvPr/>
-        </p:nvSpPr>
-        <p:spPr>
-          <a:xfrm>
-            <a:off x="5157216" y="3364992"/>
-            <a:ext cx="73152" cy="475488"/>
-          </a:xfrm>
-          <a:prstGeom prst="rect">
-            <a:avLst/>
-          </a:prstGeom>
-          <a:noFill/>
-          <a:ln/>
-        </p:spPr>
-        <p:txBody>
-          <a:bodyPr wrap="square" lIns="0" tIns="0" rIns="0" bIns="0" rtlCol="0" anchor="ctr"/>
-          <a:lstStyle/>
-          <a:p>
-            <a:pPr algn="ctr" indent="0" marL="0">
-              <a:buNone/>
-            </a:pPr>
-            <a:r>
-              <a:rPr lang="en-US" sz="1600" b="1" dirty="0">
-                <a:solidFill>
-                  <a:srgbClr val="0D9488"/>
-                </a:solidFill>
-                <a:latin typeface="Trebuchet MS" pitchFamily="34" charset="0"/>
-                <a:ea typeface="Trebuchet MS" pitchFamily="34" charset="-122"/>
-                <a:cs typeface="Trebuchet MS" pitchFamily="34" charset="-120"/>
-              </a:rPr>
-              <a:t>·</a:t>
-            </a:r>
-            <a:endParaRPr lang="en-US" sz="1600" dirty="0"/>
-          </a:p>
-        </p:txBody>
-      </p:sp>
-      <p:sp>
-        <p:nvSpPr>
-          <p:cNvPr id="35" name="Shape 33"/>
-          <p:cNvSpPr/>
-          <p:nvPr/>
-        </p:nvSpPr>
-        <p:spPr>
-          <a:xfrm>
-            <a:off x="5230368" y="3364992"/>
-            <a:ext cx="1554480" cy="475488"/>
-          </a:xfrm>
-          <a:prstGeom prst="rect">
-            <a:avLst>
-              <a:gd name="adj" fmla="val 9615"/>
-            </a:avLst>
-          </a:prstGeom>
-          <a:solidFill>
-            <a:srgbClr val="FFFFFF"/>
-          </a:solidFill>
-          <a:ln w="12700">
-            <a:solidFill>
-              <a:srgbClr val="0D9488"/>
-            </a:solidFill>
-            <a:prstDash val="solid"/>
-          </a:ln>
-        </p:spPr>
-      </p:sp>
-      <p:sp>
-        <p:nvSpPr>
-          <p:cNvPr id="36" name="Text 34"/>
-          <p:cNvSpPr/>
-          <p:nvPr/>
-        </p:nvSpPr>
-        <p:spPr>
-          <a:xfrm>
-            <a:off x="5230368" y="3364992"/>
-            <a:ext cx="1554480" cy="475488"/>
-          </a:xfrm>
-          <a:prstGeom prst="rect">
-            <a:avLst/>
-          </a:prstGeom>
-          <a:noFill/>
-          <a:ln/>
-        </p:spPr>
-        <p:txBody>
-          <a:bodyPr wrap="square" lIns="0" tIns="0" rIns="0" bIns="0" rtlCol="0" anchor="ctr"/>
-          <a:lstStyle/>
-          <a:p>
-            <a:pPr algn="ctr" indent="0" marL="0">
-              <a:buNone/>
-            </a:pPr>
-            <a:r>
-              <a:rPr lang="en-US" sz="1400" b="1" dirty="0">
-                <a:solidFill>
-                  <a:srgbClr val="0D9488"/>
-                </a:solidFill>
-                <a:latin typeface="Trebuchet MS" pitchFamily="34" charset="0"/>
-                <a:ea typeface="Trebuchet MS" pitchFamily="34" charset="-122"/>
-                <a:cs typeface="Trebuchet MS" pitchFamily="34" charset="-120"/>
-              </a:rPr>
-              <a:t>ply</a:t>
-            </a:r>
-            <a:endParaRPr lang="en-US" sz="1400" dirty="0"/>
-          </a:p>
-        </p:txBody>
-      </p:sp>
-      <p:sp>
-        <p:nvSpPr>
-          <p:cNvPr id="37" name="Text 35"/>
-          <p:cNvSpPr/>
-          <p:nvPr/>
-        </p:nvSpPr>
-        <p:spPr>
-          <a:xfrm>
-            <a:off x="6784848" y="3364992"/>
-            <a:ext cx="73152" cy="475488"/>
-          </a:xfrm>
-          <a:prstGeom prst="rect">
-            <a:avLst/>
-          </a:prstGeom>
-          <a:noFill/>
-          <a:ln/>
-        </p:spPr>
-        <p:txBody>
-          <a:bodyPr wrap="square" lIns="0" tIns="0" rIns="0" bIns="0" rtlCol="0" anchor="ctr"/>
-          <a:lstStyle/>
-          <a:p>
-            <a:pPr algn="ctr" indent="0" marL="0">
-              <a:buNone/>
-            </a:pPr>
-            <a:r>
-              <a:rPr lang="en-US" sz="1600" b="1" dirty="0">
-                <a:solidFill>
-                  <a:srgbClr val="0D9488"/>
-                </a:solidFill>
-                <a:latin typeface="Trebuchet MS" pitchFamily="34" charset="0"/>
-                <a:ea typeface="Trebuchet MS" pitchFamily="34" charset="-122"/>
-                <a:cs typeface="Trebuchet MS" pitchFamily="34" charset="-120"/>
-              </a:rPr>
-              <a:t>·</a:t>
-            </a:r>
-            <a:endParaRPr lang="en-US" sz="1600" dirty="0"/>
-          </a:p>
-        </p:txBody>
-      </p:sp>
-      <p:sp>
-        <p:nvSpPr>
-          <p:cNvPr id="38" name="Shape 36"/>
-          <p:cNvSpPr/>
-          <p:nvPr/>
-        </p:nvSpPr>
-        <p:spPr>
-          <a:xfrm>
-            <a:off x="6858000" y="3364992"/>
-            <a:ext cx="1554480" cy="475488"/>
-          </a:xfrm>
-          <a:prstGeom prst="rect">
-            <a:avLst>
-              <a:gd name="adj" fmla="val 9615"/>
-            </a:avLst>
-          </a:prstGeom>
-          <a:solidFill>
-            <a:srgbClr val="FFFFFF"/>
-          </a:solidFill>
-          <a:ln w="12700">
-            <a:solidFill>
-              <a:srgbClr val="0D9488"/>
-            </a:solidFill>
-            <a:prstDash val="solid"/>
-          </a:ln>
-        </p:spPr>
-      </p:sp>
-      <p:sp>
-        <p:nvSpPr>
-          <p:cNvPr id="39" name="Text 37"/>
-          <p:cNvSpPr/>
-          <p:nvPr/>
-        </p:nvSpPr>
-        <p:spPr>
-          <a:xfrm>
-            <a:off x="6858000" y="3364992"/>
-            <a:ext cx="1554480" cy="475488"/>
-          </a:xfrm>
-          <a:prstGeom prst="rect">
-            <a:avLst/>
-          </a:prstGeom>
-          <a:noFill/>
-          <a:ln/>
-        </p:spPr>
-        <p:txBody>
-          <a:bodyPr wrap="square" lIns="0" tIns="0" rIns="0" bIns="0" rtlCol="0" anchor="ctr"/>
-          <a:lstStyle/>
-          <a:p>
-            <a:pPr algn="ctr" indent="0" marL="0">
-              <a:buNone/>
-            </a:pPr>
-            <a:r>
-              <a:rPr lang="en-US" sz="1400" b="1" dirty="0">
-                <a:solidFill>
-                  <a:srgbClr val="0D9488"/>
-                </a:solidFill>
-                <a:latin typeface="Trebuchet MS" pitchFamily="34" charset="0"/>
-                <a:ea typeface="Trebuchet MS" pitchFamily="34" charset="-122"/>
-                <a:cs typeface="Trebuchet MS" pitchFamily="34" charset="-120"/>
-              </a:rPr>
-              <a:t>ing</a:t>
-            </a:r>
-            <a:endParaRPr lang="en-US" sz="1400" dirty="0"/>
-          </a:p>
-        </p:txBody>
-      </p:sp>
-      <p:sp>
-        <p:nvSpPr>
-          <p:cNvPr id="40" name="Shape 38"/>
-          <p:cNvSpPr/>
-          <p:nvPr/>
-        </p:nvSpPr>
-        <p:spPr>
-          <a:xfrm>
-            <a:off x="365760" y="4096512"/>
-            <a:ext cx="1371600" cy="804672"/>
-          </a:xfrm>
-          <a:prstGeom prst="rect">
-            <a:avLst>
-              <a:gd name="adj" fmla="val 6818"/>
-            </a:avLst>
-          </a:prstGeom>
-          <a:solidFill>
-            <a:srgbClr val="E2E8F0"/>
-          </a:solidFill>
-          <a:ln w="12700">
-            <a:solidFill>
-              <a:srgbClr val="E2E8F0"/>
-            </a:solidFill>
-            <a:prstDash val="solid"/>
-          </a:ln>
-        </p:spPr>
-      </p:sp>
-      <p:sp>
-        <p:nvSpPr>
-          <p:cNvPr id="41" name="Text 39"/>
-          <p:cNvSpPr/>
-          <p:nvPr/>
-        </p:nvSpPr>
-        <p:spPr>
-          <a:xfrm>
-            <a:off x="365760" y="4096512"/>
-            <a:ext cx="1371600" cy="804672"/>
-          </a:xfrm>
-          <a:prstGeom prst="rect">
-            <a:avLst/>
-          </a:prstGeom>
-          <a:noFill/>
-          <a:ln/>
-        </p:spPr>
-        <p:txBody>
-          <a:bodyPr wrap="square" lIns="0" tIns="0" rIns="0" bIns="0" rtlCol="0" anchor="ctr"/>
-          <a:lstStyle/>
-          <a:p>
-            <a:pPr algn="ctr" indent="0" marL="0">
-              <a:buNone/>
-            </a:pPr>
-            <a:r>
-              <a:rPr lang="en-US" sz="1100" b="1" dirty="0">
-                <a:solidFill>
-                  <a:srgbClr val="475569"/>
-                </a:solidFill>
-                <a:latin typeface="Trebuchet MS" pitchFamily="34" charset="0"/>
-                <a:ea typeface="Trebuchet MS" pitchFamily="34" charset="-122"/>
-                <a:cs typeface="Trebuchet MS" pitchFamily="34" charset="-120"/>
-              </a:rPr>
-              <a:t>Phonemes</a:t>
-            </a:r>
-            <a:endParaRPr lang="en-US" sz="1100" dirty="0"/>
-          </a:p>
-        </p:txBody>
-      </p:sp>
-      <p:sp>
-        <p:nvSpPr>
-          <p:cNvPr id="42" name="Shape 40"/>
-          <p:cNvSpPr/>
-          <p:nvPr/>
-        </p:nvSpPr>
-        <p:spPr>
-          <a:xfrm>
-            <a:off x="1874520" y="4096512"/>
-            <a:ext cx="6903720" cy="658368"/>
-          </a:xfrm>
-          <a:prstGeom prst="rect">
-            <a:avLst>
-              <a:gd name="adj" fmla="val 8333"/>
-            </a:avLst>
-          </a:prstGeom>
-          <a:solidFill>
-            <a:srgbClr val="FCE7F3"/>
-          </a:solidFill>
-          <a:ln w="12700">
-            <a:solidFill>
-              <a:srgbClr val="DB2777"/>
-            </a:solidFill>
-            <a:prstDash val="solid"/>
-          </a:ln>
-        </p:spPr>
-      </p:sp>
-      <p:sp>
-        <p:nvSpPr>
-          <p:cNvPr id="43" name="Shape 41"/>
-          <p:cNvSpPr/>
-          <p:nvPr/>
-        </p:nvSpPr>
-        <p:spPr>
-          <a:xfrm>
-            <a:off x="2023872" y="4169664"/>
-            <a:ext cx="685800" cy="475488"/>
-          </a:xfrm>
-          <a:prstGeom prst="rect">
-            <a:avLst>
-              <a:gd name="adj" fmla="val 7692"/>
-            </a:avLst>
-          </a:prstGeom>
-          <a:solidFill>
-            <a:srgbClr val="FFFFFF"/>
-          </a:solidFill>
-          <a:ln w="12700">
-            <a:solidFill>
-              <a:srgbClr val="DB2777"/>
-            </a:solidFill>
-            <a:prstDash val="solid"/>
-          </a:ln>
-        </p:spPr>
-      </p:sp>
-      <p:sp>
-        <p:nvSpPr>
-          <p:cNvPr id="44" name="Text 42"/>
-          <p:cNvSpPr/>
-          <p:nvPr/>
-        </p:nvSpPr>
-        <p:spPr>
-          <a:xfrm>
-            <a:off x="2023872" y="4169664"/>
-            <a:ext cx="685800" cy="475488"/>
-          </a:xfrm>
-          <a:prstGeom prst="rect">
-            <a:avLst/>
-          </a:prstGeom>
-          <a:noFill/>
-          <a:ln/>
-        </p:spPr>
-        <p:txBody>
-          <a:bodyPr wrap="square" lIns="0" tIns="0" rIns="0" bIns="0" rtlCol="0" anchor="ctr"/>
-          <a:lstStyle/>
-          <a:p>
-            <a:pPr algn="ctr" indent="0" marL="0">
-              <a:buNone/>
-            </a:pPr>
-            <a:r>
-              <a:rPr lang="en-US" sz="900" b="1" dirty="0">
-                <a:solidFill>
-                  <a:srgbClr val="9D174D"/>
-                </a:solidFill>
-                <a:latin typeface="Trebuchet MS" pitchFamily="34" charset="0"/>
-                <a:ea typeface="Trebuchet MS" pitchFamily="34" charset="-122"/>
-                <a:cs typeface="Trebuchet MS" pitchFamily="34" charset="-120"/>
-              </a:rPr>
-              <a:t>r</a:t>
-            </a:r>
-            <a:endParaRPr lang="en-US" sz="900" dirty="0"/>
-          </a:p>
-        </p:txBody>
-      </p:sp>
-      <p:sp>
-        <p:nvSpPr>
-          <p:cNvPr id="45" name="Shape 43"/>
-          <p:cNvSpPr/>
-          <p:nvPr/>
-        </p:nvSpPr>
-        <p:spPr>
-          <a:xfrm>
-            <a:off x="2831592" y="4169664"/>
-            <a:ext cx="685800" cy="475488"/>
-          </a:xfrm>
-          <a:prstGeom prst="rect">
-            <a:avLst>
-              <a:gd name="adj" fmla="val 7692"/>
-            </a:avLst>
-          </a:prstGeom>
-          <a:solidFill>
-            <a:srgbClr val="FFFFFF"/>
-          </a:solidFill>
-          <a:ln w="12700">
-            <a:solidFill>
-              <a:srgbClr val="DB2777"/>
-            </a:solidFill>
-            <a:prstDash val="solid"/>
-          </a:ln>
-        </p:spPr>
-      </p:sp>
-      <p:sp>
-        <p:nvSpPr>
-          <p:cNvPr id="46" name="Text 44"/>
-          <p:cNvSpPr/>
-          <p:nvPr/>
-        </p:nvSpPr>
-        <p:spPr>
-          <a:xfrm>
-            <a:off x="2831592" y="4169664"/>
-            <a:ext cx="685800" cy="475488"/>
-          </a:xfrm>
-          <a:prstGeom prst="rect">
-            <a:avLst/>
-          </a:prstGeom>
-          <a:noFill/>
-          <a:ln/>
-        </p:spPr>
-        <p:txBody>
-          <a:bodyPr wrap="square" lIns="0" tIns="0" rIns="0" bIns="0" rtlCol="0" anchor="ctr"/>
-          <a:lstStyle/>
-          <a:p>
-            <a:pPr algn="ctr" indent="0" marL="0">
-              <a:buNone/>
-            </a:pPr>
-            <a:r>
-              <a:rPr lang="en-US" sz="900" b="1" dirty="0">
-                <a:solidFill>
-                  <a:srgbClr val="9D174D"/>
-                </a:solidFill>
-                <a:latin typeface="Trebuchet MS" pitchFamily="34" charset="0"/>
-                <a:ea typeface="Trebuchet MS" pitchFamily="34" charset="-122"/>
-                <a:cs typeface="Trebuchet MS" pitchFamily="34" charset="-120"/>
-              </a:rPr>
-              <a:t>e</a:t>
-            </a:r>
-            <a:endParaRPr lang="en-US" sz="900" dirty="0"/>
-          </a:p>
-        </p:txBody>
-      </p:sp>
-      <p:sp>
-        <p:nvSpPr>
-          <p:cNvPr id="47" name="Shape 45"/>
-          <p:cNvSpPr/>
-          <p:nvPr/>
-        </p:nvSpPr>
-        <p:spPr>
-          <a:xfrm>
-            <a:off x="3639312" y="4169664"/>
-            <a:ext cx="685800" cy="475488"/>
-          </a:xfrm>
-          <a:prstGeom prst="rect">
-            <a:avLst>
-              <a:gd name="adj" fmla="val 7692"/>
-            </a:avLst>
-          </a:prstGeom>
-          <a:solidFill>
-            <a:srgbClr val="FFFFFF"/>
-          </a:solidFill>
-          <a:ln w="12700">
-            <a:solidFill>
-              <a:srgbClr val="DB2777"/>
-            </a:solidFill>
-            <a:prstDash val="solid"/>
-          </a:ln>
-        </p:spPr>
-      </p:sp>
-      <p:sp>
-        <p:nvSpPr>
-          <p:cNvPr id="48" name="Text 46"/>
-          <p:cNvSpPr/>
-          <p:nvPr/>
-        </p:nvSpPr>
-        <p:spPr>
-          <a:xfrm>
-            <a:off x="3639312" y="4169664"/>
-            <a:ext cx="685800" cy="475488"/>
-          </a:xfrm>
-          <a:prstGeom prst="rect">
-            <a:avLst/>
-          </a:prstGeom>
-          <a:noFill/>
-          <a:ln/>
-        </p:spPr>
-        <p:txBody>
-          <a:bodyPr wrap="square" lIns="0" tIns="0" rIns="0" bIns="0" rtlCol="0" anchor="ctr"/>
-          <a:lstStyle/>
-          <a:p>
-            <a:pPr algn="ctr" indent="0" marL="0">
-              <a:buNone/>
-            </a:pPr>
-            <a:r>
-              <a:rPr lang="en-US" sz="900" b="1" dirty="0">
-                <a:solidFill>
-                  <a:srgbClr val="9D174D"/>
-                </a:solidFill>
-                <a:latin typeface="Trebuchet MS" pitchFamily="34" charset="0"/>
-                <a:ea typeface="Trebuchet MS" pitchFamily="34" charset="-122"/>
-                <a:cs typeface="Trebuchet MS" pitchFamily="34" charset="-120"/>
-              </a:rPr>
-              <a:t>a</a:t>
-            </a:r>
-            <a:endParaRPr lang="en-US" sz="900" dirty="0"/>
-          </a:p>
-        </p:txBody>
-      </p:sp>
-      <p:sp>
-        <p:nvSpPr>
-          <p:cNvPr id="49" name="Shape 47"/>
-          <p:cNvSpPr/>
-          <p:nvPr/>
-        </p:nvSpPr>
-        <p:spPr>
-          <a:xfrm>
-            <a:off x="4447032" y="4169664"/>
-            <a:ext cx="685800" cy="475488"/>
-          </a:xfrm>
-          <a:prstGeom prst="rect">
-            <a:avLst>
-              <a:gd name="adj" fmla="val 7692"/>
-            </a:avLst>
-          </a:prstGeom>
-          <a:solidFill>
-            <a:srgbClr val="FFFFFF"/>
-          </a:solidFill>
-          <a:ln w="12700">
-            <a:solidFill>
-              <a:srgbClr val="DB2777"/>
-            </a:solidFill>
-            <a:prstDash val="solid"/>
-          </a:ln>
-        </p:spPr>
-      </p:sp>
-      <p:sp>
-        <p:nvSpPr>
-          <p:cNvPr id="50" name="Text 48"/>
-          <p:cNvSpPr/>
-          <p:nvPr/>
-        </p:nvSpPr>
-        <p:spPr>
-          <a:xfrm>
-            <a:off x="4447032" y="4169664"/>
-            <a:ext cx="685800" cy="475488"/>
-          </a:xfrm>
-          <a:prstGeom prst="rect">
-            <a:avLst/>
-          </a:prstGeom>
-          <a:noFill/>
-          <a:ln/>
-        </p:spPr>
-        <p:txBody>
-          <a:bodyPr wrap="square" lIns="0" tIns="0" rIns="0" bIns="0" rtlCol="0" anchor="ctr"/>
-          <a:lstStyle/>
-          <a:p>
-            <a:pPr algn="ctr" indent="0" marL="0">
-              <a:buNone/>
-            </a:pPr>
-            <a:r>
-              <a:rPr lang="en-US" sz="900" b="1" dirty="0">
-                <a:solidFill>
-                  <a:srgbClr val="9D174D"/>
-                </a:solidFill>
-                <a:latin typeface="Trebuchet MS" pitchFamily="34" charset="0"/>
-                <a:ea typeface="Trebuchet MS" pitchFamily="34" charset="-122"/>
-                <a:cs typeface="Trebuchet MS" pitchFamily="34" charset="-120"/>
-              </a:rPr>
-              <a:t>pp</a:t>
-            </a:r>
-            <a:endParaRPr lang="en-US" sz="900" dirty="0"/>
-          </a:p>
-        </p:txBody>
-      </p:sp>
-      <p:sp>
-        <p:nvSpPr>
-          <p:cNvPr id="51" name="Shape 49"/>
-          <p:cNvSpPr/>
-          <p:nvPr/>
-        </p:nvSpPr>
-        <p:spPr>
-          <a:xfrm>
-            <a:off x="5254752" y="4169664"/>
-            <a:ext cx="685800" cy="475488"/>
-          </a:xfrm>
-          <a:prstGeom prst="rect">
-            <a:avLst>
-              <a:gd name="adj" fmla="val 7692"/>
-            </a:avLst>
-          </a:prstGeom>
-          <a:solidFill>
-            <a:srgbClr val="FFFFFF"/>
-          </a:solidFill>
-          <a:ln w="12700">
-            <a:solidFill>
-              <a:srgbClr val="DB2777"/>
-            </a:solidFill>
-            <a:prstDash val="solid"/>
-          </a:ln>
-        </p:spPr>
-      </p:sp>
-      <p:sp>
-        <p:nvSpPr>
-          <p:cNvPr id="52" name="Text 50"/>
-          <p:cNvSpPr/>
-          <p:nvPr/>
-        </p:nvSpPr>
-        <p:spPr>
-          <a:xfrm>
-            <a:off x="5254752" y="4169664"/>
-            <a:ext cx="685800" cy="475488"/>
-          </a:xfrm>
-          <a:prstGeom prst="rect">
-            <a:avLst/>
-          </a:prstGeom>
-          <a:noFill/>
-          <a:ln/>
-        </p:spPr>
-        <p:txBody>
-          <a:bodyPr wrap="square" lIns="0" tIns="0" rIns="0" bIns="0" rtlCol="0" anchor="ctr"/>
-          <a:lstStyle/>
-          <a:p>
-            <a:pPr algn="ctr" indent="0" marL="0">
-              <a:buNone/>
-            </a:pPr>
-            <a:r>
-              <a:rPr lang="en-US" sz="900" b="1" dirty="0">
-                <a:solidFill>
-                  <a:srgbClr val="9D174D"/>
-                </a:solidFill>
-                <a:latin typeface="Trebuchet MS" pitchFamily="34" charset="0"/>
-                <a:ea typeface="Trebuchet MS" pitchFamily="34" charset="-122"/>
-                <a:cs typeface="Trebuchet MS" pitchFamily="34" charset="-120"/>
-              </a:rPr>
-              <a:t>l</a:t>
-            </a:r>
-            <a:endParaRPr lang="en-US" sz="900" dirty="0"/>
-          </a:p>
-        </p:txBody>
-      </p:sp>
-      <p:sp>
-        <p:nvSpPr>
-          <p:cNvPr id="53" name="Shape 51"/>
-          <p:cNvSpPr/>
-          <p:nvPr/>
-        </p:nvSpPr>
-        <p:spPr>
-          <a:xfrm>
-            <a:off x="6062472" y="4169664"/>
-            <a:ext cx="685800" cy="475488"/>
-          </a:xfrm>
-          <a:prstGeom prst="rect">
-            <a:avLst>
-              <a:gd name="adj" fmla="val 7692"/>
-            </a:avLst>
-          </a:prstGeom>
-          <a:solidFill>
-            <a:srgbClr val="FFFFFF"/>
-          </a:solidFill>
-          <a:ln w="12700">
-            <a:solidFill>
-              <a:srgbClr val="DB2777"/>
-            </a:solidFill>
-            <a:prstDash val="solid"/>
-          </a:ln>
-        </p:spPr>
-      </p:sp>
-      <p:sp>
-        <p:nvSpPr>
-          <p:cNvPr id="54" name="Text 52"/>
-          <p:cNvSpPr/>
-          <p:nvPr/>
-        </p:nvSpPr>
-        <p:spPr>
-          <a:xfrm>
-            <a:off x="6062472" y="4169664"/>
-            <a:ext cx="685800" cy="475488"/>
-          </a:xfrm>
-          <a:prstGeom prst="rect">
-            <a:avLst/>
-          </a:prstGeom>
-          <a:noFill/>
-          <a:ln/>
-        </p:spPr>
-        <p:txBody>
-          <a:bodyPr wrap="square" lIns="0" tIns="0" rIns="0" bIns="0" rtlCol="0" anchor="ctr"/>
-          <a:lstStyle/>
-          <a:p>
-            <a:pPr algn="ctr" indent="0" marL="0">
-              <a:buNone/>
-            </a:pPr>
-            <a:r>
-              <a:rPr lang="en-US" sz="900" b="1" dirty="0">
-                <a:solidFill>
-                  <a:srgbClr val="9D174D"/>
-                </a:solidFill>
-                <a:latin typeface="Trebuchet MS" pitchFamily="34" charset="0"/>
-                <a:ea typeface="Trebuchet MS" pitchFamily="34" charset="-122"/>
-                <a:cs typeface="Trebuchet MS" pitchFamily="34" charset="-120"/>
-              </a:rPr>
-              <a:t>y</a:t>
-            </a:r>
-            <a:endParaRPr lang="en-US" sz="900" dirty="0"/>
-          </a:p>
-        </p:txBody>
-      </p:sp>
-      <p:sp>
-        <p:nvSpPr>
-          <p:cNvPr id="55" name="Shape 53"/>
-          <p:cNvSpPr/>
-          <p:nvPr/>
-        </p:nvSpPr>
-        <p:spPr>
-          <a:xfrm>
-            <a:off x="6870192" y="4169664"/>
-            <a:ext cx="685800" cy="475488"/>
-          </a:xfrm>
-          <a:prstGeom prst="rect">
-            <a:avLst>
-              <a:gd name="adj" fmla="val 7692"/>
-            </a:avLst>
-          </a:prstGeom>
-          <a:solidFill>
-            <a:srgbClr val="FFFFFF"/>
-          </a:solidFill>
-          <a:ln w="12700">
-            <a:solidFill>
-              <a:srgbClr val="DB2777"/>
-            </a:solidFill>
-            <a:prstDash val="solid"/>
-          </a:ln>
-        </p:spPr>
-      </p:sp>
-      <p:sp>
-        <p:nvSpPr>
-          <p:cNvPr id="56" name="Text 54"/>
-          <p:cNvSpPr/>
-          <p:nvPr/>
-        </p:nvSpPr>
-        <p:spPr>
-          <a:xfrm>
-            <a:off x="6870192" y="4169664"/>
-            <a:ext cx="685800" cy="475488"/>
-          </a:xfrm>
-          <a:prstGeom prst="rect">
-            <a:avLst/>
-          </a:prstGeom>
-          <a:noFill/>
-          <a:ln/>
-        </p:spPr>
-        <p:txBody>
-          <a:bodyPr wrap="square" lIns="0" tIns="0" rIns="0" bIns="0" rtlCol="0" anchor="ctr"/>
-          <a:lstStyle/>
-          <a:p>
-            <a:pPr algn="ctr" indent="0" marL="0">
-              <a:buNone/>
-            </a:pPr>
-            <a:r>
-              <a:rPr lang="en-US" sz="900" b="1" dirty="0">
-                <a:solidFill>
-                  <a:srgbClr val="9D174D"/>
-                </a:solidFill>
-                <a:latin typeface="Trebuchet MS" pitchFamily="34" charset="0"/>
-                <a:ea typeface="Trebuchet MS" pitchFamily="34" charset="-122"/>
-                <a:cs typeface="Trebuchet MS" pitchFamily="34" charset="-120"/>
-              </a:rPr>
-              <a:t>i</a:t>
-            </a:r>
-            <a:endParaRPr lang="en-US" sz="900" dirty="0"/>
-          </a:p>
-        </p:txBody>
-      </p:sp>
-      <p:sp>
-        <p:nvSpPr>
-          <p:cNvPr id="57" name="Shape 55"/>
-          <p:cNvSpPr/>
-          <p:nvPr/>
-        </p:nvSpPr>
-        <p:spPr>
-          <a:xfrm>
-            <a:off x="7677912" y="4169664"/>
-            <a:ext cx="685800" cy="475488"/>
-          </a:xfrm>
-          <a:prstGeom prst="rect">
-            <a:avLst>
-              <a:gd name="adj" fmla="val 7692"/>
-            </a:avLst>
-          </a:prstGeom>
-          <a:solidFill>
-            <a:srgbClr val="FFFFFF"/>
-          </a:solidFill>
-          <a:ln w="12700">
-            <a:solidFill>
-              <a:srgbClr val="DB2777"/>
-            </a:solidFill>
-            <a:prstDash val="solid"/>
-          </a:ln>
-        </p:spPr>
-      </p:sp>
-      <p:sp>
-        <p:nvSpPr>
-          <p:cNvPr id="58" name="Text 56"/>
-          <p:cNvSpPr/>
-          <p:nvPr/>
-        </p:nvSpPr>
-        <p:spPr>
-          <a:xfrm>
-            <a:off x="7677912" y="4169664"/>
-            <a:ext cx="685800" cy="475488"/>
-          </a:xfrm>
-          <a:prstGeom prst="rect">
-            <a:avLst/>
-          </a:prstGeom>
-          <a:noFill/>
-          <a:ln/>
-        </p:spPr>
-        <p:txBody>
-          <a:bodyPr wrap="square" lIns="0" tIns="0" rIns="0" bIns="0" rtlCol="0" anchor="ctr"/>
-          <a:lstStyle/>
-          <a:p>
-            <a:pPr algn="ctr" indent="0" marL="0">
-              <a:buNone/>
-            </a:pPr>
-            <a:r>
-              <a:rPr lang="en-US" sz="900" b="1" dirty="0">
-                <a:solidFill>
-                  <a:srgbClr val="9D174D"/>
-                </a:solidFill>
-                <a:latin typeface="Trebuchet MS" pitchFamily="34" charset="0"/>
-                <a:ea typeface="Trebuchet MS" pitchFamily="34" charset="-122"/>
-                <a:cs typeface="Trebuchet MS" pitchFamily="34" charset="-120"/>
-              </a:rPr>
-              <a:t>ng</a:t>
+              <a:t>le</a:t>
             </a:r>
             <a:endParaRPr lang="en-US" sz="900" dirty="0"/>
           </a:p>
@@ -29846,7 +29846,7 @@
                 <a:ea typeface="Trebuchet MS" pitchFamily="34" charset="-122"/>
                 <a:cs typeface="Trebuchet MS" pitchFamily="34" charset="-120"/>
               </a:rPr>
-              <a:t>applicable</a:t>
+              <a:t>applicant</a:t>
             </a:r>
             <a:endParaRPr lang="en-US" sz="2800" dirty="0"/>
           </a:p>
@@ -30673,7 +30673,7 @@
                 <a:ea typeface="Trebuchet MS" pitchFamily="34" charset="-122"/>
                 <a:cs typeface="Trebuchet MS" pitchFamily="34" charset="-120"/>
               </a:rPr>
-              <a:t>applicable</a:t>
+              <a:t>applicant</a:t>
             </a:r>
             <a:endParaRPr lang="en-US" sz="2800" dirty="0"/>
           </a:p>
@@ -30890,7 +30890,7 @@
                 <a:ea typeface="Calibri" pitchFamily="34" charset="-122"/>
                 <a:cs typeface="Calibri" pitchFamily="34" charset="-120"/>
               </a:rPr>
-              <a:t>'y' changes to 'i' before suffix</a:t>
+              <a:t>'y' changes to 'ic' before suffix</a:t>
             </a:r>
             <a:endParaRPr lang="en-US" sz="700" dirty="0"/>
           </a:p>
@@ -30963,7 +30963,7 @@
                 <a:ea typeface="Trebuchet MS" pitchFamily="34" charset="-122"/>
                 <a:cs typeface="Trebuchet MS" pitchFamily="34" charset="-120"/>
               </a:rPr>
-              <a:t>able</a:t>
+              <a:t>ant</a:t>
             </a:r>
             <a:endParaRPr lang="en-US" sz="1300" dirty="0"/>
           </a:p>
@@ -31002,7 +31002,7 @@
                 <a:ea typeface="Calibri" pitchFamily="34" charset="-122"/>
                 <a:cs typeface="Calibri" pitchFamily="34" charset="-120"/>
               </a:rPr>
-              <a:t>able to be</a:t>
+              <a:t>a person who does something</a:t>
             </a:r>
             <a:endParaRPr lang="en-US" sz="850" dirty="0"/>
           </a:p>
@@ -31697,7 +31697,7 @@
                 <a:ea typeface="Trebuchet MS" pitchFamily="34" charset="-122"/>
                 <a:cs typeface="Trebuchet MS" pitchFamily="34" charset="-120"/>
               </a:rPr>
-              <a:t>applicable</a:t>
+              <a:t>applicant</a:t>
             </a:r>
             <a:endParaRPr lang="en-US" sz="2800" dirty="0"/>
           </a:p>
@@ -31914,7 +31914,7 @@
                 <a:ea typeface="Calibri" pitchFamily="34" charset="-122"/>
                 <a:cs typeface="Calibri" pitchFamily="34" charset="-120"/>
               </a:rPr>
-              <a:t>'y' changes to 'i' before suffix</a:t>
+              <a:t>'y' changes to 'ic' before suffix</a:t>
             </a:r>
             <a:endParaRPr lang="en-US" sz="700" dirty="0"/>
           </a:p>
@@ -31987,7 +31987,7 @@
                 <a:ea typeface="Trebuchet MS" pitchFamily="34" charset="-122"/>
                 <a:cs typeface="Trebuchet MS" pitchFamily="34" charset="-120"/>
               </a:rPr>
-              <a:t>able</a:t>
+              <a:t>ant</a:t>
             </a:r>
             <a:endParaRPr lang="en-US" sz="1300" dirty="0"/>
           </a:p>
@@ -32026,7 +32026,7 @@
                 <a:ea typeface="Calibri" pitchFamily="34" charset="-122"/>
                 <a:cs typeface="Calibri" pitchFamily="34" charset="-120"/>
               </a:rPr>
-              <a:t>able to be</a:t>
+              <a:t>a person who does something</a:t>
             </a:r>
             <a:endParaRPr lang="en-US" sz="850" dirty="0"/>
           </a:p>
@@ -32133,8 +32133,8 @@
         </p:nvSpPr>
         <p:spPr>
           <a:xfrm>
-            <a:off x="1975104" y="3364992"/>
-            <a:ext cx="1554480" cy="475488"/>
+            <a:off x="2313432" y="3364992"/>
+            <a:ext cx="1645920" cy="475488"/>
           </a:xfrm>
           <a:prstGeom prst="rect">
             <a:avLst>
@@ -32160,8 +32160,8 @@
         </p:nvSpPr>
         <p:spPr>
           <a:xfrm>
-            <a:off x="1975104" y="3364992"/>
-            <a:ext cx="1554480" cy="475488"/>
+            <a:off x="2313432" y="3364992"/>
+            <a:ext cx="1645920" cy="475488"/>
           </a:xfrm>
           <a:prstGeom prst="rect">
             <a:avLst/>
@@ -32199,8 +32199,8 @@
         </p:nvSpPr>
         <p:spPr>
           <a:xfrm>
-            <a:off x="3529584" y="3364992"/>
-            <a:ext cx="73152" cy="475488"/>
+            <a:off x="3959352" y="3364992"/>
+            <a:ext cx="411480" cy="475488"/>
           </a:xfrm>
           <a:prstGeom prst="rect">
             <a:avLst/>
@@ -32238,8 +32238,8 @@
         </p:nvSpPr>
         <p:spPr>
           <a:xfrm>
-            <a:off x="3602736" y="3364992"/>
-            <a:ext cx="1554480" cy="475488"/>
+            <a:off x="4370832" y="3364992"/>
+            <a:ext cx="1645920" cy="475488"/>
           </a:xfrm>
           <a:prstGeom prst="rect">
             <a:avLst>
@@ -32265,8 +32265,8 @@
         </p:nvSpPr>
         <p:spPr>
           <a:xfrm>
-            <a:off x="3602736" y="3364992"/>
-            <a:ext cx="1554480" cy="475488"/>
+            <a:off x="4370832" y="3364992"/>
+            <a:ext cx="1645920" cy="475488"/>
           </a:xfrm>
           <a:prstGeom prst="rect">
             <a:avLst/>
@@ -32304,8 +32304,8 @@
         </p:nvSpPr>
         <p:spPr>
           <a:xfrm>
-            <a:off x="5157216" y="3364992"/>
-            <a:ext cx="73152" cy="475488"/>
+            <a:off x="6016752" y="3364992"/>
+            <a:ext cx="411480" cy="475488"/>
           </a:xfrm>
           <a:prstGeom prst="rect">
             <a:avLst/>
@@ -32343,8 +32343,8 @@
         </p:nvSpPr>
         <p:spPr>
           <a:xfrm>
-            <a:off x="5230368" y="3364992"/>
-            <a:ext cx="1554480" cy="475488"/>
+            <a:off x="6428232" y="3364992"/>
+            <a:ext cx="1645920" cy="475488"/>
           </a:xfrm>
           <a:prstGeom prst="rect">
             <a:avLst>
@@ -32370,8 +32370,8 @@
         </p:nvSpPr>
         <p:spPr>
           <a:xfrm>
-            <a:off x="5230368" y="3364992"/>
-            <a:ext cx="1554480" cy="475488"/>
+            <a:off x="6428232" y="3364992"/>
+            <a:ext cx="1645920" cy="475488"/>
           </a:xfrm>
           <a:prstGeom prst="rect">
             <a:avLst/>
@@ -32395,7 +32395,7 @@
                 <a:ea typeface="Trebuchet MS" pitchFamily="34" charset="-122"/>
                 <a:cs typeface="Trebuchet MS" pitchFamily="34" charset="-120"/>
               </a:rPr>
-              <a:t>ca</a:t>
+              <a:t>cant</a:t>
             </a:r>
             <a:endParaRPr lang="en-US" sz="1400" dirty="0"/>
           </a:p>
@@ -32403,119 +32403,80 @@
       </p:sp>
       <p:sp>
         <p:nvSpPr>
-          <p:cNvPr id="34" name="Text 32"/>
-          <p:cNvSpPr/>
-          <p:nvPr/>
-        </p:nvSpPr>
-        <p:spPr>
-          <a:xfrm>
-            <a:off x="6784848" y="3364992"/>
-            <a:ext cx="73152" cy="475488"/>
-          </a:xfrm>
-          <a:prstGeom prst="rect">
-            <a:avLst/>
-          </a:prstGeom>
-          <a:noFill/>
-          <a:ln/>
-        </p:spPr>
-        <p:txBody>
-          <a:bodyPr wrap="square" lIns="0" tIns="0" rIns="0" bIns="0" rtlCol="0" anchor="ctr"/>
-          <a:lstStyle/>
-          <a:p>
-            <a:pPr algn="ctr" indent="0" marL="0">
-              <a:buNone/>
-            </a:pPr>
-            <a:r>
-              <a:rPr lang="en-US" sz="1600" b="1" dirty="0">
-                <a:solidFill>
-                  <a:srgbClr val="0D9488"/>
+          <p:cNvPr id="34" name="Shape 32"/>
+          <p:cNvSpPr/>
+          <p:nvPr/>
+        </p:nvSpPr>
+        <p:spPr>
+          <a:xfrm>
+            <a:off x="365760" y="4096512"/>
+            <a:ext cx="1371600" cy="804672"/>
+          </a:xfrm>
+          <a:prstGeom prst="rect">
+            <a:avLst>
+              <a:gd name="adj" fmla="val 6818"/>
+            </a:avLst>
+          </a:prstGeom>
+          <a:solidFill>
+            <a:srgbClr val="E2E8F0"/>
+          </a:solidFill>
+          <a:ln w="12700">
+            <a:solidFill>
+              <a:srgbClr val="E2E8F0"/>
+            </a:solidFill>
+            <a:prstDash val="solid"/>
+          </a:ln>
+        </p:spPr>
+      </p:sp>
+      <p:sp>
+        <p:nvSpPr>
+          <p:cNvPr id="35" name="Text 33"/>
+          <p:cNvSpPr/>
+          <p:nvPr/>
+        </p:nvSpPr>
+        <p:spPr>
+          <a:xfrm>
+            <a:off x="365760" y="4096512"/>
+            <a:ext cx="1371600" cy="804672"/>
+          </a:xfrm>
+          <a:prstGeom prst="rect">
+            <a:avLst/>
+          </a:prstGeom>
+          <a:noFill/>
+          <a:ln/>
+        </p:spPr>
+        <p:txBody>
+          <a:bodyPr wrap="square" lIns="0" tIns="0" rIns="0" bIns="0" rtlCol="0" anchor="ctr"/>
+          <a:lstStyle/>
+          <a:p>
+            <a:pPr algn="ctr" indent="0" marL="0">
+              <a:buNone/>
+            </a:pPr>
+            <a:r>
+              <a:rPr lang="en-US" sz="1100" b="1" dirty="0">
+                <a:solidFill>
+                  <a:srgbClr val="475569"/>
                 </a:solidFill>
                 <a:latin typeface="Trebuchet MS" pitchFamily="34" charset="0"/>
                 <a:ea typeface="Trebuchet MS" pitchFamily="34" charset="-122"/>
                 <a:cs typeface="Trebuchet MS" pitchFamily="34" charset="-120"/>
               </a:rPr>
-              <a:t>·</a:t>
-            </a:r>
-            <a:endParaRPr lang="en-US" sz="1600" dirty="0"/>
-          </a:p>
-        </p:txBody>
-      </p:sp>
-      <p:sp>
-        <p:nvSpPr>
-          <p:cNvPr id="35" name="Shape 33"/>
-          <p:cNvSpPr/>
-          <p:nvPr/>
-        </p:nvSpPr>
-        <p:spPr>
-          <a:xfrm>
-            <a:off x="6858000" y="3364992"/>
-            <a:ext cx="1554480" cy="475488"/>
-          </a:xfrm>
-          <a:prstGeom prst="rect">
-            <a:avLst>
-              <a:gd name="adj" fmla="val 9615"/>
-            </a:avLst>
-          </a:prstGeom>
-          <a:solidFill>
-            <a:srgbClr val="FFFFFF"/>
-          </a:solidFill>
-          <a:ln w="12700">
-            <a:solidFill>
-              <a:srgbClr val="0D9488"/>
-            </a:solidFill>
-            <a:prstDash val="solid"/>
-          </a:ln>
-        </p:spPr>
-      </p:sp>
-      <p:sp>
-        <p:nvSpPr>
-          <p:cNvPr id="36" name="Text 34"/>
-          <p:cNvSpPr/>
-          <p:nvPr/>
-        </p:nvSpPr>
-        <p:spPr>
-          <a:xfrm>
-            <a:off x="6858000" y="3364992"/>
-            <a:ext cx="1554480" cy="475488"/>
-          </a:xfrm>
-          <a:prstGeom prst="rect">
-            <a:avLst/>
-          </a:prstGeom>
-          <a:noFill/>
-          <a:ln/>
-        </p:spPr>
-        <p:txBody>
-          <a:bodyPr wrap="square" lIns="0" tIns="0" rIns="0" bIns="0" rtlCol="0" anchor="ctr"/>
-          <a:lstStyle/>
-          <a:p>
-            <a:pPr algn="ctr" indent="0" marL="0">
-              <a:buNone/>
-            </a:pPr>
-            <a:r>
-              <a:rPr lang="en-US" sz="1400" b="1" dirty="0">
-                <a:solidFill>
-                  <a:srgbClr val="0D9488"/>
-                </a:solidFill>
-                <a:latin typeface="Trebuchet MS" pitchFamily="34" charset="0"/>
-                <a:ea typeface="Trebuchet MS" pitchFamily="34" charset="-122"/>
-                <a:cs typeface="Trebuchet MS" pitchFamily="34" charset="-120"/>
-              </a:rPr>
-              <a:t>ble</a:t>
-            </a:r>
-            <a:endParaRPr lang="en-US" sz="1400" dirty="0"/>
-          </a:p>
-        </p:txBody>
-      </p:sp>
-      <p:sp>
-        <p:nvSpPr>
-          <p:cNvPr id="37" name="Shape 35"/>
-          <p:cNvSpPr/>
-          <p:nvPr/>
-        </p:nvSpPr>
-        <p:spPr>
-          <a:xfrm>
-            <a:off x="365760" y="4096512"/>
-            <a:ext cx="1371600" cy="804672"/>
+              <a:t>Phonemes</a:t>
+            </a:r>
+            <a:endParaRPr lang="en-US" sz="1100" dirty="0"/>
+          </a:p>
+        </p:txBody>
+      </p:sp>
+      <p:sp>
+        <p:nvSpPr>
+          <p:cNvPr id="36" name="Shape 34"/>
+          <p:cNvSpPr/>
+          <p:nvPr/>
+        </p:nvSpPr>
+        <p:spPr>
+          <a:xfrm>
+            <a:off x="1874520" y="4096512"/>
+            <a:ext cx="6903720" cy="804672"/>
           </a:xfrm>
           <a:prstGeom prst="rect">
             <a:avLst>
@@ -32523,85 +32484,19 @@
             </a:avLst>
           </a:prstGeom>
           <a:solidFill>
-            <a:srgbClr val="E2E8F0"/>
+            <a:srgbClr val="F8FAFC"/>
           </a:solidFill>
           <a:ln w="12700">
             <a:solidFill>
               <a:srgbClr val="E2E8F0"/>
             </a:solidFill>
-            <a:prstDash val="solid"/>
-          </a:ln>
-        </p:spPr>
-      </p:sp>
-      <p:sp>
-        <p:nvSpPr>
-          <p:cNvPr id="38" name="Text 36"/>
-          <p:cNvSpPr/>
-          <p:nvPr/>
-        </p:nvSpPr>
-        <p:spPr>
-          <a:xfrm>
-            <a:off x="365760" y="4096512"/>
-            <a:ext cx="1371600" cy="804672"/>
-          </a:xfrm>
-          <a:prstGeom prst="rect">
-            <a:avLst/>
-          </a:prstGeom>
-          <a:noFill/>
-          <a:ln/>
-        </p:spPr>
-        <p:txBody>
-          <a:bodyPr wrap="square" lIns="0" tIns="0" rIns="0" bIns="0" rtlCol="0" anchor="ctr"/>
-          <a:lstStyle/>
-          <a:p>
-            <a:pPr algn="ctr" indent="0" marL="0">
-              <a:buNone/>
-            </a:pPr>
-            <a:r>
-              <a:rPr lang="en-US" sz="1100" b="1" dirty="0">
-                <a:solidFill>
-                  <a:srgbClr val="475569"/>
-                </a:solidFill>
-                <a:latin typeface="Trebuchet MS" pitchFamily="34" charset="0"/>
-                <a:ea typeface="Trebuchet MS" pitchFamily="34" charset="-122"/>
-                <a:cs typeface="Trebuchet MS" pitchFamily="34" charset="-120"/>
-              </a:rPr>
-              <a:t>Phonemes</a:t>
-            </a:r>
-            <a:endParaRPr lang="en-US" sz="1100" dirty="0"/>
-          </a:p>
-        </p:txBody>
-      </p:sp>
-      <p:sp>
-        <p:nvSpPr>
-          <p:cNvPr id="39" name="Shape 37"/>
-          <p:cNvSpPr/>
-          <p:nvPr/>
-        </p:nvSpPr>
-        <p:spPr>
-          <a:xfrm>
-            <a:off x="1874520" y="4096512"/>
-            <a:ext cx="6903720" cy="804672"/>
-          </a:xfrm>
-          <a:prstGeom prst="rect">
-            <a:avLst>
-              <a:gd name="adj" fmla="val 6818"/>
-            </a:avLst>
-          </a:prstGeom>
-          <a:solidFill>
-            <a:srgbClr val="F8FAFC"/>
-          </a:solidFill>
-          <a:ln w="12700">
-            <a:solidFill>
-              <a:srgbClr val="E2E8F0"/>
-            </a:solidFill>
             <a:prstDash val="dash"/>
           </a:ln>
         </p:spPr>
       </p:sp>
       <p:sp>
         <p:nvSpPr>
-          <p:cNvPr id="40" name="Text 38"/>
+          <p:cNvPr id="37" name="Text 35"/>
           <p:cNvSpPr/>
           <p:nvPr/>
         </p:nvSpPr>
@@ -33063,7 +32958,7 @@
                 <a:ea typeface="Trebuchet MS" pitchFamily="34" charset="-122"/>
                 <a:cs typeface="Trebuchet MS" pitchFamily="34" charset="-120"/>
               </a:rPr>
-              <a:t>applicable</a:t>
+              <a:t>applicant</a:t>
             </a:r>
             <a:endParaRPr lang="en-US" sz="2800" dirty="0"/>
           </a:p>
@@ -33280,7 +33175,7 @@
                 <a:ea typeface="Calibri" pitchFamily="34" charset="-122"/>
                 <a:cs typeface="Calibri" pitchFamily="34" charset="-120"/>
               </a:rPr>
-              <a:t>'y' changes to 'i' before suffix</a:t>
+              <a:t>'y' changes to 'ic' before suffix</a:t>
             </a:r>
             <a:endParaRPr lang="en-US" sz="700" dirty="0"/>
           </a:p>
@@ -33353,7 +33248,7 @@
                 <a:ea typeface="Trebuchet MS" pitchFamily="34" charset="-122"/>
                 <a:cs typeface="Trebuchet MS" pitchFamily="34" charset="-120"/>
               </a:rPr>
-              <a:t>able</a:t>
+              <a:t>ant</a:t>
             </a:r>
             <a:endParaRPr lang="en-US" sz="1300" dirty="0"/>
           </a:p>
@@ -33392,7 +33287,7 @@
                 <a:ea typeface="Calibri" pitchFamily="34" charset="-122"/>
                 <a:cs typeface="Calibri" pitchFamily="34" charset="-120"/>
               </a:rPr>
-              <a:t>able to be</a:t>
+              <a:t>a person who does something</a:t>
             </a:r>
             <a:endParaRPr lang="en-US" sz="850" dirty="0"/>
           </a:p>
@@ -33499,8 +33394,8 @@
         </p:nvSpPr>
         <p:spPr>
           <a:xfrm>
-            <a:off x="1975104" y="3364992"/>
-            <a:ext cx="1554480" cy="475488"/>
+            <a:off x="2313432" y="3364992"/>
+            <a:ext cx="1645920" cy="475488"/>
           </a:xfrm>
           <a:prstGeom prst="rect">
             <a:avLst>
@@ -33526,8 +33421,8 @@
         </p:nvSpPr>
         <p:spPr>
           <a:xfrm>
-            <a:off x="1975104" y="3364992"/>
-            <a:ext cx="1554480" cy="475488"/>
+            <a:off x="2313432" y="3364992"/>
+            <a:ext cx="1645920" cy="475488"/>
           </a:xfrm>
           <a:prstGeom prst="rect">
             <a:avLst/>
@@ -33565,8 +33460,8 @@
         </p:nvSpPr>
         <p:spPr>
           <a:xfrm>
-            <a:off x="3529584" y="3364992"/>
-            <a:ext cx="73152" cy="475488"/>
+            <a:off x="3959352" y="3364992"/>
+            <a:ext cx="411480" cy="475488"/>
           </a:xfrm>
           <a:prstGeom prst="rect">
             <a:avLst/>
@@ -33604,8 +33499,8 @@
         </p:nvSpPr>
         <p:spPr>
           <a:xfrm>
-            <a:off x="3602736" y="3364992"/>
-            <a:ext cx="1554480" cy="475488"/>
+            <a:off x="4370832" y="3364992"/>
+            <a:ext cx="1645920" cy="475488"/>
           </a:xfrm>
           <a:prstGeom prst="rect">
             <a:avLst>
@@ -33631,8 +33526,8 @@
         </p:nvSpPr>
         <p:spPr>
           <a:xfrm>
-            <a:off x="3602736" y="3364992"/>
-            <a:ext cx="1554480" cy="475488"/>
+            <a:off x="4370832" y="3364992"/>
+            <a:ext cx="1645920" cy="475488"/>
           </a:xfrm>
           <a:prstGeom prst="rect">
             <a:avLst/>
@@ -33670,8 +33565,8 @@
         </p:nvSpPr>
         <p:spPr>
           <a:xfrm>
-            <a:off x="5157216" y="3364992"/>
-            <a:ext cx="73152" cy="475488"/>
+            <a:off x="6016752" y="3364992"/>
+            <a:ext cx="411480" cy="475488"/>
           </a:xfrm>
           <a:prstGeom prst="rect">
             <a:avLst/>
@@ -33709,8 +33604,8 @@
         </p:nvSpPr>
         <p:spPr>
           <a:xfrm>
-            <a:off x="5230368" y="3364992"/>
-            <a:ext cx="1554480" cy="475488"/>
+            <a:off x="6428232" y="3364992"/>
+            <a:ext cx="1645920" cy="475488"/>
           </a:xfrm>
           <a:prstGeom prst="rect">
             <a:avLst>
@@ -33736,8 +33631,8 @@
         </p:nvSpPr>
         <p:spPr>
           <a:xfrm>
-            <a:off x="5230368" y="3364992"/>
-            <a:ext cx="1554480" cy="475488"/>
+            <a:off x="6428232" y="3364992"/>
+            <a:ext cx="1645920" cy="475488"/>
           </a:xfrm>
           <a:prstGeom prst="rect">
             <a:avLst/>
@@ -33761,7 +33656,7 @@
                 <a:ea typeface="Trebuchet MS" pitchFamily="34" charset="-122"/>
                 <a:cs typeface="Trebuchet MS" pitchFamily="34" charset="-120"/>
               </a:rPr>
-              <a:t>ca</a:t>
+              <a:t>cant</a:t>
             </a:r>
             <a:endParaRPr lang="en-US" sz="1400" dirty="0"/>
           </a:p>
@@ -33769,211 +33664,238 @@
       </p:sp>
       <p:sp>
         <p:nvSpPr>
-          <p:cNvPr id="34" name="Text 32"/>
-          <p:cNvSpPr/>
-          <p:nvPr/>
-        </p:nvSpPr>
-        <p:spPr>
-          <a:xfrm>
-            <a:off x="6784848" y="3364992"/>
-            <a:ext cx="73152" cy="475488"/>
-          </a:xfrm>
-          <a:prstGeom prst="rect">
-            <a:avLst/>
-          </a:prstGeom>
-          <a:noFill/>
-          <a:ln/>
-        </p:spPr>
-        <p:txBody>
-          <a:bodyPr wrap="square" lIns="0" tIns="0" rIns="0" bIns="0" rtlCol="0" anchor="ctr"/>
-          <a:lstStyle/>
-          <a:p>
-            <a:pPr algn="ctr" indent="0" marL="0">
-              <a:buNone/>
-            </a:pPr>
-            <a:r>
-              <a:rPr lang="en-US" sz="1600" b="1" dirty="0">
-                <a:solidFill>
-                  <a:srgbClr val="0D9488"/>
+          <p:cNvPr id="34" name="Shape 32"/>
+          <p:cNvSpPr/>
+          <p:nvPr/>
+        </p:nvSpPr>
+        <p:spPr>
+          <a:xfrm>
+            <a:off x="365760" y="4096512"/>
+            <a:ext cx="1371600" cy="804672"/>
+          </a:xfrm>
+          <a:prstGeom prst="rect">
+            <a:avLst>
+              <a:gd name="adj" fmla="val 6818"/>
+            </a:avLst>
+          </a:prstGeom>
+          <a:solidFill>
+            <a:srgbClr val="E2E8F0"/>
+          </a:solidFill>
+          <a:ln w="12700">
+            <a:solidFill>
+              <a:srgbClr val="E2E8F0"/>
+            </a:solidFill>
+            <a:prstDash val="solid"/>
+          </a:ln>
+        </p:spPr>
+      </p:sp>
+      <p:sp>
+        <p:nvSpPr>
+          <p:cNvPr id="35" name="Text 33"/>
+          <p:cNvSpPr/>
+          <p:nvPr/>
+        </p:nvSpPr>
+        <p:spPr>
+          <a:xfrm>
+            <a:off x="365760" y="4096512"/>
+            <a:ext cx="1371600" cy="804672"/>
+          </a:xfrm>
+          <a:prstGeom prst="rect">
+            <a:avLst/>
+          </a:prstGeom>
+          <a:noFill/>
+          <a:ln/>
+        </p:spPr>
+        <p:txBody>
+          <a:bodyPr wrap="square" lIns="0" tIns="0" rIns="0" bIns="0" rtlCol="0" anchor="ctr"/>
+          <a:lstStyle/>
+          <a:p>
+            <a:pPr algn="ctr" indent="0" marL="0">
+              <a:buNone/>
+            </a:pPr>
+            <a:r>
+              <a:rPr lang="en-US" sz="1100" b="1" dirty="0">
+                <a:solidFill>
+                  <a:srgbClr val="475569"/>
                 </a:solidFill>
                 <a:latin typeface="Trebuchet MS" pitchFamily="34" charset="0"/>
                 <a:ea typeface="Trebuchet MS" pitchFamily="34" charset="-122"/>
                 <a:cs typeface="Trebuchet MS" pitchFamily="34" charset="-120"/>
               </a:rPr>
-              <a:t>·</a:t>
-            </a:r>
-            <a:endParaRPr lang="en-US" sz="1600" dirty="0"/>
-          </a:p>
-        </p:txBody>
-      </p:sp>
-      <p:sp>
-        <p:nvSpPr>
-          <p:cNvPr id="35" name="Shape 33"/>
-          <p:cNvSpPr/>
-          <p:nvPr/>
-        </p:nvSpPr>
-        <p:spPr>
-          <a:xfrm>
-            <a:off x="6858000" y="3364992"/>
-            <a:ext cx="1554480" cy="475488"/>
+              <a:t>Phonemes</a:t>
+            </a:r>
+            <a:endParaRPr lang="en-US" sz="1100" dirty="0"/>
+          </a:p>
+        </p:txBody>
+      </p:sp>
+      <p:sp>
+        <p:nvSpPr>
+          <p:cNvPr id="36" name="Shape 34"/>
+          <p:cNvSpPr/>
+          <p:nvPr/>
+        </p:nvSpPr>
+        <p:spPr>
+          <a:xfrm>
+            <a:off x="1874520" y="4096512"/>
+            <a:ext cx="6903720" cy="804672"/>
           </a:xfrm>
           <a:prstGeom prst="rect">
             <a:avLst>
-              <a:gd name="adj" fmla="val 9615"/>
+              <a:gd name="adj" fmla="val 6818"/>
             </a:avLst>
           </a:prstGeom>
           <a:solidFill>
+            <a:srgbClr val="FCE7F3"/>
+          </a:solidFill>
+          <a:ln w="12700">
+            <a:solidFill>
+              <a:srgbClr val="DB2777"/>
+            </a:solidFill>
+            <a:prstDash val="solid"/>
+          </a:ln>
+        </p:spPr>
+      </p:sp>
+      <p:sp>
+        <p:nvSpPr>
+          <p:cNvPr id="37" name="Shape 35"/>
+          <p:cNvSpPr/>
+          <p:nvPr/>
+        </p:nvSpPr>
+        <p:spPr>
+          <a:xfrm>
+            <a:off x="2023872" y="4169664"/>
+            <a:ext cx="685800" cy="384048"/>
+          </a:xfrm>
+          <a:prstGeom prst="rect">
+            <a:avLst>
+              <a:gd name="adj" fmla="val 9524"/>
+            </a:avLst>
+          </a:prstGeom>
+          <a:solidFill>
             <a:srgbClr val="FFFFFF"/>
           </a:solidFill>
           <a:ln w="12700">
             <a:solidFill>
-              <a:srgbClr val="0D9488"/>
-            </a:solidFill>
-            <a:prstDash val="solid"/>
-          </a:ln>
-        </p:spPr>
-      </p:sp>
-      <p:sp>
-        <p:nvSpPr>
-          <p:cNvPr id="36" name="Text 34"/>
-          <p:cNvSpPr/>
-          <p:nvPr/>
-        </p:nvSpPr>
-        <p:spPr>
-          <a:xfrm>
-            <a:off x="6858000" y="3364992"/>
-            <a:ext cx="1554480" cy="475488"/>
-          </a:xfrm>
-          <a:prstGeom prst="rect">
-            <a:avLst/>
-          </a:prstGeom>
-          <a:noFill/>
-          <a:ln/>
-        </p:spPr>
-        <p:txBody>
-          <a:bodyPr wrap="square" lIns="0" tIns="0" rIns="0" bIns="0" rtlCol="0" anchor="ctr"/>
-          <a:lstStyle/>
-          <a:p>
-            <a:pPr algn="ctr" indent="0" marL="0">
-              <a:buNone/>
-            </a:pPr>
-            <a:r>
-              <a:rPr lang="en-US" sz="1400" b="1" dirty="0">
-                <a:solidFill>
-                  <a:srgbClr val="0D9488"/>
+              <a:srgbClr val="DB2777"/>
+            </a:solidFill>
+            <a:prstDash val="solid"/>
+          </a:ln>
+        </p:spPr>
+      </p:sp>
+      <p:sp>
+        <p:nvSpPr>
+          <p:cNvPr id="38" name="Text 36"/>
+          <p:cNvSpPr/>
+          <p:nvPr/>
+        </p:nvSpPr>
+        <p:spPr>
+          <a:xfrm>
+            <a:off x="2023872" y="4169664"/>
+            <a:ext cx="685800" cy="384048"/>
+          </a:xfrm>
+          <a:prstGeom prst="rect">
+            <a:avLst/>
+          </a:prstGeom>
+          <a:noFill/>
+          <a:ln/>
+        </p:spPr>
+        <p:txBody>
+          <a:bodyPr wrap="square" lIns="0" tIns="0" rIns="0" bIns="0" rtlCol="0" anchor="ctr"/>
+          <a:lstStyle/>
+          <a:p>
+            <a:pPr algn="ctr" indent="0" marL="0">
+              <a:buNone/>
+            </a:pPr>
+            <a:r>
+              <a:rPr lang="en-US" sz="900" b="1" dirty="0">
+                <a:solidFill>
+                  <a:srgbClr val="9D174D"/>
                 </a:solidFill>
                 <a:latin typeface="Trebuchet MS" pitchFamily="34" charset="0"/>
                 <a:ea typeface="Trebuchet MS" pitchFamily="34" charset="-122"/>
                 <a:cs typeface="Trebuchet MS" pitchFamily="34" charset="-120"/>
               </a:rPr>
-              <a:t>ble</a:t>
-            </a:r>
-            <a:endParaRPr lang="en-US" sz="1400" dirty="0"/>
-          </a:p>
-        </p:txBody>
-      </p:sp>
-      <p:sp>
-        <p:nvSpPr>
-          <p:cNvPr id="37" name="Shape 35"/>
-          <p:cNvSpPr/>
-          <p:nvPr/>
-        </p:nvSpPr>
-        <p:spPr>
-          <a:xfrm>
-            <a:off x="365760" y="4096512"/>
-            <a:ext cx="1371600" cy="804672"/>
+              <a:t>a</a:t>
+            </a:r>
+            <a:endParaRPr lang="en-US" sz="900" dirty="0"/>
+          </a:p>
+        </p:txBody>
+      </p:sp>
+      <p:sp>
+        <p:nvSpPr>
+          <p:cNvPr id="39" name="Shape 37"/>
+          <p:cNvSpPr/>
+          <p:nvPr/>
+        </p:nvSpPr>
+        <p:spPr>
+          <a:xfrm>
+            <a:off x="2831592" y="4169664"/>
+            <a:ext cx="685800" cy="384048"/>
           </a:xfrm>
           <a:prstGeom prst="rect">
             <a:avLst>
-              <a:gd name="adj" fmla="val 6818"/>
+              <a:gd name="adj" fmla="val 9524"/>
             </a:avLst>
           </a:prstGeom>
           <a:solidFill>
-            <a:srgbClr val="E2E8F0"/>
-          </a:solidFill>
-          <a:ln w="12700">
-            <a:solidFill>
-              <a:srgbClr val="E2E8F0"/>
-            </a:solidFill>
-            <a:prstDash val="solid"/>
-          </a:ln>
-        </p:spPr>
-      </p:sp>
-      <p:sp>
-        <p:nvSpPr>
-          <p:cNvPr id="38" name="Text 36"/>
-          <p:cNvSpPr/>
-          <p:nvPr/>
-        </p:nvSpPr>
-        <p:spPr>
-          <a:xfrm>
-            <a:off x="365760" y="4096512"/>
-            <a:ext cx="1371600" cy="804672"/>
-          </a:xfrm>
-          <a:prstGeom prst="rect">
-            <a:avLst/>
-          </a:prstGeom>
-          <a:noFill/>
-          <a:ln/>
-        </p:spPr>
-        <p:txBody>
-          <a:bodyPr wrap="square" lIns="0" tIns="0" rIns="0" bIns="0" rtlCol="0" anchor="ctr"/>
-          <a:lstStyle/>
-          <a:p>
-            <a:pPr algn="ctr" indent="0" marL="0">
-              <a:buNone/>
-            </a:pPr>
-            <a:r>
-              <a:rPr lang="en-US" sz="1100" b="1" dirty="0">
-                <a:solidFill>
-                  <a:srgbClr val="475569"/>
+            <a:srgbClr val="FFFFFF"/>
+          </a:solidFill>
+          <a:ln w="12700">
+            <a:solidFill>
+              <a:srgbClr val="DB2777"/>
+            </a:solidFill>
+            <a:prstDash val="solid"/>
+          </a:ln>
+        </p:spPr>
+      </p:sp>
+      <p:sp>
+        <p:nvSpPr>
+          <p:cNvPr id="40" name="Text 38"/>
+          <p:cNvSpPr/>
+          <p:nvPr/>
+        </p:nvSpPr>
+        <p:spPr>
+          <a:xfrm>
+            <a:off x="2831592" y="4169664"/>
+            <a:ext cx="685800" cy="384048"/>
+          </a:xfrm>
+          <a:prstGeom prst="rect">
+            <a:avLst/>
+          </a:prstGeom>
+          <a:noFill/>
+          <a:ln/>
+        </p:spPr>
+        <p:txBody>
+          <a:bodyPr wrap="square" lIns="0" tIns="0" rIns="0" bIns="0" rtlCol="0" anchor="ctr"/>
+          <a:lstStyle/>
+          <a:p>
+            <a:pPr algn="ctr" indent="0" marL="0">
+              <a:buNone/>
+            </a:pPr>
+            <a:r>
+              <a:rPr lang="en-US" sz="900" b="1" dirty="0">
+                <a:solidFill>
+                  <a:srgbClr val="9D174D"/>
                 </a:solidFill>
                 <a:latin typeface="Trebuchet MS" pitchFamily="34" charset="0"/>
                 <a:ea typeface="Trebuchet MS" pitchFamily="34" charset="-122"/>
                 <a:cs typeface="Trebuchet MS" pitchFamily="34" charset="-120"/>
               </a:rPr>
-              <a:t>Phonemes</a:t>
-            </a:r>
-            <a:endParaRPr lang="en-US" sz="1100" dirty="0"/>
-          </a:p>
-        </p:txBody>
-      </p:sp>
-      <p:sp>
-        <p:nvSpPr>
-          <p:cNvPr id="39" name="Shape 37"/>
-          <p:cNvSpPr/>
-          <p:nvPr/>
-        </p:nvSpPr>
-        <p:spPr>
-          <a:xfrm>
-            <a:off x="1874520" y="4096512"/>
-            <a:ext cx="6903720" cy="804672"/>
-          </a:xfrm>
-          <a:prstGeom prst="rect">
-            <a:avLst>
-              <a:gd name="adj" fmla="val 6818"/>
-            </a:avLst>
-          </a:prstGeom>
-          <a:solidFill>
-            <a:srgbClr val="FCE7F3"/>
-          </a:solidFill>
-          <a:ln w="12700">
-            <a:solidFill>
-              <a:srgbClr val="DB2777"/>
-            </a:solidFill>
-            <a:prstDash val="solid"/>
-          </a:ln>
-        </p:spPr>
-      </p:sp>
-      <p:sp>
-        <p:nvSpPr>
-          <p:cNvPr id="40" name="Shape 38"/>
-          <p:cNvSpPr/>
-          <p:nvPr/>
-        </p:nvSpPr>
-        <p:spPr>
-          <a:xfrm>
-            <a:off x="2023872" y="4169664"/>
+              <a:t>pp</a:t>
+            </a:r>
+            <a:endParaRPr lang="en-US" sz="900" dirty="0"/>
+          </a:p>
+        </p:txBody>
+      </p:sp>
+      <p:sp>
+        <p:nvSpPr>
+          <p:cNvPr id="41" name="Shape 39"/>
+          <p:cNvSpPr/>
+          <p:nvPr/>
+        </p:nvSpPr>
+        <p:spPr>
+          <a:xfrm>
+            <a:off x="3639312" y="4169664"/>
             <a:ext cx="685800" cy="384048"/>
           </a:xfrm>
           <a:prstGeom prst="rect">
@@ -33994,13 +33916,13 @@
       </p:sp>
       <p:sp>
         <p:nvSpPr>
-          <p:cNvPr id="41" name="Text 39"/>
-          <p:cNvSpPr/>
-          <p:nvPr/>
-        </p:nvSpPr>
-        <p:spPr>
-          <a:xfrm>
-            <a:off x="2023872" y="4169664"/>
+          <p:cNvPr id="42" name="Text 40"/>
+          <p:cNvSpPr/>
+          <p:nvPr/>
+        </p:nvSpPr>
+        <p:spPr>
+          <a:xfrm>
+            <a:off x="3639312" y="4169664"/>
             <a:ext cx="685800" cy="384048"/>
           </a:xfrm>
           <a:prstGeom prst="rect">
@@ -34025,7 +33947,7 @@
                 <a:ea typeface="Trebuchet MS" pitchFamily="34" charset="-122"/>
                 <a:cs typeface="Trebuchet MS" pitchFamily="34" charset="-120"/>
               </a:rPr>
-              <a:t>a</a:t>
+              <a:t>l</a:t>
             </a:r>
             <a:endParaRPr lang="en-US" sz="900" dirty="0"/>
           </a:p>
@@ -34033,13 +33955,13 @@
       </p:sp>
       <p:sp>
         <p:nvSpPr>
-          <p:cNvPr id="42" name="Shape 40"/>
-          <p:cNvSpPr/>
-          <p:nvPr/>
-        </p:nvSpPr>
-        <p:spPr>
-          <a:xfrm>
-            <a:off x="2831592" y="4169664"/>
+          <p:cNvPr id="43" name="Shape 41"/>
+          <p:cNvSpPr/>
+          <p:nvPr/>
+        </p:nvSpPr>
+        <p:spPr>
+          <a:xfrm>
+            <a:off x="4447032" y="4169664"/>
             <a:ext cx="685800" cy="384048"/>
           </a:xfrm>
           <a:prstGeom prst="rect">
@@ -34060,13 +33982,13 @@
       </p:sp>
       <p:sp>
         <p:nvSpPr>
-          <p:cNvPr id="43" name="Text 41"/>
-          <p:cNvSpPr/>
-          <p:nvPr/>
-        </p:nvSpPr>
-        <p:spPr>
-          <a:xfrm>
-            <a:off x="2831592" y="4169664"/>
+          <p:cNvPr id="44" name="Text 42"/>
+          <p:cNvSpPr/>
+          <p:nvPr/>
+        </p:nvSpPr>
+        <p:spPr>
+          <a:xfrm>
+            <a:off x="4447032" y="4169664"/>
             <a:ext cx="685800" cy="384048"/>
           </a:xfrm>
           <a:prstGeom prst="rect">
@@ -34091,7 +34013,7 @@
                 <a:ea typeface="Trebuchet MS" pitchFamily="34" charset="-122"/>
                 <a:cs typeface="Trebuchet MS" pitchFamily="34" charset="-120"/>
               </a:rPr>
-              <a:t>pp</a:t>
+              <a:t>i</a:t>
             </a:r>
             <a:endParaRPr lang="en-US" sz="900" dirty="0"/>
           </a:p>
@@ -34099,13 +34021,13 @@
       </p:sp>
       <p:sp>
         <p:nvSpPr>
-          <p:cNvPr id="44" name="Shape 42"/>
-          <p:cNvSpPr/>
-          <p:nvPr/>
-        </p:nvSpPr>
-        <p:spPr>
-          <a:xfrm>
-            <a:off x="3639312" y="4169664"/>
+          <p:cNvPr id="45" name="Shape 43"/>
+          <p:cNvSpPr/>
+          <p:nvPr/>
+        </p:nvSpPr>
+        <p:spPr>
+          <a:xfrm>
+            <a:off x="5254752" y="4169664"/>
             <a:ext cx="685800" cy="384048"/>
           </a:xfrm>
           <a:prstGeom prst="rect">
@@ -34126,13 +34048,13 @@
       </p:sp>
       <p:sp>
         <p:nvSpPr>
-          <p:cNvPr id="45" name="Text 43"/>
-          <p:cNvSpPr/>
-          <p:nvPr/>
-        </p:nvSpPr>
-        <p:spPr>
-          <a:xfrm>
-            <a:off x="3639312" y="4169664"/>
+          <p:cNvPr id="46" name="Text 44"/>
+          <p:cNvSpPr/>
+          <p:nvPr/>
+        </p:nvSpPr>
+        <p:spPr>
+          <a:xfrm>
+            <a:off x="5254752" y="4169664"/>
             <a:ext cx="685800" cy="384048"/>
           </a:xfrm>
           <a:prstGeom prst="rect">
@@ -34157,7 +34079,7 @@
                 <a:ea typeface="Trebuchet MS" pitchFamily="34" charset="-122"/>
                 <a:cs typeface="Trebuchet MS" pitchFamily="34" charset="-120"/>
               </a:rPr>
-              <a:t>l</a:t>
+              <a:t>c</a:t>
             </a:r>
             <a:endParaRPr lang="en-US" sz="900" dirty="0"/>
           </a:p>
@@ -34165,13 +34087,52 @@
       </p:sp>
       <p:sp>
         <p:nvSpPr>
-          <p:cNvPr id="46" name="Shape 44"/>
-          <p:cNvSpPr/>
-          <p:nvPr/>
-        </p:nvSpPr>
-        <p:spPr>
-          <a:xfrm>
-            <a:off x="4447032" y="4169664"/>
+          <p:cNvPr id="47" name="Text 45"/>
+          <p:cNvSpPr/>
+          <p:nvPr/>
+        </p:nvSpPr>
+        <p:spPr>
+          <a:xfrm>
+            <a:off x="5254752" y="4572000"/>
+            <a:ext cx="685800" cy="219456"/>
+          </a:xfrm>
+          <a:prstGeom prst="rect">
+            <a:avLst/>
+          </a:prstGeom>
+          <a:noFill/>
+          <a:ln/>
+        </p:spPr>
+        <p:txBody>
+          <a:bodyPr wrap="square" lIns="0" tIns="0" rIns="0" bIns="0" rtlCol="0" anchor="t"/>
+          <a:lstStyle/>
+          <a:p>
+            <a:pPr algn="ctr" indent="0" marL="0">
+              <a:buNone/>
+            </a:pPr>
+            <a:r>
+              <a:rPr lang="en-US" sz="750" i="1" dirty="0">
+                <a:solidFill>
+                  <a:srgbClr val="94A3B8"/>
+                </a:solidFill>
+                <a:latin typeface="Calibri" pitchFamily="34" charset="0"/>
+                <a:ea typeface="Calibri" pitchFamily="34" charset="-122"/>
+                <a:cs typeface="Calibri" pitchFamily="34" charset="-120"/>
+              </a:rPr>
+              <a:t>/k/</a:t>
+            </a:r>
+            <a:endParaRPr lang="en-US" sz="750" dirty="0"/>
+          </a:p>
+        </p:txBody>
+      </p:sp>
+      <p:sp>
+        <p:nvSpPr>
+          <p:cNvPr id="48" name="Shape 46"/>
+          <p:cNvSpPr/>
+          <p:nvPr/>
+        </p:nvSpPr>
+        <p:spPr>
+          <a:xfrm>
+            <a:off x="6062472" y="4169664"/>
             <a:ext cx="685800" cy="384048"/>
           </a:xfrm>
           <a:prstGeom prst="rect">
@@ -34192,13 +34153,13 @@
       </p:sp>
       <p:sp>
         <p:nvSpPr>
-          <p:cNvPr id="47" name="Text 45"/>
-          <p:cNvSpPr/>
-          <p:nvPr/>
-        </p:nvSpPr>
-        <p:spPr>
-          <a:xfrm>
-            <a:off x="4447032" y="4169664"/>
+          <p:cNvPr id="49" name="Text 47"/>
+          <p:cNvSpPr/>
+          <p:nvPr/>
+        </p:nvSpPr>
+        <p:spPr>
+          <a:xfrm>
+            <a:off x="6062472" y="4169664"/>
             <a:ext cx="685800" cy="384048"/>
           </a:xfrm>
           <a:prstGeom prst="rect">
@@ -34223,7 +34184,7 @@
                 <a:ea typeface="Trebuchet MS" pitchFamily="34" charset="-122"/>
                 <a:cs typeface="Trebuchet MS" pitchFamily="34" charset="-120"/>
               </a:rPr>
-              <a:t>i</a:t>
+              <a:t>a</a:t>
             </a:r>
             <a:endParaRPr lang="en-US" sz="900" dirty="0"/>
           </a:p>
@@ -34231,13 +34192,13 @@
       </p:sp>
       <p:sp>
         <p:nvSpPr>
-          <p:cNvPr id="48" name="Shape 46"/>
-          <p:cNvSpPr/>
-          <p:nvPr/>
-        </p:nvSpPr>
-        <p:spPr>
-          <a:xfrm>
-            <a:off x="5254752" y="4169664"/>
+          <p:cNvPr id="50" name="Shape 48"/>
+          <p:cNvSpPr/>
+          <p:nvPr/>
+        </p:nvSpPr>
+        <p:spPr>
+          <a:xfrm>
+            <a:off x="6870192" y="4169664"/>
             <a:ext cx="685800" cy="384048"/>
           </a:xfrm>
           <a:prstGeom prst="rect">
@@ -34258,13 +34219,13 @@
       </p:sp>
       <p:sp>
         <p:nvSpPr>
-          <p:cNvPr id="49" name="Text 47"/>
-          <p:cNvSpPr/>
-          <p:nvPr/>
-        </p:nvSpPr>
-        <p:spPr>
-          <a:xfrm>
-            <a:off x="5254752" y="4169664"/>
+          <p:cNvPr id="51" name="Text 49"/>
+          <p:cNvSpPr/>
+          <p:nvPr/>
+        </p:nvSpPr>
+        <p:spPr>
+          <a:xfrm>
+            <a:off x="6870192" y="4169664"/>
             <a:ext cx="685800" cy="384048"/>
           </a:xfrm>
           <a:prstGeom prst="rect">
@@ -34289,7 +34250,7 @@
                 <a:ea typeface="Trebuchet MS" pitchFamily="34" charset="-122"/>
                 <a:cs typeface="Trebuchet MS" pitchFamily="34" charset="-120"/>
               </a:rPr>
-              <a:t>c</a:t>
+              <a:t>n</a:t>
             </a:r>
             <a:endParaRPr lang="en-US" sz="900" dirty="0"/>
           </a:p>
@@ -34297,52 +34258,13 @@
       </p:sp>
       <p:sp>
         <p:nvSpPr>
-          <p:cNvPr id="50" name="Text 48"/>
-          <p:cNvSpPr/>
-          <p:nvPr/>
-        </p:nvSpPr>
-        <p:spPr>
-          <a:xfrm>
-            <a:off x="5254752" y="4572000"/>
-            <a:ext cx="685800" cy="219456"/>
-          </a:xfrm>
-          <a:prstGeom prst="rect">
-            <a:avLst/>
-          </a:prstGeom>
-          <a:noFill/>
-          <a:ln/>
-        </p:spPr>
-        <p:txBody>
-          <a:bodyPr wrap="square" lIns="0" tIns="0" rIns="0" bIns="0" rtlCol="0" anchor="t"/>
-          <a:lstStyle/>
-          <a:p>
-            <a:pPr algn="ctr" indent="0" marL="0">
-              <a:buNone/>
-            </a:pPr>
-            <a:r>
-              <a:rPr lang="en-US" sz="750" i="1" dirty="0">
-                <a:solidFill>
-                  <a:srgbClr val="94A3B8"/>
-                </a:solidFill>
-                <a:latin typeface="Calibri" pitchFamily="34" charset="0"/>
-                <a:ea typeface="Calibri" pitchFamily="34" charset="-122"/>
-                <a:cs typeface="Calibri" pitchFamily="34" charset="-120"/>
-              </a:rPr>
-              <a:t>/k/</a:t>
-            </a:r>
-            <a:endParaRPr lang="en-US" sz="750" dirty="0"/>
-          </a:p>
-        </p:txBody>
-      </p:sp>
-      <p:sp>
-        <p:nvSpPr>
-          <p:cNvPr id="51" name="Shape 49"/>
-          <p:cNvSpPr/>
-          <p:nvPr/>
-        </p:nvSpPr>
-        <p:spPr>
-          <a:xfrm>
-            <a:off x="6062472" y="4169664"/>
+          <p:cNvPr id="52" name="Shape 50"/>
+          <p:cNvSpPr/>
+          <p:nvPr/>
+        </p:nvSpPr>
+        <p:spPr>
+          <a:xfrm>
+            <a:off x="7677912" y="4169664"/>
             <a:ext cx="685800" cy="384048"/>
           </a:xfrm>
           <a:prstGeom prst="rect">
@@ -34363,13 +34285,13 @@
       </p:sp>
       <p:sp>
         <p:nvSpPr>
-          <p:cNvPr id="52" name="Text 50"/>
-          <p:cNvSpPr/>
-          <p:nvPr/>
-        </p:nvSpPr>
-        <p:spPr>
-          <a:xfrm>
-            <a:off x="6062472" y="4169664"/>
+          <p:cNvPr id="53" name="Text 51"/>
+          <p:cNvSpPr/>
+          <p:nvPr/>
+        </p:nvSpPr>
+        <p:spPr>
+          <a:xfrm>
+            <a:off x="7677912" y="4169664"/>
             <a:ext cx="685800" cy="384048"/>
           </a:xfrm>
           <a:prstGeom prst="rect">
@@ -34394,139 +34316,7 @@
                 <a:ea typeface="Trebuchet MS" pitchFamily="34" charset="-122"/>
                 <a:cs typeface="Trebuchet MS" pitchFamily="34" charset="-120"/>
               </a:rPr>
-              <a:t>a</a:t>
-            </a:r>
-            <a:endParaRPr lang="en-US" sz="900" dirty="0"/>
-          </a:p>
-        </p:txBody>
-      </p:sp>
-      <p:sp>
-        <p:nvSpPr>
-          <p:cNvPr id="53" name="Shape 51"/>
-          <p:cNvSpPr/>
-          <p:nvPr/>
-        </p:nvSpPr>
-        <p:spPr>
-          <a:xfrm>
-            <a:off x="6870192" y="4169664"/>
-            <a:ext cx="685800" cy="384048"/>
-          </a:xfrm>
-          <a:prstGeom prst="rect">
-            <a:avLst>
-              <a:gd name="adj" fmla="val 9524"/>
-            </a:avLst>
-          </a:prstGeom>
-          <a:solidFill>
-            <a:srgbClr val="FFFFFF"/>
-          </a:solidFill>
-          <a:ln w="12700">
-            <a:solidFill>
-              <a:srgbClr val="DB2777"/>
-            </a:solidFill>
-            <a:prstDash val="solid"/>
-          </a:ln>
-        </p:spPr>
-      </p:sp>
-      <p:sp>
-        <p:nvSpPr>
-          <p:cNvPr id="54" name="Text 52"/>
-          <p:cNvSpPr/>
-          <p:nvPr/>
-        </p:nvSpPr>
-        <p:spPr>
-          <a:xfrm>
-            <a:off x="6870192" y="4169664"/>
-            <a:ext cx="685800" cy="384048"/>
-          </a:xfrm>
-          <a:prstGeom prst="rect">
-            <a:avLst/>
-          </a:prstGeom>
-          <a:noFill/>
-          <a:ln/>
-        </p:spPr>
-        <p:txBody>
-          <a:bodyPr wrap="square" lIns="0" tIns="0" rIns="0" bIns="0" rtlCol="0" anchor="ctr"/>
-          <a:lstStyle/>
-          <a:p>
-            <a:pPr algn="ctr" indent="0" marL="0">
-              <a:buNone/>
-            </a:pPr>
-            <a:r>
-              <a:rPr lang="en-US" sz="900" b="1" dirty="0">
-                <a:solidFill>
-                  <a:srgbClr val="9D174D"/>
-                </a:solidFill>
-                <a:latin typeface="Trebuchet MS" pitchFamily="34" charset="0"/>
-                <a:ea typeface="Trebuchet MS" pitchFamily="34" charset="-122"/>
-                <a:cs typeface="Trebuchet MS" pitchFamily="34" charset="-120"/>
-              </a:rPr>
-              <a:t>b</a:t>
-            </a:r>
-            <a:endParaRPr lang="en-US" sz="900" dirty="0"/>
-          </a:p>
-        </p:txBody>
-      </p:sp>
-      <p:sp>
-        <p:nvSpPr>
-          <p:cNvPr id="55" name="Shape 53"/>
-          <p:cNvSpPr/>
-          <p:nvPr/>
-        </p:nvSpPr>
-        <p:spPr>
-          <a:xfrm>
-            <a:off x="7677912" y="4169664"/>
-            <a:ext cx="685800" cy="384048"/>
-          </a:xfrm>
-          <a:prstGeom prst="rect">
-            <a:avLst>
-              <a:gd name="adj" fmla="val 9524"/>
-            </a:avLst>
-          </a:prstGeom>
-          <a:solidFill>
-            <a:srgbClr val="FFFFFF"/>
-          </a:solidFill>
-          <a:ln w="12700">
-            <a:solidFill>
-              <a:srgbClr val="DB2777"/>
-            </a:solidFill>
-            <a:prstDash val="solid"/>
-          </a:ln>
-        </p:spPr>
-      </p:sp>
-      <p:sp>
-        <p:nvSpPr>
-          <p:cNvPr id="56" name="Text 54"/>
-          <p:cNvSpPr/>
-          <p:nvPr/>
-        </p:nvSpPr>
-        <p:spPr>
-          <a:xfrm>
-            <a:off x="7677912" y="4169664"/>
-            <a:ext cx="685800" cy="384048"/>
-          </a:xfrm>
-          <a:prstGeom prst="rect">
-            <a:avLst/>
-          </a:prstGeom>
-          <a:noFill/>
-          <a:ln/>
-        </p:spPr>
-        <p:txBody>
-          <a:bodyPr wrap="square" lIns="0" tIns="0" rIns="0" bIns="0" rtlCol="0" anchor="ctr"/>
-          <a:lstStyle/>
-          <a:p>
-            <a:pPr algn="ctr" indent="0" marL="0">
-              <a:buNone/>
-            </a:pPr>
-            <a:r>
-              <a:rPr lang="en-US" sz="900" b="1" dirty="0">
-                <a:solidFill>
-                  <a:srgbClr val="9D174D"/>
-                </a:solidFill>
-                <a:latin typeface="Trebuchet MS" pitchFamily="34" charset="0"/>
-                <a:ea typeface="Trebuchet MS" pitchFamily="34" charset="-122"/>
-                <a:cs typeface="Trebuchet MS" pitchFamily="34" charset="-120"/>
-              </a:rPr>
-              <a:t>le</a:t>
+              <a:t>t</a:t>
             </a:r>
             <a:endParaRPr lang="en-US" sz="900" dirty="0"/>
           </a:p>
@@ -36875,7 +36665,7 @@
                 <a:ea typeface="Trebuchet MS" pitchFamily="34" charset="-122"/>
                 <a:cs typeface="Trebuchet MS" pitchFamily="34" charset="-120"/>
               </a:rPr>
-              <a:t>-ation</a:t>
+              <a:t>-ication</a:t>
             </a:r>
             <a:endParaRPr lang="en-US" sz="1300" dirty="0"/>
           </a:p>
@@ -37028,7 +36818,7 @@
                 <a:ea typeface="Trebuchet MS" pitchFamily="34" charset="-122"/>
                 <a:cs typeface="Trebuchet MS" pitchFamily="34" charset="-120"/>
               </a:rPr>
-              <a:t>-able</a:t>
+              <a:t>-icable</a:t>
             </a:r>
             <a:endParaRPr lang="en-US" sz="1300" dirty="0"/>
           </a:p>
@@ -37199,7 +36989,7 @@
                 <a:ea typeface="Trebuchet MS" pitchFamily="34" charset="-122"/>
                 <a:cs typeface="Trebuchet MS" pitchFamily="34" charset="-120"/>
               </a:rPr>
-              <a:t>applies</a:t>
+              <a:t>applied</a:t>
             </a:r>
             <a:endParaRPr lang="en-US" sz="1200" dirty="0"/>
           </a:p>
@@ -37265,7 +37055,7 @@
                 <a:ea typeface="Trebuchet MS" pitchFamily="34" charset="-122"/>
                 <a:cs typeface="Trebuchet MS" pitchFamily="34" charset="-120"/>
               </a:rPr>
-              <a:t>applied</a:t>
+              <a:t>applying</a:t>
             </a:r>
             <a:endParaRPr lang="en-US" sz="1200" dirty="0"/>
           </a:p>
@@ -37331,7 +37121,7 @@
                 <a:ea typeface="Trebuchet MS" pitchFamily="34" charset="-122"/>
                 <a:cs typeface="Trebuchet MS" pitchFamily="34" charset="-120"/>
               </a:rPr>
-              <a:t>applying</a:t>
+              <a:t>reapply</a:t>
             </a:r>
             <a:endParaRPr lang="en-US" sz="1200" dirty="0"/>
           </a:p>
@@ -37397,7 +37187,7 @@
                 <a:ea typeface="Trebuchet MS" pitchFamily="34" charset="-122"/>
                 <a:cs typeface="Trebuchet MS" pitchFamily="34" charset="-120"/>
               </a:rPr>
-              <a:t>reapply</a:t>
+              <a:t>application</a:t>
             </a:r>
             <a:endParaRPr lang="en-US" sz="1200" dirty="0"/>
           </a:p>
@@ -37463,7 +37253,7 @@
                 <a:ea typeface="Trebuchet MS" pitchFamily="34" charset="-122"/>
                 <a:cs typeface="Trebuchet MS" pitchFamily="34" charset="-120"/>
               </a:rPr>
-              <a:t>application</a:t>
+              <a:t>applicable</a:t>
             </a:r>
             <a:endParaRPr lang="en-US" sz="1200" dirty="0"/>
           </a:p>
@@ -37529,7 +37319,7 @@
                 <a:ea typeface="Trebuchet MS" pitchFamily="34" charset="-122"/>
                 <a:cs typeface="Trebuchet MS" pitchFamily="34" charset="-120"/>
               </a:rPr>
-              <a:t>applicable</a:t>
+              <a:t>applicant</a:t>
             </a:r>
             <a:endParaRPr lang="en-US" sz="1200" dirty="0"/>
           </a:p>
@@ -37595,7 +37385,7 @@
                 <a:ea typeface="Trebuchet MS" pitchFamily="34" charset="-122"/>
                 <a:cs typeface="Trebuchet MS" pitchFamily="34" charset="-120"/>
               </a:rPr>
-              <a:t>applicant</a:t>
+              <a:t>misapply</a:t>
             </a:r>
             <a:endParaRPr lang="en-US" sz="1200" dirty="0"/>
           </a:p>
@@ -38783,7 +38573,7 @@
                 <a:ea typeface="Calibri" pitchFamily="34" charset="-122"/>
                 <a:cs typeface="Calibri" pitchFamily="34" charset="-120"/>
               </a:rPr>
-              <a:t>1.  The word 'apply' comes from the Latin word 'applicare'.</a:t>
+              <a:t>1.  'Misapply' means to apply something very carefully and correctly.</a:t>
             </a:r>
             <a:endParaRPr lang="en-US" sz="1300" dirty="0"/>
           </a:p>
@@ -38806,11 +38596,11 @@
             </a:avLst>
           </a:prstGeom>
           <a:solidFill>
-            <a:srgbClr val="DCFCE7"/>
-          </a:solidFill>
-          <a:ln w="12700">
-            <a:solidFill>
-              <a:srgbClr val="16A34A"/>
+            <a:srgbClr val="FEE2E2"/>
+          </a:solidFill>
+          <a:ln w="12700">
+            <a:solidFill>
+              <a:srgbClr val="DC2626"/>
             </a:solidFill>
             <a:prstDash val="solid"/>
           </a:ln>
@@ -38843,13 +38633,13 @@
             <a:r>
               <a:rPr lang="en-US" sz="1100" b="1" dirty="0">
                 <a:solidFill>
-                  <a:srgbClr val="16A34A"/>
+                  <a:srgbClr val="DC2626"/>
                 </a:solidFill>
                 <a:latin typeface="Trebuchet MS" pitchFamily="34" charset="0"/>
                 <a:ea typeface="Trebuchet MS" pitchFamily="34" charset="-122"/>
                 <a:cs typeface="Trebuchet MS" pitchFamily="34" charset="-120"/>
               </a:rPr>
-              <a:t>TRUE</a:t>
+              <a:t>FALSE</a:t>
             </a:r>
             <a:endParaRPr lang="en-US" sz="1100" dirty="0"/>
           </a:p>
@@ -38922,7 +38712,7 @@
                 <a:ea typeface="Calibri" pitchFamily="34" charset="-122"/>
                 <a:cs typeface="Calibri" pitchFamily="34" charset="-120"/>
               </a:rPr>
-              <a:t>2.  The word 'reapply' means to apply something for the very first time.</a:t>
+              <a:t>2.  The root 'apply' comes from ancient Greek.</a:t>
             </a:r>
             <a:endParaRPr lang="en-US" sz="1300" dirty="0"/>
           </a:p>
@@ -39061,7 +38851,7 @@
                 <a:ea typeface="Calibri" pitchFamily="34" charset="-122"/>
                 <a:cs typeface="Calibri" pitchFamily="34" charset="-120"/>
               </a:rPr>
-              <a:t>3.  An 'applicant' is a person who is applying for something.</a:t>
+              <a:t>3.  The suffix '-ication' can be added to 'apply' to make 'application'.</a:t>
             </a:r>
             <a:endParaRPr lang="en-US" sz="1300" dirty="0"/>
           </a:p>
@@ -39200,7 +38990,7 @@
                 <a:ea typeface="Calibri" pitchFamily="34" charset="-122"/>
                 <a:cs typeface="Calibri" pitchFamily="34" charset="-120"/>
               </a:rPr>
-              <a:t>4.  The suffix '-ation' can be added to 'apply' to make the word 'application'.</a:t>
+              <a:t>4.  The word 'reapply' means to apply something again.</a:t>
             </a:r>
             <a:endParaRPr lang="en-US" sz="1300" dirty="0"/>
           </a:p>
@@ -39339,7 +39129,7 @@
                 <a:ea typeface="Calibri" pitchFamily="34" charset="-122"/>
                 <a:cs typeface="Calibri" pitchFamily="34" charset="-120"/>
               </a:rPr>
-              <a:t>5.  The word 'applicable' means something cannot be used in a situation.</a:t>
+              <a:t>5.  An 'applicant' is a person who applies for something.</a:t>
             </a:r>
             <a:endParaRPr lang="en-US" sz="1300" dirty="0"/>
           </a:p>
@@ -39362,11 +39152,11 @@
             </a:avLst>
           </a:prstGeom>
           <a:solidFill>
-            <a:srgbClr val="FEE2E2"/>
-          </a:solidFill>
-          <a:ln w="12700">
-            <a:solidFill>
-              <a:srgbClr val="DC2626"/>
+            <a:srgbClr val="DCFCE7"/>
+          </a:solidFill>
+          <a:ln w="12700">
+            <a:solidFill>
+              <a:srgbClr val="16A34A"/>
             </a:solidFill>
             <a:prstDash val="solid"/>
           </a:ln>
@@ -39399,13 +39189,13 @@
             <a:r>
               <a:rPr lang="en-US" sz="1100" b="1" dirty="0">
                 <a:solidFill>
-                  <a:srgbClr val="DC2626"/>
+                  <a:srgbClr val="16A34A"/>
                 </a:solidFill>
                 <a:latin typeface="Trebuchet MS" pitchFamily="34" charset="0"/>
                 <a:ea typeface="Trebuchet MS" pitchFamily="34" charset="-122"/>
                 <a:cs typeface="Trebuchet MS" pitchFamily="34" charset="-120"/>
               </a:rPr>
-              <a:t>FALSE</a:t>
+              <a:t>TRUE</a:t>
             </a:r>
             <a:endParaRPr lang="en-US" sz="1100" dirty="0"/>
           </a:p>
@@ -40044,7 +39834,7 @@
                 <a:ea typeface="Trebuchet MS" pitchFamily="34" charset="-122"/>
                 <a:cs typeface="Trebuchet MS" pitchFamily="34" charset="-120"/>
               </a:rPr>
-              <a:t>applies</a:t>
+              <a:t>applied</a:t>
             </a:r>
             <a:endParaRPr lang="en-US" sz="1300" dirty="0"/>
           </a:p>
@@ -40110,7 +39900,7 @@
                 <a:ea typeface="Trebuchet MS" pitchFamily="34" charset="-122"/>
                 <a:cs typeface="Trebuchet MS" pitchFamily="34" charset="-120"/>
               </a:rPr>
-              <a:t>applied</a:t>
+              <a:t>applying</a:t>
             </a:r>
             <a:endParaRPr lang="en-US" sz="1300" dirty="0"/>
           </a:p>
@@ -40176,7 +39966,7 @@
                 <a:ea typeface="Trebuchet MS" pitchFamily="34" charset="-122"/>
                 <a:cs typeface="Trebuchet MS" pitchFamily="34" charset="-120"/>
               </a:rPr>
-              <a:t>applying</a:t>
+              <a:t>reapply</a:t>
             </a:r>
             <a:endParaRPr lang="en-US" sz="1300" dirty="0"/>
           </a:p>
@@ -40242,7 +40032,7 @@
                 <a:ea typeface="Trebuchet MS" pitchFamily="34" charset="-122"/>
                 <a:cs typeface="Trebuchet MS" pitchFamily="34" charset="-120"/>
               </a:rPr>
-              <a:t>reapply</a:t>
+              <a:t>application</a:t>
             </a:r>
             <a:endParaRPr lang="en-US" sz="1300" dirty="0"/>
           </a:p>
@@ -40308,7 +40098,7 @@
                 <a:ea typeface="Trebuchet MS" pitchFamily="34" charset="-122"/>
                 <a:cs typeface="Trebuchet MS" pitchFamily="34" charset="-120"/>
               </a:rPr>
-              <a:t>application</a:t>
+              <a:t>applicable</a:t>
             </a:r>
             <a:endParaRPr lang="en-US" sz="1300" dirty="0"/>
           </a:p>
@@ -40374,7 +40164,7 @@
                 <a:ea typeface="Trebuchet MS" pitchFamily="34" charset="-122"/>
                 <a:cs typeface="Trebuchet MS" pitchFamily="34" charset="-120"/>
               </a:rPr>
-              <a:t>applicable</a:t>
+              <a:t>applicant</a:t>
             </a:r>
             <a:endParaRPr lang="en-US" sz="1300" dirty="0"/>
           </a:p>
@@ -41554,7 +41344,7 @@
                 <a:ea typeface="Trebuchet MS" pitchFamily="34" charset="-122"/>
                 <a:cs typeface="Trebuchet MS" pitchFamily="34" charset="-120"/>
               </a:rPr>
-              <a:t>-ation</a:t>
+              <a:t>-ication</a:t>
             </a:r>
             <a:endParaRPr lang="en-US" sz="1300" dirty="0"/>
           </a:p>
@@ -41707,7 +41497,7 @@
                 <a:ea typeface="Trebuchet MS" pitchFamily="34" charset="-122"/>
                 <a:cs typeface="Trebuchet MS" pitchFamily="34" charset="-120"/>
               </a:rPr>
-              <a:t>-able</a:t>
+              <a:t>-icable</a:t>
             </a:r>
             <a:endParaRPr lang="en-US" sz="1300" dirty="0"/>
           </a:p>
@@ -42618,7 +42408,7 @@
                 <a:ea typeface="Calibri" pitchFamily="34" charset="-122"/>
                 <a:cs typeface="Calibri" pitchFamily="34" charset="-120"/>
               </a:rPr>
-              <a:t>To put something on again, like reapplying sunscreen after swimming.</a:t>
+              <a:t>A formal request, like a form you fill in to join a club or get a job.</a:t>
             </a:r>
             <a:endParaRPr lang="en-US" sz="1200" dirty="0"/>
           </a:p>
@@ -42691,7 +42481,7 @@
                 <a:ea typeface="Trebuchet MS" pitchFamily="34" charset="-122"/>
                 <a:cs typeface="Trebuchet MS" pitchFamily="34" charset="-120"/>
               </a:rPr>
-              <a:t>applies</a:t>
+              <a:t>applied</a:t>
             </a:r>
             <a:endParaRPr lang="en-US" sz="1200" dirty="0"/>
           </a:p>
@@ -42757,7 +42547,7 @@
                 <a:ea typeface="Calibri" pitchFamily="34" charset="-122"/>
                 <a:cs typeface="Calibri" pitchFamily="34" charset="-120"/>
               </a:rPr>
-              <a:t>The act of putting something onto something else or making a request right now.</a:t>
+              <a:t>To apply again, like putting on more sunscreen after swimming.</a:t>
             </a:r>
             <a:endParaRPr lang="en-US" sz="1200" dirty="0"/>
           </a:p>
@@ -42830,7 +42620,7 @@
                 <a:ea typeface="Trebuchet MS" pitchFamily="34" charset="-122"/>
                 <a:cs typeface="Trebuchet MS" pitchFamily="34" charset="-120"/>
               </a:rPr>
-              <a:t>applied</a:t>
+              <a:t>applying</a:t>
             </a:r>
             <a:endParaRPr lang="en-US" sz="1200" dirty="0"/>
           </a:p>
@@ -42896,7 +42686,7 @@
                 <a:ea typeface="Calibri" pitchFamily="34" charset="-122"/>
                 <a:cs typeface="Calibri" pitchFamily="34" charset="-120"/>
               </a:rPr>
-              <a:t>A formal request for something, like an application to join a school club.</a:t>
+              <a:t>When something is relevant or can be used in a particular situation.</a:t>
             </a:r>
             <a:endParaRPr lang="en-US" sz="1200" dirty="0"/>
           </a:p>
@@ -42969,7 +42759,7 @@
                 <a:ea typeface="Trebuchet MS" pitchFamily="34" charset="-122"/>
                 <a:cs typeface="Trebuchet MS" pitchFamily="34" charset="-120"/>
               </a:rPr>
-              <a:t>applying</a:t>
+              <a:t>reapply</a:t>
             </a:r>
             <a:endParaRPr lang="en-US" sz="1200" dirty="0"/>
           </a:p>
@@ -43035,7 +42825,7 @@
                 <a:ea typeface="Calibri" pitchFamily="34" charset="-122"/>
                 <a:cs typeface="Calibri" pitchFamily="34" charset="-120"/>
               </a:rPr>
-              <a:t>When something has already been put into use or placed on a surface.</a:t>
+              <a:t>The action of putting something on or sending in a request right now.</a:t>
             </a:r>
             <a:endParaRPr lang="en-US" sz="1200" dirty="0"/>
           </a:p>
@@ -43108,7 +42898,7 @@
                 <a:ea typeface="Trebuchet MS" pitchFamily="34" charset="-122"/>
                 <a:cs typeface="Trebuchet MS" pitchFamily="34" charset="-120"/>
               </a:rPr>
-              <a:t>reapply</a:t>
+              <a:t>application</a:t>
             </a:r>
             <a:endParaRPr lang="en-US" sz="1200" dirty="0"/>
           </a:p>
@@ -43174,7 +42964,7 @@
                 <a:ea typeface="Calibri" pitchFamily="34" charset="-122"/>
                 <a:cs typeface="Calibri" pitchFamily="34" charset="-120"/>
               </a:rPr>
-              <a:t>Something that is able to be used or is relevant to a situation.</a:t>
+              <a:t>A person who has asked or applied for something, like a place at a school.</a:t>
             </a:r>
             <a:endParaRPr lang="en-US" sz="1200" dirty="0"/>
           </a:p>
@@ -43247,7 +43037,7 @@
                 <a:ea typeface="Trebuchet MS" pitchFamily="34" charset="-122"/>
                 <a:cs typeface="Trebuchet MS" pitchFamily="34" charset="-120"/>
               </a:rPr>
-              <a:t>application</a:t>
+              <a:t>applicable</a:t>
             </a:r>
             <a:endParaRPr lang="en-US" sz="1200" dirty="0"/>
           </a:p>
@@ -43313,7 +43103,7 @@
                 <a:ea typeface="Calibri" pitchFamily="34" charset="-122"/>
                 <a:cs typeface="Calibri" pitchFamily="34" charset="-120"/>
               </a:rPr>
-              <a:t>To put something onto a surface or to ask for something formally, like applying for a job.</a:t>
+              <a:t>To put something on a surface or to make a request for something, like applying for a job.</a:t>
             </a:r>
             <a:endParaRPr lang="en-US" sz="1200" dirty="0"/>
           </a:p>
@@ -43386,7 +43176,7 @@
                 <a:ea typeface="Trebuchet MS" pitchFamily="34" charset="-122"/>
                 <a:cs typeface="Trebuchet MS" pitchFamily="34" charset="-120"/>
               </a:rPr>
-              <a:t>applicable</a:t>
+              <a:t>applicant</a:t>
             </a:r>
             <a:endParaRPr lang="en-US" sz="1200" dirty="0"/>
           </a:p>
@@ -43452,7 +43242,7 @@
                 <a:ea typeface="Calibri" pitchFamily="34" charset="-122"/>
                 <a:cs typeface="Calibri" pitchFamily="34" charset="-120"/>
               </a:rPr>
-              <a:t>When something is used or put into action, like a rule that applies to everyone.</a:t>
+              <a:t>When something has been put to use, like applied science means science used to solve real problems.</a:t>
             </a:r>
             <a:endParaRPr lang="en-US" sz="1200" dirty="0"/>
           </a:p>
@@ -43947,7 +43737,7 @@
                 <a:ea typeface="Calibri" pitchFamily="34" charset="-122"/>
                 <a:cs typeface="Calibri" pitchFamily="34" charset="-120"/>
               </a:rPr>
-              <a:t>Remember to reapply your sunscreen after lunch so you don't get sunburnt on the oval.</a:t>
+              <a:t>Remember to reapply your sunscreen after you get out of the pool, or you might get sunburnt.</a:t>
             </a:r>
             <a:endParaRPr lang="en-US" sz="1500" dirty="0"/>
           </a:p>
@@ -44111,7 +43901,7 @@
                 <a:ea typeface="Calibri" pitchFamily="34" charset="-122"/>
                 <a:cs typeface="Calibri" pitchFamily="34" charset="-120"/>
               </a:rPr>
-              <a:t>The teacher explained that this rule applies to every student in the school, not just our class.</a:t>
+              <a:t>The teacher asked the students to submit their application for the school leadership programme by Friday.</a:t>
             </a:r>
             <a:endParaRPr lang="en-US" sz="1500" dirty="0"/>
           </a:p>
@@ -44275,7 +44065,7 @@
                 <a:ea typeface="Calibri" pitchFamily="34" charset="-122"/>
                 <a:cs typeface="Calibri" pitchFamily="34" charset="-120"/>
               </a:rPr>
-              <a:t>Mia filled out her application carefully before sending it to the art competition organisers.</a:t>
+              <a:t>We need to check whether the same rules are applicable to all students in the competition.</a:t>
             </a:r>
             <a:endParaRPr lang="en-US" sz="1500" dirty="0"/>
           </a:p>
